--- a/FIM_BookJ1_Fondations_Mission_V6-01062026SHY-TE.pptx
+++ b/FIM_BookJ1_Fondations_Mission_V6-01062026SHY-TE.pptx
@@ -8,6 +8,7 @@
     <p:sldId id="256" r:id="rId7"/>
     <p:sldId id="257" r:id="rId8"/>
     <p:sldId id="258" r:id="rId9"/>
+    <p:sldId id="259" r:id="rId10"/>
   </p:sldIdLst>
   <p:sldSz cx="12188952" cy="6858000" type="screen4x3"/>
   <p:notesSz cx="6858000" cy="9144000"/>
@@ -3142,13 +3143,13 @@
         <p:spPr>
           <a:xfrm>
             <a:off x="0" y="0"/>
-            <a:ext cx="12188952" cy="2377440"/>
+            <a:ext cx="12188952" cy="2286000"/>
           </a:xfrm>
           <a:prstGeom prst="rect">
             <a:avLst/>
           </a:prstGeom>
           <a:solidFill>
-            <a:srgbClr val="005050"/>
+            <a:srgbClr val="005555"/>
           </a:solidFill>
           <a:ln>
             <a:noFill/>
@@ -3184,14 +3185,14 @@
         </p:nvSpPr>
         <p:spPr>
           <a:xfrm>
-            <a:off x="0" y="2331720"/>
-            <a:ext cx="12188952" cy="91440"/>
+            <a:off x="0" y="2267712"/>
+            <a:ext cx="12188952" cy="73152"/>
           </a:xfrm>
           <a:prstGeom prst="rect">
             <a:avLst/>
           </a:prstGeom>
           <a:solidFill>
-            <a:srgbClr val="C9A84C"/>
+            <a:srgbClr val="FF0000"/>
           </a:solidFill>
           <a:ln>
             <a:noFill/>
@@ -3221,14 +3222,57 @@
       </p:sp>
       <p:sp>
         <p:nvSpPr>
-          <p:cNvPr id="5" name="TextBox 4"/>
+          <p:cNvPr id="5" name="Rectangle 4"/>
+          <p:cNvSpPr/>
+          <p:nvPr/>
+        </p:nvSpPr>
+        <p:spPr>
+          <a:xfrm>
+            <a:off x="274320" y="109728"/>
+            <a:ext cx="2926080" cy="822960"/>
+          </a:xfrm>
+          <a:prstGeom prst="rect">
+            <a:avLst/>
+          </a:prstGeom>
+          <a:solidFill>
+            <a:srgbClr val="008080"/>
+          </a:solidFill>
+          <a:ln>
+            <a:noFill/>
+          </a:ln>
+        </p:spPr>
+        <p:style>
+          <a:lnRef idx="1">
+            <a:schemeClr val="accent1"/>
+          </a:lnRef>
+          <a:fillRef idx="3">
+            <a:schemeClr val="accent1"/>
+          </a:fillRef>
+          <a:effectRef idx="2">
+            <a:schemeClr val="accent1"/>
+          </a:effectRef>
+          <a:fontRef idx="minor">
+            <a:schemeClr val="lt1"/>
+          </a:fontRef>
+        </p:style>
+        <p:txBody>
+          <a:bodyPr rtlCol="0" anchor="ctr"/>
+          <a:lstStyle/>
+          <a:p>
+            <a:pPr algn="ctr"/>
+          </a:p>
+        </p:txBody>
+      </p:sp>
+      <p:sp>
+        <p:nvSpPr>
+          <p:cNvPr id="6" name="TextBox 5"/>
           <p:cNvSpPr txBox="1"/>
           <p:nvPr/>
         </p:nvSpPr>
         <p:spPr>
           <a:xfrm>
-            <a:off x="365760" y="182880"/>
-            <a:ext cx="3657600" cy="365760"/>
+            <a:off x="320040" y="118872"/>
+            <a:ext cx="1097280" cy="804672"/>
           </a:xfrm>
           <a:prstGeom prst="rect">
             <a:avLst/>
@@ -3243,26 +3287,137 @@
           <a:p>
             <a:pPr algn="l"/>
             <a:r>
-              <a:rPr sz="1000" b="1" i="0">
+              <a:rPr sz="3600" b="1" i="0">
                 <a:solidFill>
-                  <a:srgbClr val="C9A84C"/>
+                  <a:srgbClr val="FFFFFF"/>
                 </a:solidFill>
               </a:rPr>
-              <a:t>BOOK J1 · Journée 1</a:t>
-            </a:r>
-          </a:p>
-        </p:txBody>
-      </p:sp>
-      <p:sp>
-        <p:nvSpPr>
-          <p:cNvPr id="6" name="TextBox 5"/>
+              <a:t>SHY</a:t>
+            </a:r>
+          </a:p>
+        </p:txBody>
+      </p:sp>
+      <p:sp>
+        <p:nvSpPr>
+          <p:cNvPr id="7" name="TextBox 6"/>
           <p:cNvSpPr txBox="1"/>
           <p:nvPr/>
         </p:nvSpPr>
         <p:spPr>
           <a:xfrm>
-            <a:off x="457200" y="502920"/>
-            <a:ext cx="11247120" cy="1371600"/>
+            <a:off x="1371600" y="347472"/>
+            <a:ext cx="1828800" cy="411480"/>
+          </a:xfrm>
+          <a:prstGeom prst="rect">
+            <a:avLst/>
+          </a:prstGeom>
+          <a:noFill/>
+        </p:spPr>
+        <p:txBody>
+          <a:bodyPr wrap="square">
+            <a:spAutoFit/>
+          </a:bodyPr>
+          <a:lstStyle/>
+          <a:p>
+            <a:pPr algn="l"/>
+            <a:r>
+              <a:rPr sz="1400" b="1" i="0">
+                <a:solidFill>
+                  <a:srgbClr val="FFFFFF"/>
+                </a:solidFill>
+              </a:rPr>
+              <a:t>Performance</a:t>
+            </a:r>
+          </a:p>
+        </p:txBody>
+      </p:sp>
+      <p:sp>
+        <p:nvSpPr>
+          <p:cNvPr id="8" name="Rectangle 7"/>
+          <p:cNvSpPr/>
+          <p:nvPr/>
+        </p:nvSpPr>
+        <p:spPr>
+          <a:xfrm>
+            <a:off x="3337560" y="164592"/>
+            <a:ext cx="36576" cy="658368"/>
+          </a:xfrm>
+          <a:prstGeom prst="rect">
+            <a:avLst/>
+          </a:prstGeom>
+          <a:solidFill>
+            <a:srgbClr val="FF0000"/>
+          </a:solidFill>
+          <a:ln>
+            <a:noFill/>
+          </a:ln>
+        </p:spPr>
+        <p:style>
+          <a:lnRef idx="1">
+            <a:schemeClr val="accent1"/>
+          </a:lnRef>
+          <a:fillRef idx="3">
+            <a:schemeClr val="accent1"/>
+          </a:fillRef>
+          <a:effectRef idx="2">
+            <a:schemeClr val="accent1"/>
+          </a:effectRef>
+          <a:fontRef idx="minor">
+            <a:schemeClr val="lt1"/>
+          </a:fontRef>
+        </p:style>
+        <p:txBody>
+          <a:bodyPr rtlCol="0" anchor="ctr"/>
+          <a:lstStyle/>
+          <a:p>
+            <a:pPr algn="ctr"/>
+          </a:p>
+        </p:txBody>
+      </p:sp>
+      <p:sp>
+        <p:nvSpPr>
+          <p:cNvPr id="9" name="TextBox 8"/>
+          <p:cNvSpPr txBox="1"/>
+          <p:nvPr/>
+        </p:nvSpPr>
+        <p:spPr>
+          <a:xfrm>
+            <a:off x="3474720" y="164592"/>
+            <a:ext cx="8503920" cy="347472"/>
+          </a:xfrm>
+          <a:prstGeom prst="rect">
+            <a:avLst/>
+          </a:prstGeom>
+          <a:noFill/>
+        </p:spPr>
+        <p:txBody>
+          <a:bodyPr wrap="square">
+            <a:spAutoFit/>
+          </a:bodyPr>
+          <a:lstStyle/>
+          <a:p>
+            <a:pPr algn="l"/>
+            <a:r>
+              <a:rPr sz="900" b="1" i="0">
+                <a:solidFill>
+                  <a:srgbClr val="BBEEEE"/>
+                </a:solidFill>
+              </a:rPr>
+              <a:t>BOOK J1  ·  Journée 1  ·  Identité &amp; Valeurs</a:t>
+            </a:r>
+          </a:p>
+        </p:txBody>
+      </p:sp>
+      <p:sp>
+        <p:nvSpPr>
+          <p:cNvPr id="10" name="TextBox 9"/>
+          <p:cNvSpPr txBox="1"/>
+          <p:nvPr/>
+        </p:nvSpPr>
+        <p:spPr>
+          <a:xfrm>
+            <a:off x="320040" y="960120"/>
+            <a:ext cx="11521440" cy="1143000"/>
           </a:xfrm>
           <a:prstGeom prst="rect">
             <a:avLst/>
@@ -3289,14 +3444,14 @@
       </p:sp>
       <p:sp>
         <p:nvSpPr>
-          <p:cNvPr id="7" name="TextBox 6"/>
+          <p:cNvPr id="11" name="TextBox 10"/>
           <p:cNvSpPr txBox="1"/>
           <p:nvPr/>
         </p:nvSpPr>
         <p:spPr>
           <a:xfrm>
-            <a:off x="457200" y="1828800"/>
-            <a:ext cx="11247120" cy="502920"/>
+            <a:off x="320040" y="1920240"/>
+            <a:ext cx="11521440" cy="347472"/>
           </a:xfrm>
           <a:prstGeom prst="rect">
             <a:avLst/>
@@ -3311,26 +3466,69 @@
           <a:p>
             <a:pPr algn="l"/>
             <a:r>
-              <a:rPr sz="1300" b="0" i="1">
+              <a:rPr sz="1200" b="0" i="1">
                 <a:solidFill>
-                  <a:srgbClr val="DDEEEE"/>
+                  <a:srgbClr val="CCEEEE"/>
                 </a:solidFill>
               </a:rPr>
-              <a:t>Ancrage identitaire du fundraiser · Valeurs · Posture · Raison d'agir</a:t>
-            </a:r>
-          </a:p>
-        </p:txBody>
-      </p:sp>
-      <p:sp>
-        <p:nvSpPr>
-          <p:cNvPr id="8" name="TextBox 7"/>
-          <p:cNvSpPr txBox="1"/>
+              <a:t>Qui êtes-vous ? Pourquoi êtes-vous là ? Quelle est votre mission ?</a:t>
+            </a:r>
+          </a:p>
+        </p:txBody>
+      </p:sp>
+      <p:sp>
+        <p:nvSpPr>
+          <p:cNvPr id="12" name="Rectangle 11"/>
+          <p:cNvSpPr/>
           <p:nvPr/>
         </p:nvSpPr>
         <p:spPr>
           <a:xfrm>
             <a:off x="0" y="6492240"/>
             <a:ext cx="12188952" cy="365760"/>
+          </a:xfrm>
+          <a:prstGeom prst="rect">
+            <a:avLst/>
+          </a:prstGeom>
+          <a:solidFill>
+            <a:srgbClr val="005555"/>
+          </a:solidFill>
+          <a:ln>
+            <a:noFill/>
+          </a:ln>
+        </p:spPr>
+        <p:style>
+          <a:lnRef idx="1">
+            <a:schemeClr val="accent1"/>
+          </a:lnRef>
+          <a:fillRef idx="3">
+            <a:schemeClr val="accent1"/>
+          </a:fillRef>
+          <a:effectRef idx="2">
+            <a:schemeClr val="accent1"/>
+          </a:effectRef>
+          <a:fontRef idx="minor">
+            <a:schemeClr val="lt1"/>
+          </a:fontRef>
+        </p:style>
+        <p:txBody>
+          <a:bodyPr rtlCol="0" anchor="ctr"/>
+          <a:lstStyle/>
+          <a:p>
+            <a:pPr algn="ctr"/>
+          </a:p>
+        </p:txBody>
+      </p:sp>
+      <p:sp>
+        <p:nvSpPr>
+          <p:cNvPr id="13" name="TextBox 12"/>
+          <p:cNvSpPr txBox="1"/>
+          <p:nvPr/>
+        </p:nvSpPr>
+        <p:spPr>
+          <a:xfrm>
+            <a:off x="0" y="6519672"/>
+            <a:ext cx="12188952" cy="274320"/>
           </a:xfrm>
           <a:prstGeom prst="rect">
             <a:avLst/>
@@ -3347,10 +3545,46 @@
             <a:r>
               <a:rPr sz="900" b="0" i="0">
                 <a:solidFill>
-                  <a:srgbClr val="888888"/>
+                  <a:srgbClr val="FFFFFF"/>
                 </a:solidFill>
               </a:rPr>
-              <a:t>SHY-Performance · V6-01062026SHY-TE · Référentiel UM6P/CMC 2025</a:t>
+              <a:t>SHY-Performance  ·  Formation FIM  ·  V6-01062026SHY-TE</a:t>
+            </a:r>
+          </a:p>
+        </p:txBody>
+      </p:sp>
+      <p:sp>
+        <p:nvSpPr>
+          <p:cNvPr id="14" name="TextBox 13"/>
+          <p:cNvSpPr txBox="1"/>
+          <p:nvPr/>
+        </p:nvSpPr>
+        <p:spPr>
+          <a:xfrm>
+            <a:off x="457200" y="2514600"/>
+            <a:ext cx="11247120" cy="1097280"/>
+          </a:xfrm>
+          <a:prstGeom prst="rect">
+            <a:avLst/>
+          </a:prstGeom>
+          <a:noFill/>
+        </p:spPr>
+        <p:txBody>
+          <a:bodyPr wrap="square">
+            <a:spAutoFit/>
+          </a:bodyPr>
+          <a:lstStyle/>
+          <a:p>
+            <a:pPr algn="l"/>
+            <a:r>
+              <a:rPr sz="1400" b="0" i="0">
+                <a:solidFill>
+                  <a:srgbClr val="1A1A1A"/>
+                </a:solidFill>
+              </a:rPr>
+              <a:t>Aujourd'hui, vous allez ancrer votre identité de fundraiser.
+Vous comprendrez la cause que vous défendez, les valeurs qui vous guident
+et la posture qui fait toute la différence sur le terrain.</a:t>
             </a:r>
           </a:p>
         </p:txBody>
@@ -3425,13 +3659,13 @@
         <p:spPr>
           <a:xfrm>
             <a:off x="0" y="0"/>
-            <a:ext cx="12188952" cy="685800"/>
+            <a:ext cx="12188952" cy="658368"/>
           </a:xfrm>
           <a:prstGeom prst="rect">
             <a:avLst/>
           </a:prstGeom>
           <a:solidFill>
-            <a:srgbClr val="005050"/>
+            <a:srgbClr val="005555"/>
           </a:solidFill>
           <a:ln>
             <a:noFill/>
@@ -3467,14 +3701,14 @@
         </p:nvSpPr>
         <p:spPr>
           <a:xfrm>
-            <a:off x="0" y="667512"/>
-            <a:ext cx="12188952" cy="36576"/>
+            <a:off x="0" y="640080"/>
+            <a:ext cx="12188952" cy="54864"/>
           </a:xfrm>
           <a:prstGeom prst="rect">
             <a:avLst/>
           </a:prstGeom>
           <a:solidFill>
-            <a:srgbClr val="C9A84C"/>
+            <a:srgbClr val="FF0000"/>
           </a:solidFill>
           <a:ln>
             <a:noFill/>
@@ -3510,8 +3744,8 @@
         </p:nvSpPr>
         <p:spPr>
           <a:xfrm>
-            <a:off x="274320" y="73152"/>
-            <a:ext cx="11612880" cy="566928"/>
+            <a:off x="164592" y="64008"/>
+            <a:ext cx="685800" cy="530352"/>
           </a:xfrm>
           <a:prstGeom prst="rect">
             <a:avLst/>
@@ -3526,66 +3760,32 @@
           <a:p>
             <a:pPr algn="l"/>
             <a:r>
-              <a:rPr sz="1800" b="1" i="0">
+              <a:rPr sz="2000" b="1" i="0">
                 <a:solidFill>
                   <a:srgbClr val="FFFFFF"/>
                 </a:solidFill>
               </a:rPr>
-              <a:t>Objectifs &amp; Séquence Kolb — Journée 1</a:t>
-            </a:r>
-          </a:p>
-        </p:txBody>
-      </p:sp>
-      <p:sp>
-        <p:nvSpPr>
-          <p:cNvPr id="6" name="TextBox 5"/>
-          <p:cNvSpPr txBox="1"/>
-          <p:nvPr/>
-        </p:nvSpPr>
-        <p:spPr>
-          <a:xfrm>
-            <a:off x="0" y="6492240"/>
-            <a:ext cx="12188952" cy="365760"/>
-          </a:xfrm>
-          <a:prstGeom prst="rect">
-            <a:avLst/>
-          </a:prstGeom>
-          <a:noFill/>
-        </p:spPr>
-        <p:txBody>
-          <a:bodyPr wrap="square">
-            <a:spAutoFit/>
-          </a:bodyPr>
-          <a:lstStyle/>
-          <a:p>
-            <a:pPr algn="ctr"/>
-            <a:r>
-              <a:rPr sz="800" b="0" i="0">
-                <a:solidFill>
-                  <a:srgbClr val="888888"/>
-                </a:solidFill>
-              </a:rPr>
-              <a:t>SHY-Performance · V6-01062026SHY-TE</a:t>
-            </a:r>
-          </a:p>
-        </p:txBody>
-      </p:sp>
-      <p:sp>
-        <p:nvSpPr>
-          <p:cNvPr id="7" name="Rectangle 6"/>
+              <a:t>SHY</a:t>
+            </a:r>
+          </a:p>
+        </p:txBody>
+      </p:sp>
+      <p:sp>
+        <p:nvSpPr>
+          <p:cNvPr id="6" name="Rectangle 5"/>
           <p:cNvSpPr/>
           <p:nvPr/>
         </p:nvSpPr>
         <p:spPr>
           <a:xfrm>
-            <a:off x="274320" y="868680"/>
-            <a:ext cx="5486400" cy="347472"/>
+            <a:off x="914400" y="91440"/>
+            <a:ext cx="36576" cy="475488"/>
           </a:xfrm>
           <a:prstGeom prst="rect">
             <a:avLst/>
           </a:prstGeom>
           <a:solidFill>
-            <a:srgbClr val="007A7A"/>
+            <a:srgbClr val="FF0000"/>
           </a:solidFill>
           <a:ln>
             <a:noFill/>
@@ -3615,14 +3815,14 @@
       </p:sp>
       <p:sp>
         <p:nvSpPr>
-          <p:cNvPr id="8" name="TextBox 7"/>
+          <p:cNvPr id="7" name="TextBox 6"/>
           <p:cNvSpPr txBox="1"/>
           <p:nvPr/>
         </p:nvSpPr>
         <p:spPr>
           <a:xfrm>
-            <a:off x="365760" y="905256"/>
-            <a:ext cx="5303520" cy="292608"/>
+            <a:off x="1024128" y="91440"/>
+            <a:ext cx="10881360" cy="475488"/>
           </a:xfrm>
           <a:prstGeom prst="rect">
             <a:avLst/>
@@ -3637,32 +3837,32 @@
           <a:p>
             <a:pPr algn="l"/>
             <a:r>
-              <a:rPr sz="1200" b="1" i="0">
+              <a:rPr sz="1700" b="1" i="0">
                 <a:solidFill>
                   <a:srgbClr val="FFFFFF"/>
                 </a:solidFill>
               </a:rPr>
-              <a:t>Objectifs V6 — Bloom Niv. 1–3</a:t>
-            </a:r>
-          </a:p>
-        </p:txBody>
-      </p:sp>
-      <p:sp>
-        <p:nvSpPr>
-          <p:cNvPr id="9" name="Rectangle 8"/>
+              <a:t>Journée 1 — Ce que vous allez vivre aujourd'hui</a:t>
+            </a:r>
+          </a:p>
+        </p:txBody>
+      </p:sp>
+      <p:sp>
+        <p:nvSpPr>
+          <p:cNvPr id="8" name="Rectangle 7"/>
           <p:cNvSpPr/>
           <p:nvPr/>
         </p:nvSpPr>
         <p:spPr>
           <a:xfrm>
-            <a:off x="6126480" y="868680"/>
-            <a:ext cx="5486400" cy="347472"/>
+            <a:off x="0" y="6492240"/>
+            <a:ext cx="12188952" cy="365760"/>
           </a:xfrm>
           <a:prstGeom prst="rect">
             <a:avLst/>
           </a:prstGeom>
           <a:solidFill>
-            <a:srgbClr val="007A7A"/>
+            <a:srgbClr val="005555"/>
           </a:solidFill>
           <a:ln>
             <a:noFill/>
@@ -3692,14 +3892,14 @@
       </p:sp>
       <p:sp>
         <p:nvSpPr>
-          <p:cNvPr id="10" name="TextBox 9"/>
+          <p:cNvPr id="9" name="TextBox 8"/>
           <p:cNvSpPr txBox="1"/>
           <p:nvPr/>
         </p:nvSpPr>
         <p:spPr>
           <a:xfrm>
-            <a:off x="6217920" y="905256"/>
-            <a:ext cx="5303520" cy="292608"/>
+            <a:off x="0" y="6519672"/>
+            <a:ext cx="12188952" cy="274320"/>
           </a:xfrm>
           <a:prstGeom prst="rect">
             <a:avLst/>
@@ -3712,306 +3912,34 @@
           </a:bodyPr>
           <a:lstStyle/>
           <a:p>
-            <a:pPr algn="l"/>
-            <a:r>
-              <a:rPr sz="1200" b="1" i="0">
+            <a:pPr algn="ctr"/>
+            <a:r>
+              <a:rPr sz="900" b="0" i="0">
                 <a:solidFill>
                   <a:srgbClr val="FFFFFF"/>
                 </a:solidFill>
               </a:rPr>
-              <a:t>Contenu clé</a:t>
-            </a:r>
-          </a:p>
-        </p:txBody>
-      </p:sp>
-      <p:sp>
-        <p:nvSpPr>
-          <p:cNvPr id="11" name="TextBox 10"/>
-          <p:cNvSpPr txBox="1"/>
-          <p:nvPr/>
-        </p:nvSpPr>
-        <p:spPr>
-          <a:xfrm>
-            <a:off x="365760" y="1280160"/>
-            <a:ext cx="5303520" cy="347472"/>
-          </a:xfrm>
-          <a:prstGeom prst="rect">
-            <a:avLst/>
-          </a:prstGeom>
-          <a:noFill/>
-        </p:spPr>
-        <p:txBody>
-          <a:bodyPr wrap="square">
-            <a:spAutoFit/>
-          </a:bodyPr>
-          <a:lstStyle/>
-          <a:p>
-            <a:pPr algn="l"/>
-            <a:r>
-              <a:rPr sz="1100" b="0" i="0">
-                <a:solidFill>
-                  <a:srgbClr val="1A1A1A"/>
-                </a:solidFill>
-              </a:rPr>
-              <a:t>• Nommer les missions et valeurs de l'UNICEF au Maroc</a:t>
-            </a:r>
-          </a:p>
-        </p:txBody>
-      </p:sp>
-      <p:sp>
-        <p:nvSpPr>
-          <p:cNvPr id="12" name="TextBox 11"/>
-          <p:cNvSpPr txBox="1"/>
-          <p:nvPr/>
-        </p:nvSpPr>
-        <p:spPr>
-          <a:xfrm>
-            <a:off x="365760" y="1645919"/>
-            <a:ext cx="5303520" cy="347472"/>
-          </a:xfrm>
-          <a:prstGeom prst="rect">
-            <a:avLst/>
-          </a:prstGeom>
-          <a:noFill/>
-        </p:spPr>
-        <p:txBody>
-          <a:bodyPr wrap="square">
-            <a:spAutoFit/>
-          </a:bodyPr>
-          <a:lstStyle/>
-          <a:p>
-            <a:pPr algn="l"/>
-            <a:r>
-              <a:rPr sz="1100" b="0" i="0">
-                <a:solidFill>
-                  <a:srgbClr val="1A1A1A"/>
-                </a:solidFill>
-              </a:rPr>
-              <a:t>• Expliquer le cadre éthique et juridique de la collecte</a:t>
-            </a:r>
-          </a:p>
-        </p:txBody>
-      </p:sp>
-      <p:sp>
-        <p:nvSpPr>
-          <p:cNvPr id="13" name="TextBox 12"/>
-          <p:cNvSpPr txBox="1"/>
-          <p:nvPr/>
-        </p:nvSpPr>
-        <p:spPr>
-          <a:xfrm>
-            <a:off x="365760" y="2011679"/>
-            <a:ext cx="5303520" cy="347472"/>
-          </a:xfrm>
-          <a:prstGeom prst="rect">
-            <a:avLst/>
-          </a:prstGeom>
-          <a:noFill/>
-        </p:spPr>
-        <p:txBody>
-          <a:bodyPr wrap="square">
-            <a:spAutoFit/>
-          </a:bodyPr>
-          <a:lstStyle/>
-          <a:p>
-            <a:pPr algn="l"/>
-            <a:r>
-              <a:rPr sz="1100" b="0" i="0">
-                <a:solidFill>
-                  <a:srgbClr val="1A1A1A"/>
-                </a:solidFill>
-              </a:rPr>
-              <a:t>• Démontrer la posture physique et vocale d'un fundraiser</a:t>
-            </a:r>
-          </a:p>
-        </p:txBody>
-      </p:sp>
-      <p:sp>
-        <p:nvSpPr>
-          <p:cNvPr id="14" name="TextBox 13"/>
-          <p:cNvSpPr txBox="1"/>
-          <p:nvPr/>
-        </p:nvSpPr>
-        <p:spPr>
-          <a:xfrm>
-            <a:off x="365760" y="2377439"/>
-            <a:ext cx="5303520" cy="347472"/>
-          </a:xfrm>
-          <a:prstGeom prst="rect">
-            <a:avLst/>
-          </a:prstGeom>
-          <a:noFill/>
-        </p:spPr>
-        <p:txBody>
-          <a:bodyPr wrap="square">
-            <a:spAutoFit/>
-          </a:bodyPr>
-          <a:lstStyle/>
-          <a:p>
-            <a:pPr algn="l"/>
-            <a:r>
-              <a:rPr sz="1100" b="0" i="0">
-                <a:solidFill>
-                  <a:srgbClr val="1A1A1A"/>
-                </a:solidFill>
-              </a:rPr>
-              <a:t>• Différencier don ponctuel et engagement mensuel</a:t>
-            </a:r>
-          </a:p>
-        </p:txBody>
-      </p:sp>
-      <p:sp>
-        <p:nvSpPr>
-          <p:cNvPr id="15" name="TextBox 14"/>
-          <p:cNvSpPr txBox="1"/>
-          <p:nvPr/>
-        </p:nvSpPr>
-        <p:spPr>
-          <a:xfrm>
-            <a:off x="6217920" y="1280160"/>
-            <a:ext cx="5303520" cy="347472"/>
-          </a:xfrm>
-          <a:prstGeom prst="rect">
-            <a:avLst/>
-          </a:prstGeom>
-          <a:noFill/>
-        </p:spPr>
-        <p:txBody>
-          <a:bodyPr wrap="square">
-            <a:spAutoFit/>
-          </a:bodyPr>
-          <a:lstStyle/>
-          <a:p>
-            <a:pPr algn="l"/>
-            <a:r>
-              <a:rPr sz="1100" b="0" i="0">
-                <a:solidFill>
-                  <a:srgbClr val="1A1A1A"/>
-                </a:solidFill>
-              </a:rPr>
-              <a:t>• Qu'est-ce qu'un fundraiser de rue ? Rôle et légitimité</a:t>
-            </a:r>
-          </a:p>
-        </p:txBody>
-      </p:sp>
-      <p:sp>
-        <p:nvSpPr>
-          <p:cNvPr id="16" name="TextBox 15"/>
-          <p:cNvSpPr txBox="1"/>
-          <p:nvPr/>
-        </p:nvSpPr>
-        <p:spPr>
-          <a:xfrm>
-            <a:off x="6217920" y="1645919"/>
-            <a:ext cx="5303520" cy="347472"/>
-          </a:xfrm>
-          <a:prstGeom prst="rect">
-            <a:avLst/>
-          </a:prstGeom>
-          <a:noFill/>
-        </p:spPr>
-        <p:txBody>
-          <a:bodyPr wrap="square">
-            <a:spAutoFit/>
-          </a:bodyPr>
-          <a:lstStyle/>
-          <a:p>
-            <a:pPr algn="l"/>
-            <a:r>
-              <a:rPr sz="1100" b="0" i="0">
-                <a:solidFill>
-                  <a:srgbClr val="1A1A1A"/>
-                </a:solidFill>
-              </a:rPr>
-              <a:t>• Mission UNICEF Maroc — chiffres 2024–2026</a:t>
-            </a:r>
-          </a:p>
-        </p:txBody>
-      </p:sp>
-      <p:sp>
-        <p:nvSpPr>
-          <p:cNvPr id="17" name="TextBox 16"/>
-          <p:cNvSpPr txBox="1"/>
-          <p:nvPr/>
-        </p:nvSpPr>
-        <p:spPr>
-          <a:xfrm>
-            <a:off x="6217920" y="2011679"/>
-            <a:ext cx="5303520" cy="347472"/>
-          </a:xfrm>
-          <a:prstGeom prst="rect">
-            <a:avLst/>
-          </a:prstGeom>
-          <a:noFill/>
-        </p:spPr>
-        <p:txBody>
-          <a:bodyPr wrap="square">
-            <a:spAutoFit/>
-          </a:bodyPr>
-          <a:lstStyle/>
-          <a:p>
-            <a:pPr algn="l"/>
-            <a:r>
-              <a:rPr sz="1100" b="0" i="0">
-                <a:solidFill>
-                  <a:srgbClr val="1A1A1A"/>
-                </a:solidFill>
-              </a:rPr>
-              <a:t>• Cadre légal Maroc (Loi 75-00) + déontologie</a:t>
-            </a:r>
-          </a:p>
-        </p:txBody>
-      </p:sp>
-      <p:sp>
-        <p:nvSpPr>
-          <p:cNvPr id="18" name="TextBox 17"/>
-          <p:cNvSpPr txBox="1"/>
-          <p:nvPr/>
-        </p:nvSpPr>
-        <p:spPr>
-          <a:xfrm>
-            <a:off x="6217920" y="2377439"/>
-            <a:ext cx="5303520" cy="347472"/>
-          </a:xfrm>
-          <a:prstGeom prst="rect">
-            <a:avLst/>
-          </a:prstGeom>
-          <a:noFill/>
-        </p:spPr>
-        <p:txBody>
-          <a:bodyPr wrap="square">
-            <a:spAutoFit/>
-          </a:bodyPr>
-          <a:lstStyle/>
-          <a:p>
-            <a:pPr algn="l"/>
-            <a:r>
-              <a:rPr sz="1100" b="0" i="0">
-                <a:solidFill>
-                  <a:srgbClr val="1A1A1A"/>
-                </a:solidFill>
-              </a:rPr>
-              <a:t>• Posture corporelle, contact visuel, ton de voix</a:t>
-            </a:r>
-          </a:p>
-        </p:txBody>
-      </p:sp>
-      <p:sp>
-        <p:nvSpPr>
-          <p:cNvPr id="19" name="Rectangle 18"/>
+              <a:t>SHY-Performance  ·  Formation FIM  ·  V6-01062026SHY-TE</a:t>
+            </a:r>
+          </a:p>
+        </p:txBody>
+      </p:sp>
+      <p:sp>
+        <p:nvSpPr>
+          <p:cNvPr id="10" name="Rectangle 9"/>
           <p:cNvSpPr/>
           <p:nvPr/>
         </p:nvSpPr>
         <p:spPr>
           <a:xfrm>
-            <a:off x="274320" y="4160520"/>
-            <a:ext cx="2882646" cy="256032"/>
+            <a:off x="274320" y="804672"/>
+            <a:ext cx="2910078" cy="274320"/>
           </a:xfrm>
           <a:prstGeom prst="rect">
             <a:avLst/>
           </a:prstGeom>
           <a:solidFill>
-            <a:srgbClr val="2E86AB"/>
+            <a:srgbClr val="005555"/>
           </a:solidFill>
           <a:ln>
             <a:noFill/>
@@ -4041,14 +3969,14 @@
       </p:sp>
       <p:sp>
         <p:nvSpPr>
-          <p:cNvPr id="20" name="TextBox 19"/>
+          <p:cNvPr id="11" name="TextBox 10"/>
           <p:cNvSpPr txBox="1"/>
           <p:nvPr/>
         </p:nvSpPr>
         <p:spPr>
           <a:xfrm>
-            <a:off x="320040" y="4187952"/>
-            <a:ext cx="2791206" cy="201168"/>
+            <a:off x="347472" y="841248"/>
+            <a:ext cx="2763774" cy="219456"/>
           </a:xfrm>
           <a:prstGeom prst="rect">
             <a:avLst/>
@@ -4068,21 +3996,21 @@
                   <a:srgbClr val="FFFFFF"/>
                 </a:solidFill>
               </a:rPr>
-              <a:t>EC — Expérience Concrète</a:t>
-            </a:r>
-          </a:p>
-        </p:txBody>
-      </p:sp>
-      <p:sp>
-        <p:nvSpPr>
-          <p:cNvPr id="21" name="Rectangle 20"/>
+              <a:t>DÉCOUVERTE</a:t>
+            </a:r>
+          </a:p>
+        </p:txBody>
+      </p:sp>
+      <p:sp>
+        <p:nvSpPr>
+          <p:cNvPr id="12" name="Rectangle 11"/>
           <p:cNvSpPr/>
           <p:nvPr/>
         </p:nvSpPr>
         <p:spPr>
           <a:xfrm>
-            <a:off x="274320" y="4416552"/>
-            <a:ext cx="2882646" cy="1481328"/>
+            <a:off x="274320" y="1078992"/>
+            <a:ext cx="2910078" cy="3840480"/>
           </a:xfrm>
           <a:prstGeom prst="rect">
             <a:avLst/>
@@ -4092,7 +4020,7 @@
           </a:solidFill>
           <a:ln w="12700">
             <a:solidFill>
-              <a:srgbClr val="2E86AB"/>
+              <a:srgbClr val="005555"/>
             </a:solidFill>
           </a:ln>
         </p:spPr>
@@ -4120,14 +4048,14 @@
       </p:sp>
       <p:sp>
         <p:nvSpPr>
-          <p:cNvPr id="22" name="TextBox 21"/>
+          <p:cNvPr id="13" name="TextBox 12"/>
           <p:cNvSpPr txBox="1"/>
           <p:nvPr/>
         </p:nvSpPr>
         <p:spPr>
           <a:xfrm>
-            <a:off x="365760" y="4453128"/>
-            <a:ext cx="2699765" cy="1371600"/>
+            <a:off x="384048" y="1124712"/>
+            <a:ext cx="2690622" cy="3657600"/>
           </a:xfrm>
           <a:prstGeom prst="rect">
             <a:avLst/>
@@ -4147,27 +4075,29 @@
                   <a:srgbClr val="1A1A1A"/>
                 </a:solidFill>
               </a:rPr>
-              <a:t>Visionnage témoignage bénéficiaire UNICEF (3 min) + réaction individuelle notée</a:t>
-            </a:r>
-          </a:p>
-        </p:txBody>
-      </p:sp>
-      <p:sp>
-        <p:nvSpPr>
-          <p:cNvPr id="23" name="Rectangle 22"/>
+              <a:t>Vous regardez le témoignage
+d'un enfant bénéficiaire.
+Notez ce que vous ressentez.</a:t>
+            </a:r>
+          </a:p>
+        </p:txBody>
+      </p:sp>
+      <p:sp>
+        <p:nvSpPr>
+          <p:cNvPr id="14" name="Rectangle 13"/>
           <p:cNvSpPr/>
           <p:nvPr/>
         </p:nvSpPr>
         <p:spPr>
           <a:xfrm>
-            <a:off x="3184397" y="4160520"/>
-            <a:ext cx="2882646" cy="256032"/>
+            <a:off x="3202686" y="804672"/>
+            <a:ext cx="2910078" cy="274320"/>
           </a:xfrm>
           <a:prstGeom prst="rect">
             <a:avLst/>
           </a:prstGeom>
           <a:solidFill>
-            <a:srgbClr val="4CAF82"/>
+            <a:srgbClr val="008080"/>
           </a:solidFill>
           <a:ln>
             <a:noFill/>
@@ -4197,14 +4127,14 @@
       </p:sp>
       <p:sp>
         <p:nvSpPr>
-          <p:cNvPr id="24" name="TextBox 23"/>
+          <p:cNvPr id="15" name="TextBox 14"/>
           <p:cNvSpPr txBox="1"/>
           <p:nvPr/>
         </p:nvSpPr>
         <p:spPr>
           <a:xfrm>
-            <a:off x="3230117" y="4187952"/>
-            <a:ext cx="2791206" cy="201168"/>
+            <a:off x="3275838" y="841248"/>
+            <a:ext cx="2763774" cy="219456"/>
           </a:xfrm>
           <a:prstGeom prst="rect">
             <a:avLst/>
@@ -4224,21 +4154,21 @@
                   <a:srgbClr val="FFFFFF"/>
                 </a:solidFill>
               </a:rPr>
-              <a:t>OR — Observation Réfléchie</a:t>
-            </a:r>
-          </a:p>
-        </p:txBody>
-      </p:sp>
-      <p:sp>
-        <p:nvSpPr>
-          <p:cNvPr id="25" name="Rectangle 24"/>
+              <a:t>ÉCHANGE</a:t>
+            </a:r>
+          </a:p>
+        </p:txBody>
+      </p:sp>
+      <p:sp>
+        <p:nvSpPr>
+          <p:cNvPr id="16" name="Rectangle 15"/>
           <p:cNvSpPr/>
           <p:nvPr/>
         </p:nvSpPr>
         <p:spPr>
           <a:xfrm>
-            <a:off x="3184397" y="4416552"/>
-            <a:ext cx="2882646" cy="1481328"/>
+            <a:off x="3202686" y="1078992"/>
+            <a:ext cx="2910078" cy="3840480"/>
           </a:xfrm>
           <a:prstGeom prst="rect">
             <a:avLst/>
@@ -4248,7 +4178,7 @@
           </a:solidFill>
           <a:ln w="12700">
             <a:solidFill>
-              <a:srgbClr val="4CAF82"/>
+              <a:srgbClr val="008080"/>
             </a:solidFill>
           </a:ln>
         </p:spPr>
@@ -4276,14 +4206,14 @@
       </p:sp>
       <p:sp>
         <p:nvSpPr>
-          <p:cNvPr id="26" name="TextBox 25"/>
+          <p:cNvPr id="17" name="TextBox 16"/>
           <p:cNvSpPr txBox="1"/>
           <p:nvPr/>
         </p:nvSpPr>
         <p:spPr>
           <a:xfrm>
-            <a:off x="3275837" y="4453128"/>
-            <a:ext cx="2699765" cy="1371600"/>
+            <a:off x="3312414" y="1124712"/>
+            <a:ext cx="2690622" cy="3657600"/>
           </a:xfrm>
           <a:prstGeom prst="rect">
             <a:avLst/>
@@ -4303,27 +4233,29 @@
                   <a:srgbClr val="1A1A1A"/>
                 </a:solidFill>
               </a:rPr>
-              <a:t>Débriefing : 'Qu'avez-vous ressenti ? Qu'auriez-vous dit ?'</a:t>
-            </a:r>
-          </a:p>
-        </p:txBody>
-      </p:sp>
-      <p:sp>
-        <p:nvSpPr>
-          <p:cNvPr id="27" name="Rectangle 26"/>
+              <a:t>En groupe : 'Qu'avez-vous
+ressenti ? Qu'auriez-vous
+dit à cet instant ?'</a:t>
+            </a:r>
+          </a:p>
+        </p:txBody>
+      </p:sp>
+      <p:sp>
+        <p:nvSpPr>
+          <p:cNvPr id="18" name="Rectangle 17"/>
           <p:cNvSpPr/>
           <p:nvPr/>
         </p:nvSpPr>
         <p:spPr>
           <a:xfrm>
-            <a:off x="6094475" y="4160520"/>
-            <a:ext cx="2882646" cy="256032"/>
+            <a:off x="6131052" y="804672"/>
+            <a:ext cx="2910078" cy="274320"/>
           </a:xfrm>
           <a:prstGeom prst="rect">
             <a:avLst/>
           </a:prstGeom>
           <a:solidFill>
-            <a:srgbClr val="F4AE2D"/>
+            <a:srgbClr val="2A7A50"/>
           </a:solidFill>
           <a:ln>
             <a:noFill/>
@@ -4353,14 +4285,14 @@
       </p:sp>
       <p:sp>
         <p:nvSpPr>
-          <p:cNvPr id="28" name="TextBox 27"/>
+          <p:cNvPr id="19" name="TextBox 18"/>
           <p:cNvSpPr txBox="1"/>
           <p:nvPr/>
         </p:nvSpPr>
         <p:spPr>
           <a:xfrm>
-            <a:off x="6140195" y="4187952"/>
-            <a:ext cx="2791206" cy="201168"/>
+            <a:off x="6204204" y="841248"/>
+            <a:ext cx="2763774" cy="219456"/>
           </a:xfrm>
           <a:prstGeom prst="rect">
             <a:avLst/>
@@ -4380,21 +4312,21 @@
                   <a:srgbClr val="FFFFFF"/>
                 </a:solidFill>
               </a:rPr>
-              <a:t>CA — Conceptualisation</a:t>
-            </a:r>
-          </a:p>
-        </p:txBody>
-      </p:sp>
-      <p:sp>
-        <p:nvSpPr>
-          <p:cNvPr id="29" name="Rectangle 28"/>
+              <a:t>APPORT</a:t>
+            </a:r>
+          </a:p>
+        </p:txBody>
+      </p:sp>
+      <p:sp>
+        <p:nvSpPr>
+          <p:cNvPr id="20" name="Rectangle 19"/>
           <p:cNvSpPr/>
           <p:nvPr/>
         </p:nvSpPr>
         <p:spPr>
           <a:xfrm>
-            <a:off x="6094475" y="4416552"/>
-            <a:ext cx="2882646" cy="1481328"/>
+            <a:off x="6131052" y="1078992"/>
+            <a:ext cx="2910078" cy="3840480"/>
           </a:xfrm>
           <a:prstGeom prst="rect">
             <a:avLst/>
@@ -4404,7 +4336,7 @@
           </a:solidFill>
           <a:ln w="12700">
             <a:solidFill>
-              <a:srgbClr val="F4AE2D"/>
+              <a:srgbClr val="2A7A50"/>
             </a:solidFill>
           </a:ln>
         </p:spPr>
@@ -4432,14 +4364,14 @@
       </p:sp>
       <p:sp>
         <p:nvSpPr>
-          <p:cNvPr id="30" name="TextBox 29"/>
+          <p:cNvPr id="21" name="TextBox 20"/>
           <p:cNvSpPr txBox="1"/>
           <p:nvPr/>
         </p:nvSpPr>
         <p:spPr>
           <a:xfrm>
-            <a:off x="6185915" y="4453128"/>
-            <a:ext cx="2699765" cy="1371600"/>
+            <a:off x="6240780" y="1124712"/>
+            <a:ext cx="2690622" cy="3657600"/>
           </a:xfrm>
           <a:prstGeom prst="rect">
             <a:avLst/>
@@ -4459,27 +4391,29 @@
                   <a:srgbClr val="1A1A1A"/>
                 </a:solidFill>
               </a:rPr>
-              <a:t>Apport : structure UNICEF, chiffres clés, cadre légal Maroc</a:t>
-            </a:r>
-          </a:p>
-        </p:txBody>
-      </p:sp>
-      <p:sp>
-        <p:nvSpPr>
-          <p:cNvPr id="31" name="Rectangle 30"/>
+              <a:t>L'UNICEF en chiffres.
+La cause. Le cadre.
+Vos droits et devoirs.</a:t>
+            </a:r>
+          </a:p>
+        </p:txBody>
+      </p:sp>
+      <p:sp>
+        <p:nvSpPr>
+          <p:cNvPr id="22" name="Rectangle 21"/>
           <p:cNvSpPr/>
           <p:nvPr/>
         </p:nvSpPr>
         <p:spPr>
           <a:xfrm>
-            <a:off x="9004554" y="4160520"/>
-            <a:ext cx="2882646" cy="256032"/>
+            <a:off x="9059418" y="804672"/>
+            <a:ext cx="2910078" cy="274320"/>
           </a:xfrm>
           <a:prstGeom prst="rect">
             <a:avLst/>
           </a:prstGeom>
           <a:solidFill>
-            <a:srgbClr val="E84855"/>
+            <a:srgbClr val="FF0000"/>
           </a:solidFill>
           <a:ln>
             <a:noFill/>
@@ -4509,14 +4443,14 @@
       </p:sp>
       <p:sp>
         <p:nvSpPr>
-          <p:cNvPr id="32" name="TextBox 31"/>
+          <p:cNvPr id="23" name="TextBox 22"/>
           <p:cNvSpPr txBox="1"/>
           <p:nvPr/>
         </p:nvSpPr>
         <p:spPr>
           <a:xfrm>
-            <a:off x="9050274" y="4187952"/>
-            <a:ext cx="2791206" cy="201168"/>
+            <a:off x="9132570" y="841248"/>
+            <a:ext cx="2763774" cy="219456"/>
           </a:xfrm>
           <a:prstGeom prst="rect">
             <a:avLst/>
@@ -4536,21 +4470,21 @@
                   <a:srgbClr val="FFFFFF"/>
                 </a:solidFill>
               </a:rPr>
-              <a:t>EA — Expérimentation Active</a:t>
-            </a:r>
-          </a:p>
-        </p:txBody>
-      </p:sp>
-      <p:sp>
-        <p:nvSpPr>
-          <p:cNvPr id="33" name="Rectangle 32"/>
+              <a:t>MISE EN PRATIQUE</a:t>
+            </a:r>
+          </a:p>
+        </p:txBody>
+      </p:sp>
+      <p:sp>
+        <p:nvSpPr>
+          <p:cNvPr id="24" name="Rectangle 23"/>
           <p:cNvSpPr/>
           <p:nvPr/>
         </p:nvSpPr>
         <p:spPr>
           <a:xfrm>
-            <a:off x="9004554" y="4416552"/>
-            <a:ext cx="2882646" cy="1481328"/>
+            <a:off x="9059418" y="1078992"/>
+            <a:ext cx="2910078" cy="3840480"/>
           </a:xfrm>
           <a:prstGeom prst="rect">
             <a:avLst/>
@@ -4560,7 +4494,7 @@
           </a:solidFill>
           <a:ln w="12700">
             <a:solidFill>
-              <a:srgbClr val="E84855"/>
+              <a:srgbClr val="FF0000"/>
             </a:solidFill>
           </a:ln>
         </p:spPr>
@@ -4588,14 +4522,14 @@
       </p:sp>
       <p:sp>
         <p:nvSpPr>
-          <p:cNvPr id="34" name="TextBox 33"/>
+          <p:cNvPr id="25" name="TextBox 24"/>
           <p:cNvSpPr txBox="1"/>
           <p:nvPr/>
         </p:nvSpPr>
         <p:spPr>
           <a:xfrm>
-            <a:off x="9095994" y="4453128"/>
-            <a:ext cx="2699765" cy="1371600"/>
+            <a:off x="9169146" y="1124712"/>
+            <a:ext cx="2690622" cy="3657600"/>
           </a:xfrm>
           <a:prstGeom prst="rect">
             <a:avLst/>
@@ -4615,27 +4549,29 @@
                   <a:srgbClr val="1A1A1A"/>
                 </a:solidFill>
               </a:rPr>
-              <a:t>Jeu de rôle : 'Expliquez la mission UNICEF en 60 secondes'</a:t>
-            </a:r>
-          </a:p>
-        </p:txBody>
-      </p:sp>
-      <p:sp>
-        <p:nvSpPr>
-          <p:cNvPr id="35" name="Rectangle 34"/>
+              <a:t>Vous présentez la mission
+UNICEF en 60 secondes
+à votre binôme.</a:t>
+            </a:r>
+          </a:p>
+        </p:txBody>
+      </p:sp>
+      <p:sp>
+        <p:nvSpPr>
+          <p:cNvPr id="26" name="Rectangle 25"/>
           <p:cNvSpPr/>
           <p:nvPr/>
         </p:nvSpPr>
         <p:spPr>
           <a:xfrm>
-            <a:off x="274320" y="5486400"/>
-            <a:ext cx="11612880" cy="274320"/>
+            <a:off x="274320" y="5074920"/>
+            <a:ext cx="11640312" cy="274320"/>
           </a:xfrm>
           <a:prstGeom prst="rect">
             <a:avLst/>
           </a:prstGeom>
           <a:solidFill>
-            <a:srgbClr val="C9A84C"/>
+            <a:srgbClr val="FF0000"/>
           </a:solidFill>
           <a:ln>
             <a:noFill/>
@@ -4665,13 +4601,13 @@
       </p:sp>
       <p:sp>
         <p:nvSpPr>
-          <p:cNvPr id="36" name="TextBox 35"/>
+          <p:cNvPr id="27" name="TextBox 26"/>
           <p:cNvSpPr txBox="1"/>
           <p:nvPr/>
         </p:nvSpPr>
         <p:spPr>
           <a:xfrm>
-            <a:off x="365760" y="5522976"/>
+            <a:off x="384048" y="5111496"/>
             <a:ext cx="11430000" cy="219456"/>
           </a:xfrm>
           <a:prstGeom prst="rect">
@@ -4687,26 +4623,71 @@
           <a:p>
             <a:pPr algn="l"/>
             <a:r>
-              <a:rPr sz="1000" b="1" i="0">
+              <a:rPr sz="900" b="1" i="0">
                 <a:solidFill>
-                  <a:srgbClr val="005050"/>
+                  <a:srgbClr val="FFFFFF"/>
                 </a:solidFill>
               </a:rPr>
-              <a:t>🎯 Évaluation formative J1</a:t>
-            </a:r>
-          </a:p>
-        </p:txBody>
-      </p:sp>
-      <p:sp>
-        <p:nvSpPr>
-          <p:cNvPr id="37" name="TextBox 36"/>
+              <a:t>Vos 3 réussites à valider aujourd'hui</a:t>
+            </a:r>
+          </a:p>
+        </p:txBody>
+      </p:sp>
+      <p:sp>
+        <p:nvSpPr>
+          <p:cNvPr id="28" name="Rectangle 27"/>
+          <p:cNvSpPr/>
+          <p:nvPr/>
+        </p:nvSpPr>
+        <p:spPr>
+          <a:xfrm>
+            <a:off x="274320" y="5367528"/>
+            <a:ext cx="3843528" cy="502920"/>
+          </a:xfrm>
+          <a:prstGeom prst="rect">
+            <a:avLst/>
+          </a:prstGeom>
+          <a:solidFill>
+            <a:srgbClr val="FFFFFF"/>
+          </a:solidFill>
+          <a:ln w="10160">
+            <a:solidFill>
+              <a:srgbClr val="FF0000"/>
+            </a:solidFill>
+          </a:ln>
+        </p:spPr>
+        <p:style>
+          <a:lnRef idx="1">
+            <a:schemeClr val="accent1"/>
+          </a:lnRef>
+          <a:fillRef idx="3">
+            <a:schemeClr val="accent1"/>
+          </a:fillRef>
+          <a:effectRef idx="2">
+            <a:schemeClr val="accent1"/>
+          </a:effectRef>
+          <a:fontRef idx="minor">
+            <a:schemeClr val="lt1"/>
+          </a:fontRef>
+        </p:style>
+        <p:txBody>
+          <a:bodyPr rtlCol="0" anchor="ctr"/>
+          <a:lstStyle/>
+          <a:p>
+            <a:pPr algn="ctr"/>
+          </a:p>
+        </p:txBody>
+      </p:sp>
+      <p:sp>
+        <p:nvSpPr>
+          <p:cNvPr id="29" name="TextBox 28"/>
           <p:cNvSpPr txBox="1"/>
           <p:nvPr/>
         </p:nvSpPr>
         <p:spPr>
           <a:xfrm>
-            <a:off x="365760" y="5779008"/>
-            <a:ext cx="3718560" cy="502920"/>
+            <a:off x="365760" y="5404104"/>
+            <a:ext cx="3715512" cy="420624"/>
           </a:xfrm>
           <a:prstGeom prst="rect">
             <a:avLst/>
@@ -4726,21 +4707,66 @@
                   <a:srgbClr val="1A1A1A"/>
                 </a:solidFill>
               </a:rPr>
-              <a:t>✓ Pitch 60s — grille C1+C2+C7 (formateur + auto-éval)</a:t>
-            </a:r>
-          </a:p>
-        </p:txBody>
-      </p:sp>
-      <p:sp>
-        <p:nvSpPr>
-          <p:cNvPr id="38" name="TextBox 37"/>
+              <a:t>✔ Pitch 60s évalué avec votre formateur</a:t>
+            </a:r>
+          </a:p>
+        </p:txBody>
+      </p:sp>
+      <p:sp>
+        <p:nvSpPr>
+          <p:cNvPr id="30" name="Rectangle 29"/>
+          <p:cNvSpPr/>
+          <p:nvPr/>
+        </p:nvSpPr>
+        <p:spPr>
+          <a:xfrm>
+            <a:off x="4154423" y="5367528"/>
+            <a:ext cx="3843528" cy="502920"/>
+          </a:xfrm>
+          <a:prstGeom prst="rect">
+            <a:avLst/>
+          </a:prstGeom>
+          <a:solidFill>
+            <a:srgbClr val="FFFFFF"/>
+          </a:solidFill>
+          <a:ln w="10160">
+            <a:solidFill>
+              <a:srgbClr val="FF0000"/>
+            </a:solidFill>
+          </a:ln>
+        </p:spPr>
+        <p:style>
+          <a:lnRef idx="1">
+            <a:schemeClr val="accent1"/>
+          </a:lnRef>
+          <a:fillRef idx="3">
+            <a:schemeClr val="accent1"/>
+          </a:fillRef>
+          <a:effectRef idx="2">
+            <a:schemeClr val="accent1"/>
+          </a:effectRef>
+          <a:fontRef idx="minor">
+            <a:schemeClr val="lt1"/>
+          </a:fontRef>
+        </p:style>
+        <p:txBody>
+          <a:bodyPr rtlCol="0" anchor="ctr"/>
+          <a:lstStyle/>
+          <a:p>
+            <a:pPr algn="ctr"/>
+          </a:p>
+        </p:txBody>
+      </p:sp>
+      <p:sp>
+        <p:nvSpPr>
+          <p:cNvPr id="31" name="TextBox 30"/>
           <p:cNvSpPr txBox="1"/>
           <p:nvPr/>
         </p:nvSpPr>
         <p:spPr>
           <a:xfrm>
-            <a:off x="4175760" y="5779008"/>
-            <a:ext cx="3718560" cy="502920"/>
+            <a:off x="4245863" y="5404104"/>
+            <a:ext cx="3715512" cy="420624"/>
           </a:xfrm>
           <a:prstGeom prst="rect">
             <a:avLst/>
@@ -4760,21 +4786,66 @@
                   <a:srgbClr val="1A1A1A"/>
                 </a:solidFill>
               </a:rPr>
-              <a:t>✓ Quiz 5Q chiffres UNICEF — seuil 60%</a:t>
-            </a:r>
-          </a:p>
-        </p:txBody>
-      </p:sp>
-      <p:sp>
-        <p:nvSpPr>
-          <p:cNvPr id="39" name="TextBox 38"/>
+              <a:t>✔ Quiz 5 questions UNICEF (seuil 60%)</a:t>
+            </a:r>
+          </a:p>
+        </p:txBody>
+      </p:sp>
+      <p:sp>
+        <p:nvSpPr>
+          <p:cNvPr id="32" name="Rectangle 31"/>
+          <p:cNvSpPr/>
+          <p:nvPr/>
+        </p:nvSpPr>
+        <p:spPr>
+          <a:xfrm>
+            <a:off x="8034527" y="5367528"/>
+            <a:ext cx="3843528" cy="502920"/>
+          </a:xfrm>
+          <a:prstGeom prst="rect">
+            <a:avLst/>
+          </a:prstGeom>
+          <a:solidFill>
+            <a:srgbClr val="FFFFFF"/>
+          </a:solidFill>
+          <a:ln w="10160">
+            <a:solidFill>
+              <a:srgbClr val="FF0000"/>
+            </a:solidFill>
+          </a:ln>
+        </p:spPr>
+        <p:style>
+          <a:lnRef idx="1">
+            <a:schemeClr val="accent1"/>
+          </a:lnRef>
+          <a:fillRef idx="3">
+            <a:schemeClr val="accent1"/>
+          </a:fillRef>
+          <a:effectRef idx="2">
+            <a:schemeClr val="accent1"/>
+          </a:effectRef>
+          <a:fontRef idx="minor">
+            <a:schemeClr val="lt1"/>
+          </a:fontRef>
+        </p:style>
+        <p:txBody>
+          <a:bodyPr rtlCol="0" anchor="ctr"/>
+          <a:lstStyle/>
+          <a:p>
+            <a:pPr algn="ctr"/>
+          </a:p>
+        </p:txBody>
+      </p:sp>
+      <p:sp>
+        <p:nvSpPr>
+          <p:cNvPr id="33" name="TextBox 32"/>
           <p:cNvSpPr txBox="1"/>
           <p:nvPr/>
         </p:nvSpPr>
         <p:spPr>
           <a:xfrm>
-            <a:off x="7985760" y="5779008"/>
-            <a:ext cx="3718560" cy="502920"/>
+            <a:off x="8125967" y="5404104"/>
+            <a:ext cx="3715512" cy="420624"/>
           </a:xfrm>
           <a:prstGeom prst="rect">
             <a:avLst/>
@@ -4794,7 +4865,7 @@
                   <a:srgbClr val="1A1A1A"/>
                 </a:solidFill>
               </a:rPr>
-              <a:t>✓ Réflexion écrite 5 lignes dans le LFI</a:t>
+              <a:t>✔ 3 lignes dans votre livret personnel</a:t>
             </a:r>
           </a:p>
         </p:txBody>
@@ -4869,13 +4940,13 @@
         <p:spPr>
           <a:xfrm>
             <a:off x="0" y="0"/>
-            <a:ext cx="12188952" cy="685800"/>
+            <a:ext cx="12188952" cy="658368"/>
           </a:xfrm>
           <a:prstGeom prst="rect">
             <a:avLst/>
           </a:prstGeom>
           <a:solidFill>
-            <a:srgbClr val="005050"/>
+            <a:srgbClr val="005555"/>
           </a:solidFill>
           <a:ln>
             <a:noFill/>
@@ -4911,14 +4982,14 @@
         </p:nvSpPr>
         <p:spPr>
           <a:xfrm>
-            <a:off x="0" y="667512"/>
-            <a:ext cx="12188952" cy="36576"/>
+            <a:off x="0" y="640080"/>
+            <a:ext cx="12188952" cy="54864"/>
           </a:xfrm>
           <a:prstGeom prst="rect">
             <a:avLst/>
           </a:prstGeom>
           <a:solidFill>
-            <a:srgbClr val="C9A84C"/>
+            <a:srgbClr val="FF0000"/>
           </a:solidFill>
           <a:ln>
             <a:noFill/>
@@ -4954,8 +5025,8 @@
         </p:nvSpPr>
         <p:spPr>
           <a:xfrm>
-            <a:off x="274320" y="73152"/>
-            <a:ext cx="11612880" cy="566928"/>
+            <a:off x="164592" y="64008"/>
+            <a:ext cx="685800" cy="530352"/>
           </a:xfrm>
           <a:prstGeom prst="rect">
             <a:avLst/>
@@ -4970,12 +5041,12 @@
           <a:p>
             <a:pPr algn="l"/>
             <a:r>
-              <a:rPr sz="1800" b="1" i="0">
+              <a:rPr sz="2000" b="1" i="0">
                 <a:solidFill>
                   <a:srgbClr val="FFFFFF"/>
                 </a:solidFill>
               </a:rPr>
-              <a:t>UNICEF Maroc &amp; International — Chiffres clés 2024–2026</a:t>
+              <a:t>SHY</a:t>
             </a:r>
           </a:p>
         </p:txBody>
@@ -4988,14 +5059,14 @@
         </p:nvSpPr>
         <p:spPr>
           <a:xfrm>
-            <a:off x="274320" y="868680"/>
-            <a:ext cx="1920240" cy="1005840"/>
+            <a:off x="914400" y="91440"/>
+            <a:ext cx="36576" cy="475488"/>
           </a:xfrm>
           <a:prstGeom prst="rect">
             <a:avLst/>
           </a:prstGeom>
           <a:solidFill>
-            <a:srgbClr val="007A7A"/>
+            <a:srgbClr val="FF0000"/>
           </a:solidFill>
           <a:ln>
             <a:noFill/>
@@ -5031,7 +5102,161 @@
         </p:nvSpPr>
         <p:spPr>
           <a:xfrm>
-            <a:off x="365760" y="896112"/>
+            <a:off x="1024128" y="91440"/>
+            <a:ext cx="10881360" cy="475488"/>
+          </a:xfrm>
+          <a:prstGeom prst="rect">
+            <a:avLst/>
+          </a:prstGeom>
+          <a:noFill/>
+        </p:spPr>
+        <p:txBody>
+          <a:bodyPr wrap="square">
+            <a:spAutoFit/>
+          </a:bodyPr>
+          <a:lstStyle/>
+          <a:p>
+            <a:pPr algn="l"/>
+            <a:r>
+              <a:rPr sz="1700" b="1" i="0">
+                <a:solidFill>
+                  <a:srgbClr val="FFFFFF"/>
+                </a:solidFill>
+              </a:rPr>
+              <a:t>L'UNICEF — La cause que vous défendez</a:t>
+            </a:r>
+          </a:p>
+        </p:txBody>
+      </p:sp>
+      <p:sp>
+        <p:nvSpPr>
+          <p:cNvPr id="8" name="Rectangle 7"/>
+          <p:cNvSpPr/>
+          <p:nvPr/>
+        </p:nvSpPr>
+        <p:spPr>
+          <a:xfrm>
+            <a:off x="0" y="6492240"/>
+            <a:ext cx="12188952" cy="365760"/>
+          </a:xfrm>
+          <a:prstGeom prst="rect">
+            <a:avLst/>
+          </a:prstGeom>
+          <a:solidFill>
+            <a:srgbClr val="005555"/>
+          </a:solidFill>
+          <a:ln>
+            <a:noFill/>
+          </a:ln>
+        </p:spPr>
+        <p:style>
+          <a:lnRef idx="1">
+            <a:schemeClr val="accent1"/>
+          </a:lnRef>
+          <a:fillRef idx="3">
+            <a:schemeClr val="accent1"/>
+          </a:fillRef>
+          <a:effectRef idx="2">
+            <a:schemeClr val="accent1"/>
+          </a:effectRef>
+          <a:fontRef idx="minor">
+            <a:schemeClr val="lt1"/>
+          </a:fontRef>
+        </p:style>
+        <p:txBody>
+          <a:bodyPr rtlCol="0" anchor="ctr"/>
+          <a:lstStyle/>
+          <a:p>
+            <a:pPr algn="ctr"/>
+          </a:p>
+        </p:txBody>
+      </p:sp>
+      <p:sp>
+        <p:nvSpPr>
+          <p:cNvPr id="9" name="TextBox 8"/>
+          <p:cNvSpPr txBox="1"/>
+          <p:nvPr/>
+        </p:nvSpPr>
+        <p:spPr>
+          <a:xfrm>
+            <a:off x="0" y="6519672"/>
+            <a:ext cx="12188952" cy="274320"/>
+          </a:xfrm>
+          <a:prstGeom prst="rect">
+            <a:avLst/>
+          </a:prstGeom>
+          <a:noFill/>
+        </p:spPr>
+        <p:txBody>
+          <a:bodyPr wrap="square">
+            <a:spAutoFit/>
+          </a:bodyPr>
+          <a:lstStyle/>
+          <a:p>
+            <a:pPr algn="ctr"/>
+            <a:r>
+              <a:rPr sz="900" b="0" i="0">
+                <a:solidFill>
+                  <a:srgbClr val="FFFFFF"/>
+                </a:solidFill>
+              </a:rPr>
+              <a:t>SHY-Performance  ·  Formation FIM  ·  V6-01062026SHY-TE</a:t>
+            </a:r>
+          </a:p>
+        </p:txBody>
+      </p:sp>
+      <p:sp>
+        <p:nvSpPr>
+          <p:cNvPr id="10" name="Rectangle 9"/>
+          <p:cNvSpPr/>
+          <p:nvPr/>
+        </p:nvSpPr>
+        <p:spPr>
+          <a:xfrm>
+            <a:off x="274320" y="804672"/>
+            <a:ext cx="1920240" cy="987552"/>
+          </a:xfrm>
+          <a:prstGeom prst="rect">
+            <a:avLst/>
+          </a:prstGeom>
+          <a:solidFill>
+            <a:srgbClr val="005555"/>
+          </a:solidFill>
+          <a:ln>
+            <a:noFill/>
+          </a:ln>
+        </p:spPr>
+        <p:style>
+          <a:lnRef idx="1">
+            <a:schemeClr val="accent1"/>
+          </a:lnRef>
+          <a:fillRef idx="3">
+            <a:schemeClr val="accent1"/>
+          </a:fillRef>
+          <a:effectRef idx="2">
+            <a:schemeClr val="accent1"/>
+          </a:effectRef>
+          <a:fontRef idx="minor">
+            <a:schemeClr val="lt1"/>
+          </a:fontRef>
+        </p:style>
+        <p:txBody>
+          <a:bodyPr rtlCol="0" anchor="ctr"/>
+          <a:lstStyle/>
+          <a:p>
+            <a:pPr algn="ctr"/>
+          </a:p>
+        </p:txBody>
+      </p:sp>
+      <p:sp>
+        <p:nvSpPr>
+          <p:cNvPr id="11" name="TextBox 10"/>
+          <p:cNvSpPr txBox="1"/>
+          <p:nvPr/>
+        </p:nvSpPr>
+        <p:spPr>
+          <a:xfrm>
+            <a:off x="365760" y="822960"/>
             <a:ext cx="1737360" cy="594360"/>
           </a:xfrm>
           <a:prstGeom prst="rect">
@@ -5059,13 +5284,13 @@
       </p:sp>
       <p:sp>
         <p:nvSpPr>
-          <p:cNvPr id="8" name="TextBox 7"/>
+          <p:cNvPr id="12" name="TextBox 11"/>
           <p:cNvSpPr txBox="1"/>
           <p:nvPr/>
         </p:nvSpPr>
         <p:spPr>
           <a:xfrm>
-            <a:off x="365760" y="1481328"/>
+            <a:off x="365760" y="1408176"/>
             <a:ext cx="1737360" cy="365760"/>
           </a:xfrm>
           <a:prstGeom prst="rect">
@@ -5083,30 +5308,31 @@
             <a:r>
               <a:rPr sz="900" b="0" i="0">
                 <a:solidFill>
-                  <a:srgbClr val="DDEEEE"/>
+                  <a:srgbClr val="CCEEEE"/>
                 </a:solidFill>
               </a:rPr>
-              <a:t>pays où l'UNICEF est présent</a:t>
-            </a:r>
-          </a:p>
-        </p:txBody>
-      </p:sp>
-      <p:sp>
-        <p:nvSpPr>
-          <p:cNvPr id="9" name="Rectangle 8"/>
+              <a:t>pays où l'UNICEF
+est présent</a:t>
+            </a:r>
+          </a:p>
+        </p:txBody>
+      </p:sp>
+      <p:sp>
+        <p:nvSpPr>
+          <p:cNvPr id="13" name="Rectangle 12"/>
           <p:cNvSpPr/>
           <p:nvPr/>
         </p:nvSpPr>
         <p:spPr>
           <a:xfrm>
-            <a:off x="2240279" y="868680"/>
-            <a:ext cx="1920240" cy="1005840"/>
+            <a:off x="2240279" y="804672"/>
+            <a:ext cx="1920240" cy="987552"/>
           </a:xfrm>
           <a:prstGeom prst="rect">
             <a:avLst/>
           </a:prstGeom>
           <a:solidFill>
-            <a:srgbClr val="007A7A"/>
+            <a:srgbClr val="005555"/>
           </a:solidFill>
           <a:ln>
             <a:noFill/>
@@ -5136,13 +5362,13 @@
       </p:sp>
       <p:sp>
         <p:nvSpPr>
-          <p:cNvPr id="10" name="TextBox 9"/>
+          <p:cNvPr id="14" name="TextBox 13"/>
           <p:cNvSpPr txBox="1"/>
           <p:nvPr/>
         </p:nvSpPr>
         <p:spPr>
           <a:xfrm>
-            <a:off x="2331720" y="896112"/>
+            <a:off x="2331720" y="822960"/>
             <a:ext cx="1737360" cy="594360"/>
           </a:xfrm>
           <a:prstGeom prst="rect">
@@ -5170,13 +5396,13 @@
       </p:sp>
       <p:sp>
         <p:nvSpPr>
-          <p:cNvPr id="11" name="TextBox 10"/>
+          <p:cNvPr id="15" name="TextBox 14"/>
           <p:cNvSpPr txBox="1"/>
           <p:nvPr/>
         </p:nvSpPr>
         <p:spPr>
           <a:xfrm>
-            <a:off x="2331720" y="1481328"/>
+            <a:off x="2331720" y="1408176"/>
             <a:ext cx="1737360" cy="365760"/>
           </a:xfrm>
           <a:prstGeom prst="rect">
@@ -5194,30 +5420,31 @@
             <a:r>
               <a:rPr sz="900" b="0" i="0">
                 <a:solidFill>
-                  <a:srgbClr val="DDEEEE"/>
+                  <a:srgbClr val="CCEEEE"/>
                 </a:solidFill>
               </a:rPr>
-              <a:t>enfants aidés chaque année</a:t>
-            </a:r>
-          </a:p>
-        </p:txBody>
-      </p:sp>
-      <p:sp>
-        <p:nvSpPr>
-          <p:cNvPr id="12" name="Rectangle 11"/>
+              <a:t>enfants aidés
+chaque année</a:t>
+            </a:r>
+          </a:p>
+        </p:txBody>
+      </p:sp>
+      <p:sp>
+        <p:nvSpPr>
+          <p:cNvPr id="16" name="Rectangle 15"/>
           <p:cNvSpPr/>
           <p:nvPr/>
         </p:nvSpPr>
         <p:spPr>
           <a:xfrm>
-            <a:off x="4206240" y="868680"/>
-            <a:ext cx="1920240" cy="1005840"/>
+            <a:off x="4206240" y="804672"/>
+            <a:ext cx="1920240" cy="987552"/>
           </a:xfrm>
           <a:prstGeom prst="rect">
             <a:avLst/>
           </a:prstGeom>
           <a:solidFill>
-            <a:srgbClr val="007A7A"/>
+            <a:srgbClr val="005555"/>
           </a:solidFill>
           <a:ln>
             <a:noFill/>
@@ -5247,13 +5474,13 @@
       </p:sp>
       <p:sp>
         <p:nvSpPr>
-          <p:cNvPr id="13" name="TextBox 12"/>
+          <p:cNvPr id="17" name="TextBox 16"/>
           <p:cNvSpPr txBox="1"/>
           <p:nvPr/>
         </p:nvSpPr>
         <p:spPr>
           <a:xfrm>
-            <a:off x="4297679" y="896112"/>
+            <a:off x="4297679" y="822960"/>
             <a:ext cx="1737360" cy="594360"/>
           </a:xfrm>
           <a:prstGeom prst="rect">
@@ -5274,20 +5501,20 @@
                   <a:srgbClr val="FFFFFF"/>
                 </a:solidFill>
               </a:rPr>
-              <a:t>46M€</a:t>
-            </a:r>
-          </a:p>
-        </p:txBody>
-      </p:sp>
-      <p:sp>
-        <p:nvSpPr>
-          <p:cNvPr id="14" name="TextBox 13"/>
+              <a:t>830M€</a:t>
+            </a:r>
+          </a:p>
+        </p:txBody>
+      </p:sp>
+      <p:sp>
+        <p:nvSpPr>
+          <p:cNvPr id="18" name="TextBox 17"/>
           <p:cNvSpPr txBox="1"/>
           <p:nvPr/>
         </p:nvSpPr>
         <p:spPr>
           <a:xfrm>
-            <a:off x="4297679" y="1481328"/>
+            <a:off x="4297679" y="1408176"/>
             <a:ext cx="1737360" cy="365760"/>
           </a:xfrm>
           <a:prstGeom prst="rect">
@@ -5305,30 +5532,31 @@
             <a:r>
               <a:rPr sz="900" b="0" i="0">
                 <a:solidFill>
-                  <a:srgbClr val="DDEEEE"/>
+                  <a:srgbClr val="CCEEEE"/>
                 </a:solidFill>
               </a:rPr>
-              <a:t>budget UNICEF Maroc 2024</a:t>
-            </a:r>
-          </a:p>
-        </p:txBody>
-      </p:sp>
-      <p:sp>
-        <p:nvSpPr>
-          <p:cNvPr id="15" name="Rectangle 14"/>
+              <a:t>collectés en France
+en 2024</a:t>
+            </a:r>
+          </a:p>
+        </p:txBody>
+      </p:sp>
+      <p:sp>
+        <p:nvSpPr>
+          <p:cNvPr id="19" name="Rectangle 18"/>
           <p:cNvSpPr/>
           <p:nvPr/>
         </p:nvSpPr>
         <p:spPr>
           <a:xfrm>
-            <a:off x="6172200" y="868680"/>
-            <a:ext cx="1920240" cy="1005840"/>
+            <a:off x="6172200" y="804672"/>
+            <a:ext cx="1920240" cy="987552"/>
           </a:xfrm>
           <a:prstGeom prst="rect">
             <a:avLst/>
           </a:prstGeom>
           <a:solidFill>
-            <a:srgbClr val="007A7A"/>
+            <a:srgbClr val="005555"/>
           </a:solidFill>
           <a:ln>
             <a:noFill/>
@@ -5358,124 +5586,13 @@
       </p:sp>
       <p:sp>
         <p:nvSpPr>
-          <p:cNvPr id="16" name="TextBox 15"/>
+          <p:cNvPr id="20" name="TextBox 19"/>
           <p:cNvSpPr txBox="1"/>
           <p:nvPr/>
         </p:nvSpPr>
         <p:spPr>
           <a:xfrm>
-            <a:off x="6263640" y="896112"/>
-            <a:ext cx="1737360" cy="594360"/>
-          </a:xfrm>
-          <a:prstGeom prst="rect">
-            <a:avLst/>
-          </a:prstGeom>
-          <a:noFill/>
-        </p:spPr>
-        <p:txBody>
-          <a:bodyPr wrap="square">
-            <a:spAutoFit/>
-          </a:bodyPr>
-          <a:lstStyle/>
-          <a:p>
-            <a:pPr algn="ctr"/>
-            <a:r>
-              <a:rPr sz="2600" b="1" i="0">
-                <a:solidFill>
-                  <a:srgbClr val="FFFFFF"/>
-                </a:solidFill>
-              </a:rPr>
-              <a:t>3,2M</a:t>
-            </a:r>
-          </a:p>
-        </p:txBody>
-      </p:sp>
-      <p:sp>
-        <p:nvSpPr>
-          <p:cNvPr id="17" name="TextBox 16"/>
-          <p:cNvSpPr txBox="1"/>
-          <p:nvPr/>
-        </p:nvSpPr>
-        <p:spPr>
-          <a:xfrm>
-            <a:off x="6263640" y="1481328"/>
-            <a:ext cx="1737360" cy="365760"/>
-          </a:xfrm>
-          <a:prstGeom prst="rect">
-            <a:avLst/>
-          </a:prstGeom>
-          <a:noFill/>
-        </p:spPr>
-        <p:txBody>
-          <a:bodyPr wrap="square">
-            <a:spAutoFit/>
-          </a:bodyPr>
-          <a:lstStyle/>
-          <a:p>
-            <a:pPr algn="ctr"/>
-            <a:r>
-              <a:rPr sz="900" b="0" i="0">
-                <a:solidFill>
-                  <a:srgbClr val="DDEEEE"/>
-                </a:solidFill>
-              </a:rPr>
-              <a:t>enfants bénéficiaires au Maroc</a:t>
-            </a:r>
-          </a:p>
-        </p:txBody>
-      </p:sp>
-      <p:sp>
-        <p:nvSpPr>
-          <p:cNvPr id="18" name="Rectangle 17"/>
-          <p:cNvSpPr/>
-          <p:nvPr/>
-        </p:nvSpPr>
-        <p:spPr>
-          <a:xfrm>
-            <a:off x="8138160" y="868680"/>
-            <a:ext cx="1920240" cy="1005840"/>
-          </a:xfrm>
-          <a:prstGeom prst="rect">
-            <a:avLst/>
-          </a:prstGeom>
-          <a:solidFill>
-            <a:srgbClr val="007A7A"/>
-          </a:solidFill>
-          <a:ln>
-            <a:noFill/>
-          </a:ln>
-        </p:spPr>
-        <p:style>
-          <a:lnRef idx="1">
-            <a:schemeClr val="accent1"/>
-          </a:lnRef>
-          <a:fillRef idx="3">
-            <a:schemeClr val="accent1"/>
-          </a:fillRef>
-          <a:effectRef idx="2">
-            <a:schemeClr val="accent1"/>
-          </a:effectRef>
-          <a:fontRef idx="minor">
-            <a:schemeClr val="lt1"/>
-          </a:fontRef>
-        </p:style>
-        <p:txBody>
-          <a:bodyPr rtlCol="0" anchor="ctr"/>
-          <a:lstStyle/>
-          <a:p>
-            <a:pPr algn="ctr"/>
-          </a:p>
-        </p:txBody>
-      </p:sp>
-      <p:sp>
-        <p:nvSpPr>
-          <p:cNvPr id="19" name="TextBox 18"/>
-          <p:cNvSpPr txBox="1"/>
-          <p:nvPr/>
-        </p:nvSpPr>
-        <p:spPr>
-          <a:xfrm>
-            <a:off x="8229600" y="896112"/>
+            <a:off x="6263640" y="822960"/>
             <a:ext cx="1737360" cy="594360"/>
           </a:xfrm>
           <a:prstGeom prst="rect">
@@ -5503,13 +5620,13 @@
       </p:sp>
       <p:sp>
         <p:nvSpPr>
-          <p:cNvPr id="20" name="TextBox 19"/>
+          <p:cNvPr id="21" name="TextBox 20"/>
           <p:cNvSpPr txBox="1"/>
           <p:nvPr/>
         </p:nvSpPr>
         <p:spPr>
           <a:xfrm>
-            <a:off x="8229600" y="1481328"/>
+            <a:off x="6263640" y="1408176"/>
             <a:ext cx="1737360" cy="365760"/>
           </a:xfrm>
           <a:prstGeom prst="rect">
@@ -5527,30 +5644,31 @@
             <a:r>
               <a:rPr sz="900" b="0" i="0">
                 <a:solidFill>
-                  <a:srgbClr val="DDEEEE"/>
+                  <a:srgbClr val="CCEEEE"/>
                 </a:solidFill>
               </a:rPr>
-              <a:t>fonds issus des dons privés</a:t>
-            </a:r>
-          </a:p>
-        </p:txBody>
-      </p:sp>
-      <p:sp>
-        <p:nvSpPr>
-          <p:cNvPr id="21" name="Rectangle 20"/>
+              <a:t>des fonds viennent
+des dons privés</a:t>
+            </a:r>
+          </a:p>
+        </p:txBody>
+      </p:sp>
+      <p:sp>
+        <p:nvSpPr>
+          <p:cNvPr id="22" name="Rectangle 21"/>
           <p:cNvSpPr/>
           <p:nvPr/>
         </p:nvSpPr>
         <p:spPr>
           <a:xfrm>
-            <a:off x="10104120" y="868680"/>
-            <a:ext cx="1920240" cy="1005840"/>
+            <a:off x="8138160" y="804672"/>
+            <a:ext cx="1920240" cy="987552"/>
           </a:xfrm>
           <a:prstGeom prst="rect">
             <a:avLst/>
           </a:prstGeom>
           <a:solidFill>
-            <a:srgbClr val="007A7A"/>
+            <a:srgbClr val="005555"/>
           </a:solidFill>
           <a:ln>
             <a:noFill/>
@@ -5580,13 +5698,13 @@
       </p:sp>
       <p:sp>
         <p:nvSpPr>
-          <p:cNvPr id="22" name="TextBox 21"/>
+          <p:cNvPr id="23" name="TextBox 22"/>
           <p:cNvSpPr txBox="1"/>
           <p:nvPr/>
         </p:nvSpPr>
         <p:spPr>
           <a:xfrm>
-            <a:off x="10195560" y="896112"/>
+            <a:off x="8229600" y="822960"/>
             <a:ext cx="1737360" cy="594360"/>
           </a:xfrm>
           <a:prstGeom prst="rect">
@@ -5607,20 +5725,20 @@
                   <a:srgbClr val="FFFFFF"/>
                 </a:solidFill>
               </a:rPr>
-              <a:t>15 DH/jour</a:t>
-            </a:r>
-          </a:p>
-        </p:txBody>
-      </p:sp>
-      <p:sp>
-        <p:nvSpPr>
-          <p:cNvPr id="23" name="TextBox 22"/>
+              <a:t>3€/j</a:t>
+            </a:r>
+          </a:p>
+        </p:txBody>
+      </p:sp>
+      <p:sp>
+        <p:nvSpPr>
+          <p:cNvPr id="24" name="TextBox 23"/>
           <p:cNvSpPr txBox="1"/>
           <p:nvPr/>
         </p:nvSpPr>
         <p:spPr>
           <a:xfrm>
-            <a:off x="10195560" y="1481328"/>
+            <a:off x="8229600" y="1408176"/>
             <a:ext cx="1737360" cy="365760"/>
           </a:xfrm>
           <a:prstGeom prst="rect">
@@ -5638,24 +5756,68 @@
             <a:r>
               <a:rPr sz="900" b="0" i="0">
                 <a:solidFill>
-                  <a:srgbClr val="DDEEEE"/>
+                  <a:srgbClr val="CCEEEE"/>
                 </a:solidFill>
               </a:rPr>
-              <a:t>coût d'1 kit de survie enfant</a:t>
-            </a:r>
-          </a:p>
-        </p:txBody>
-      </p:sp>
-      <p:sp>
-        <p:nvSpPr>
-          <p:cNvPr id="24" name="TextBox 23"/>
+              <a:t>coût d'1 journée
+d'alimentation enfant</a:t>
+            </a:r>
+          </a:p>
+        </p:txBody>
+      </p:sp>
+      <p:sp>
+        <p:nvSpPr>
+          <p:cNvPr id="25" name="Rectangle 24"/>
+          <p:cNvSpPr/>
+          <p:nvPr/>
+        </p:nvSpPr>
+        <p:spPr>
+          <a:xfrm>
+            <a:off x="10104120" y="804672"/>
+            <a:ext cx="1920240" cy="987552"/>
+          </a:xfrm>
+          <a:prstGeom prst="rect">
+            <a:avLst/>
+          </a:prstGeom>
+          <a:solidFill>
+            <a:srgbClr val="005555"/>
+          </a:solidFill>
+          <a:ln>
+            <a:noFill/>
+          </a:ln>
+        </p:spPr>
+        <p:style>
+          <a:lnRef idx="1">
+            <a:schemeClr val="accent1"/>
+          </a:lnRef>
+          <a:fillRef idx="3">
+            <a:schemeClr val="accent1"/>
+          </a:fillRef>
+          <a:effectRef idx="2">
+            <a:schemeClr val="accent1"/>
+          </a:effectRef>
+          <a:fontRef idx="minor">
+            <a:schemeClr val="lt1"/>
+          </a:fontRef>
+        </p:style>
+        <p:txBody>
+          <a:bodyPr rtlCol="0" anchor="ctr"/>
+          <a:lstStyle/>
+          <a:p>
+            <a:pPr algn="ctr"/>
+          </a:p>
+        </p:txBody>
+      </p:sp>
+      <p:sp>
+        <p:nvSpPr>
+          <p:cNvPr id="26" name="TextBox 25"/>
           <p:cNvSpPr txBox="1"/>
           <p:nvPr/>
         </p:nvSpPr>
         <p:spPr>
           <a:xfrm>
-            <a:off x="274320" y="2011680"/>
-            <a:ext cx="11612880" cy="822960"/>
+            <a:off x="10195560" y="822960"/>
+            <a:ext cx="1737360" cy="594360"/>
           </a:xfrm>
           <a:prstGeom prst="rect">
             <a:avLst/>
@@ -5668,29 +5830,218 @@
           </a:bodyPr>
           <a:lstStyle/>
           <a:p>
+            <a:pPr algn="ctr"/>
+            <a:r>
+              <a:rPr sz="2600" b="1" i="0">
+                <a:solidFill>
+                  <a:srgbClr val="FFFFFF"/>
+                </a:solidFill>
+              </a:rPr>
+              <a:t>82%</a:t>
+            </a:r>
+          </a:p>
+        </p:txBody>
+      </p:sp>
+      <p:sp>
+        <p:nvSpPr>
+          <p:cNvPr id="27" name="TextBox 26"/>
+          <p:cNvSpPr txBox="1"/>
+          <p:nvPr/>
+        </p:nvSpPr>
+        <p:spPr>
+          <a:xfrm>
+            <a:off x="10195560" y="1408176"/>
+            <a:ext cx="1737360" cy="365760"/>
+          </a:xfrm>
+          <a:prstGeom prst="rect">
+            <a:avLst/>
+          </a:prstGeom>
+          <a:noFill/>
+        </p:spPr>
+        <p:txBody>
+          <a:bodyPr wrap="square">
+            <a:spAutoFit/>
+          </a:bodyPr>
+          <a:lstStyle/>
+          <a:p>
+            <a:pPr algn="ctr"/>
+            <a:r>
+              <a:rPr sz="900" b="0" i="0">
+                <a:solidFill>
+                  <a:srgbClr val="CCEEEE"/>
+                </a:solidFill>
+              </a:rPr>
+              <a:t>des dons affectés
+directement aux programmes</a:t>
+            </a:r>
+          </a:p>
+        </p:txBody>
+      </p:sp>
+      <p:sp>
+        <p:nvSpPr>
+          <p:cNvPr id="28" name="TextBox 27"/>
+          <p:cNvSpPr txBox="1"/>
+          <p:nvPr/>
+        </p:nvSpPr>
+        <p:spPr>
+          <a:xfrm>
+            <a:off x="274320" y="1920240"/>
+            <a:ext cx="11640312" cy="320040"/>
+          </a:xfrm>
+          <a:prstGeom prst="rect">
+            <a:avLst/>
+          </a:prstGeom>
+          <a:noFill/>
+        </p:spPr>
+        <p:txBody>
+          <a:bodyPr wrap="square">
+            <a:spAutoFit/>
+          </a:bodyPr>
+          <a:lstStyle/>
+          <a:p>
             <a:pPr algn="l"/>
             <a:r>
-              <a:rPr sz="1200" b="0" i="0">
+              <a:rPr sz="1200" b="1" i="0">
+                <a:solidFill>
+                  <a:srgbClr val="005555"/>
+                </a:solidFill>
+              </a:rPr>
+              <a:t>Ce que vous dites à chaque donateur :</a:t>
+            </a:r>
+          </a:p>
+        </p:txBody>
+      </p:sp>
+      <p:sp>
+        <p:nvSpPr>
+          <p:cNvPr id="29" name="Rectangle 28"/>
+          <p:cNvSpPr/>
+          <p:nvPr/>
+        </p:nvSpPr>
+        <p:spPr>
+          <a:xfrm>
+            <a:off x="274320" y="2286000"/>
+            <a:ext cx="11640312" cy="749808"/>
+          </a:xfrm>
+          <a:prstGeom prst="rect">
+            <a:avLst/>
+          </a:prstGeom>
+          <a:solidFill>
+            <a:srgbClr val="F0F7F7"/>
+          </a:solidFill>
+          <a:ln>
+            <a:noFill/>
+          </a:ln>
+        </p:spPr>
+        <p:style>
+          <a:lnRef idx="1">
+            <a:schemeClr val="accent1"/>
+          </a:lnRef>
+          <a:fillRef idx="3">
+            <a:schemeClr val="accent1"/>
+          </a:fillRef>
+          <a:effectRef idx="2">
+            <a:schemeClr val="accent1"/>
+          </a:effectRef>
+          <a:fontRef idx="minor">
+            <a:schemeClr val="lt1"/>
+          </a:fontRef>
+        </p:style>
+        <p:txBody>
+          <a:bodyPr rtlCol="0" anchor="ctr"/>
+          <a:lstStyle/>
+          <a:p>
+            <a:pPr algn="ctr"/>
+          </a:p>
+        </p:txBody>
+      </p:sp>
+      <p:sp>
+        <p:nvSpPr>
+          <p:cNvPr id="30" name="TextBox 29"/>
+          <p:cNvSpPr txBox="1"/>
+          <p:nvPr/>
+        </p:nvSpPr>
+        <p:spPr>
+          <a:xfrm>
+            <a:off x="411479" y="2359152"/>
+            <a:ext cx="11365992" cy="603503"/>
+          </a:xfrm>
+          <a:prstGeom prst="rect">
+            <a:avLst/>
+          </a:prstGeom>
+          <a:noFill/>
+        </p:spPr>
+        <p:txBody>
+          <a:bodyPr wrap="square">
+            <a:spAutoFit/>
+          </a:bodyPr>
+          <a:lstStyle/>
+          <a:p>
+            <a:pPr algn="l"/>
+            <a:r>
+              <a:rPr sz="1000" b="0" i="0">
                 <a:solidFill>
                   <a:srgbClr val="1A1A1A"/>
                 </a:solidFill>
               </a:rPr>
-              <a:t>Message clé fundraiser : 'Un don de 100 DH/mois = 6 enfants protégés par an'
-Cadre légal : Loi 75-00 sur les associations · Agrément préfectoral · Reçu fiscal</a:t>
-            </a:r>
-          </a:p>
-        </p:txBody>
-      </p:sp>
-      <p:sp>
-        <p:nvSpPr>
-          <p:cNvPr id="25" name="TextBox 24"/>
+              <a:t>« Un don de 10€/mois, c'est 30 centimes par jour — moins qu'un café.
+En 1 an, vous offrez à 6 enfants l'accès à l'eau potable, à la nutrition et aux soins. »</a:t>
+            </a:r>
+          </a:p>
+        </p:txBody>
+      </p:sp>
+      <p:sp>
+        <p:nvSpPr>
+          <p:cNvPr id="31" name="Rectangle 30"/>
+          <p:cNvSpPr/>
+          <p:nvPr/>
+        </p:nvSpPr>
+        <p:spPr>
+          <a:xfrm>
+            <a:off x="274320" y="2286000"/>
+            <a:ext cx="109728" cy="749808"/>
+          </a:xfrm>
+          <a:prstGeom prst="rect">
+            <a:avLst/>
+          </a:prstGeom>
+          <a:solidFill>
+            <a:srgbClr val="FF0000"/>
+          </a:solidFill>
+          <a:ln>
+            <a:noFill/>
+          </a:ln>
+        </p:spPr>
+        <p:style>
+          <a:lnRef idx="1">
+            <a:schemeClr val="accent1"/>
+          </a:lnRef>
+          <a:fillRef idx="3">
+            <a:schemeClr val="accent1"/>
+          </a:fillRef>
+          <a:effectRef idx="2">
+            <a:schemeClr val="accent1"/>
+          </a:effectRef>
+          <a:fontRef idx="minor">
+            <a:schemeClr val="lt1"/>
+          </a:fontRef>
+        </p:style>
+        <p:txBody>
+          <a:bodyPr rtlCol="0" anchor="ctr"/>
+          <a:lstStyle/>
+          <a:p>
+            <a:pPr algn="ctr"/>
+          </a:p>
+        </p:txBody>
+      </p:sp>
+      <p:sp>
+        <p:nvSpPr>
+          <p:cNvPr id="32" name="TextBox 31"/>
           <p:cNvSpPr txBox="1"/>
           <p:nvPr/>
         </p:nvSpPr>
         <p:spPr>
           <a:xfrm>
-            <a:off x="274320" y="2971800"/>
-            <a:ext cx="11612880" cy="274320"/>
+            <a:off x="274320" y="3218688"/>
+            <a:ext cx="11640312" cy="292608"/>
           </a:xfrm>
           <a:prstGeom prst="rect">
             <a:avLst/>
@@ -5707,24 +6058,24 @@
             <a:r>
               <a:rPr sz="1200" b="1" i="0">
                 <a:solidFill>
-                  <a:srgbClr val="005050"/>
+                  <a:srgbClr val="005555"/>
                 </a:solidFill>
               </a:rPr>
-              <a:t>Activité — L'ascenseur de mission (Bloom 3)</a:t>
-            </a:r>
-          </a:p>
-        </p:txBody>
-      </p:sp>
-      <p:sp>
-        <p:nvSpPr>
-          <p:cNvPr id="26" name="Rectangle 25"/>
+              <a:t>Votre activité : L'ascenseur de mission</a:t>
+            </a:r>
+          </a:p>
+        </p:txBody>
+      </p:sp>
+      <p:sp>
+        <p:nvSpPr>
+          <p:cNvPr id="33" name="Rectangle 32"/>
           <p:cNvSpPr/>
           <p:nvPr/>
         </p:nvSpPr>
         <p:spPr>
           <a:xfrm>
-            <a:off x="274320" y="3291840"/>
-            <a:ext cx="2240280" cy="685800"/>
+            <a:off x="274320" y="3584448"/>
+            <a:ext cx="2249424" cy="960120"/>
           </a:xfrm>
           <a:prstGeom prst="rect">
             <a:avLst/>
@@ -5734,7 +6085,7 @@
           </a:solidFill>
           <a:ln w="12700">
             <a:solidFill>
-              <a:srgbClr val="007A7A"/>
+              <a:srgbClr val="008080"/>
             </a:solidFill>
           </a:ln>
         </p:spPr>
@@ -5762,14 +6113,14 @@
       </p:sp>
       <p:sp>
         <p:nvSpPr>
-          <p:cNvPr id="27" name="TextBox 26"/>
+          <p:cNvPr id="34" name="TextBox 33"/>
           <p:cNvSpPr txBox="1"/>
           <p:nvPr/>
         </p:nvSpPr>
         <p:spPr>
           <a:xfrm>
-            <a:off x="365760" y="3337560"/>
-            <a:ext cx="2057400" cy="594360"/>
+            <a:off x="384048" y="3639312"/>
+            <a:ext cx="2029968" cy="841248"/>
           </a:xfrm>
           <a:prstGeom prst="rect">
             <a:avLst/>
@@ -5789,21 +6140,23 @@
                   <a:srgbClr val="1A1A1A"/>
                 </a:solidFill>
               </a:rPr>
-              <a:t>1. Lire seul le brief mission (3 min)</a:t>
-            </a:r>
-          </a:p>
-        </p:txBody>
-      </p:sp>
-      <p:sp>
-        <p:nvSpPr>
-          <p:cNvPr id="28" name="Rectangle 27"/>
+              <a:t>① Lisez seul
+le brief mission
+(3 min)</a:t>
+            </a:r>
+          </a:p>
+        </p:txBody>
+      </p:sp>
+      <p:sp>
+        <p:nvSpPr>
+          <p:cNvPr id="35" name="Rectangle 34"/>
           <p:cNvSpPr/>
           <p:nvPr/>
         </p:nvSpPr>
         <p:spPr>
           <a:xfrm>
-            <a:off x="2560320" y="3291840"/>
-            <a:ext cx="2240280" cy="685800"/>
+            <a:off x="2560320" y="3584448"/>
+            <a:ext cx="2249424" cy="960120"/>
           </a:xfrm>
           <a:prstGeom prst="rect">
             <a:avLst/>
@@ -5813,7 +6166,7 @@
           </a:solidFill>
           <a:ln w="12700">
             <a:solidFill>
-              <a:srgbClr val="007A7A"/>
+              <a:srgbClr val="008080"/>
             </a:solidFill>
           </a:ln>
         </p:spPr>
@@ -5841,14 +6194,14 @@
       </p:sp>
       <p:sp>
         <p:nvSpPr>
-          <p:cNvPr id="29" name="TextBox 28"/>
+          <p:cNvPr id="36" name="TextBox 35"/>
           <p:cNvSpPr txBox="1"/>
           <p:nvPr/>
         </p:nvSpPr>
         <p:spPr>
           <a:xfrm>
-            <a:off x="2651760" y="3337560"/>
-            <a:ext cx="2057400" cy="594360"/>
+            <a:off x="2670048" y="3639312"/>
+            <a:ext cx="2029968" cy="841248"/>
           </a:xfrm>
           <a:prstGeom prst="rect">
             <a:avLst/>
@@ -5868,21 +6221,23 @@
                   <a:srgbClr val="1A1A1A"/>
                 </a:solidFill>
               </a:rPr>
-              <a:t>2. Formuler son pitch 60s (5 min)</a:t>
-            </a:r>
-          </a:p>
-        </p:txBody>
-      </p:sp>
-      <p:sp>
-        <p:nvSpPr>
-          <p:cNvPr id="30" name="Rectangle 29"/>
+              <a:t>② Formulez
+votre pitch 60s
+(5 min)</a:t>
+            </a:r>
+          </a:p>
+        </p:txBody>
+      </p:sp>
+      <p:sp>
+        <p:nvSpPr>
+          <p:cNvPr id="37" name="Rectangle 36"/>
           <p:cNvSpPr/>
           <p:nvPr/>
         </p:nvSpPr>
         <p:spPr>
           <a:xfrm>
-            <a:off x="4846320" y="3291840"/>
-            <a:ext cx="2240280" cy="685800"/>
+            <a:off x="4846320" y="3584448"/>
+            <a:ext cx="2249424" cy="960120"/>
           </a:xfrm>
           <a:prstGeom prst="rect">
             <a:avLst/>
@@ -5892,7 +6247,7 @@
           </a:solidFill>
           <a:ln w="12700">
             <a:solidFill>
-              <a:srgbClr val="007A7A"/>
+              <a:srgbClr val="008080"/>
             </a:solidFill>
           </a:ln>
         </p:spPr>
@@ -5920,14 +6275,14 @@
       </p:sp>
       <p:sp>
         <p:nvSpPr>
-          <p:cNvPr id="31" name="TextBox 30"/>
+          <p:cNvPr id="38" name="TextBox 37"/>
           <p:cNvSpPr txBox="1"/>
           <p:nvPr/>
         </p:nvSpPr>
         <p:spPr>
           <a:xfrm>
-            <a:off x="4937759" y="3337560"/>
-            <a:ext cx="2057400" cy="594360"/>
+            <a:off x="4956048" y="3639312"/>
+            <a:ext cx="2029968" cy="841248"/>
           </a:xfrm>
           <a:prstGeom prst="rect">
             <a:avLst/>
@@ -5947,21 +6302,23 @@
                   <a:srgbClr val="1A1A1A"/>
                 </a:solidFill>
               </a:rPr>
-              <a:t>3. Présenter à son binôme</a:t>
-            </a:r>
-          </a:p>
-        </p:txBody>
-      </p:sp>
-      <p:sp>
-        <p:nvSpPr>
-          <p:cNvPr id="32" name="Rectangle 31"/>
+              <a:t>③ Présentez à
+votre binôme
+(60 sec)</a:t>
+            </a:r>
+          </a:p>
+        </p:txBody>
+      </p:sp>
+      <p:sp>
+        <p:nvSpPr>
+          <p:cNvPr id="39" name="Rectangle 38"/>
           <p:cNvSpPr/>
           <p:nvPr/>
         </p:nvSpPr>
         <p:spPr>
           <a:xfrm>
-            <a:off x="7132320" y="3291840"/>
-            <a:ext cx="2240280" cy="685800"/>
+            <a:off x="7132320" y="3584448"/>
+            <a:ext cx="2249424" cy="960120"/>
           </a:xfrm>
           <a:prstGeom prst="rect">
             <a:avLst/>
@@ -5971,7 +6328,7 @@
           </a:solidFill>
           <a:ln w="12700">
             <a:solidFill>
-              <a:srgbClr val="007A7A"/>
+              <a:srgbClr val="008080"/>
             </a:solidFill>
           </a:ln>
         </p:spPr>
@@ -5999,14 +6356,14 @@
       </p:sp>
       <p:sp>
         <p:nvSpPr>
-          <p:cNvPr id="33" name="TextBox 32"/>
+          <p:cNvPr id="40" name="TextBox 39"/>
           <p:cNvSpPr txBox="1"/>
           <p:nvPr/>
         </p:nvSpPr>
         <p:spPr>
           <a:xfrm>
-            <a:off x="7223759" y="3337560"/>
-            <a:ext cx="2057400" cy="594360"/>
+            <a:off x="7242048" y="3639312"/>
+            <a:ext cx="2029968" cy="841248"/>
           </a:xfrm>
           <a:prstGeom prst="rect">
             <a:avLst/>
@@ -6026,21 +6383,23 @@
                   <a:srgbClr val="1A1A1A"/>
                 </a:solidFill>
               </a:rPr>
-              <a:t>4. Feedback pair : 1 force + 1 conseil</a:t>
-            </a:r>
-          </a:p>
-        </p:txBody>
-      </p:sp>
-      <p:sp>
-        <p:nvSpPr>
-          <p:cNvPr id="34" name="Rectangle 33"/>
+              <a:t>④ Feedback pair :
+1 force + 1 conseil
+(3 min)</a:t>
+            </a:r>
+          </a:p>
+        </p:txBody>
+      </p:sp>
+      <p:sp>
+        <p:nvSpPr>
+          <p:cNvPr id="41" name="Rectangle 40"/>
           <p:cNvSpPr/>
           <p:nvPr/>
         </p:nvSpPr>
         <p:spPr>
           <a:xfrm>
-            <a:off x="9418320" y="3291840"/>
-            <a:ext cx="2240280" cy="685800"/>
+            <a:off x="9418320" y="3584448"/>
+            <a:ext cx="2249424" cy="960120"/>
           </a:xfrm>
           <a:prstGeom prst="rect">
             <a:avLst/>
@@ -6050,7 +6409,7 @@
           </a:solidFill>
           <a:ln w="12700">
             <a:solidFill>
-              <a:srgbClr val="007A7A"/>
+              <a:srgbClr val="008080"/>
             </a:solidFill>
           </a:ln>
         </p:spPr>
@@ -6078,14 +6437,14 @@
       </p:sp>
       <p:sp>
         <p:nvSpPr>
-          <p:cNvPr id="35" name="TextBox 34"/>
+          <p:cNvPr id="42" name="TextBox 41"/>
           <p:cNvSpPr txBox="1"/>
           <p:nvPr/>
         </p:nvSpPr>
         <p:spPr>
           <a:xfrm>
-            <a:off x="9509760" y="3337560"/>
-            <a:ext cx="2057400" cy="594360"/>
+            <a:off x="9528048" y="3639312"/>
+            <a:ext cx="2029968" cy="841248"/>
           </a:xfrm>
           <a:prstGeom prst="rect">
             <a:avLst/>
@@ -6105,21 +6464,66 @@
                   <a:srgbClr val="1A1A1A"/>
                 </a:solidFill>
               </a:rPr>
-              <a:t>5. Améliorer et re-présenter (5 min)</a:t>
-            </a:r>
-          </a:p>
-        </p:txBody>
-      </p:sp>
-      <p:sp>
-        <p:nvSpPr>
-          <p:cNvPr id="36" name="TextBox 35"/>
+              <a:t>⑤ Améliorez et
+représentez
+(5 min)</a:t>
+            </a:r>
+          </a:p>
+        </p:txBody>
+      </p:sp>
+      <p:sp>
+        <p:nvSpPr>
+          <p:cNvPr id="43" name="Rectangle 42"/>
+          <p:cNvSpPr/>
+          <p:nvPr/>
+        </p:nvSpPr>
+        <p:spPr>
+          <a:xfrm>
+            <a:off x="274320" y="4709160"/>
+            <a:ext cx="11640312" cy="384048"/>
+          </a:xfrm>
+          <a:prstGeom prst="rect">
+            <a:avLst/>
+          </a:prstGeom>
+          <a:solidFill>
+            <a:srgbClr val="FF0000"/>
+          </a:solidFill>
+          <a:ln>
+            <a:noFill/>
+          </a:ln>
+        </p:spPr>
+        <p:style>
+          <a:lnRef idx="1">
+            <a:schemeClr val="accent1"/>
+          </a:lnRef>
+          <a:fillRef idx="3">
+            <a:schemeClr val="accent1"/>
+          </a:fillRef>
+          <a:effectRef idx="2">
+            <a:schemeClr val="accent1"/>
+          </a:effectRef>
+          <a:fontRef idx="minor">
+            <a:schemeClr val="lt1"/>
+          </a:fontRef>
+        </p:style>
+        <p:txBody>
+          <a:bodyPr rtlCol="0" anchor="ctr"/>
+          <a:lstStyle/>
+          <a:p>
+            <a:pPr algn="ctr"/>
+          </a:p>
+        </p:txBody>
+      </p:sp>
+      <p:sp>
+        <p:nvSpPr>
+          <p:cNvPr id="44" name="TextBox 43"/>
           <p:cNvSpPr txBox="1"/>
           <p:nvPr/>
         </p:nvSpPr>
         <p:spPr>
           <a:xfrm>
-            <a:off x="274320" y="4114800"/>
-            <a:ext cx="11612880" cy="731520"/>
+            <a:off x="411479" y="4782312"/>
+            <a:ext cx="11365992" cy="237744"/>
           </a:xfrm>
           <a:prstGeom prst="rect">
             <a:avLst/>
@@ -6134,27 +6538,639 @@
           <a:p>
             <a:pPr algn="l"/>
             <a:r>
-              <a:rPr sz="1100" b="0" i="0">
+              <a:rPr sz="1000" b="0" i="0">
+                <a:solidFill>
+                  <a:srgbClr val="FFFFFF"/>
+                </a:solidFill>
+              </a:rPr>
+              <a:t>Éthique fundraiser : Vous représentez l'UNICEF. Badge visible en permanence. Aucune pression sur le donateur. Respect total du refus.</a:t>
+            </a:r>
+          </a:p>
+        </p:txBody>
+      </p:sp>
+    </p:spTree>
+  </p:cSld>
+  <p:clrMapOvr>
+    <a:masterClrMapping/>
+  </p:clrMapOvr>
+</p:sld>
+</file>
+
+<file path=ppt/slides/slide4.xml><?xml version="1.0" encoding="utf-8"?>
+<p:sld xmlns:a="http://schemas.openxmlformats.org/drawingml/2006/main" xmlns:p="http://schemas.openxmlformats.org/presentationml/2006/main" xmlns:r="http://schemas.openxmlformats.org/officeDocument/2006/relationships">
+  <p:cSld>
+    <p:spTree>
+      <p:nvGrpSpPr>
+        <p:cNvPr id="1" name=""/>
+        <p:cNvGrpSpPr/>
+        <p:nvPr/>
+      </p:nvGrpSpPr>
+      <p:grpSpPr/>
+      <p:sp>
+        <p:nvSpPr>
+          <p:cNvPr id="2" name="Rectangle 1"/>
+          <p:cNvSpPr/>
+          <p:nvPr/>
+        </p:nvSpPr>
+        <p:spPr>
+          <a:xfrm>
+            <a:off x="0" y="0"/>
+            <a:ext cx="12188952" cy="6858000"/>
+          </a:xfrm>
+          <a:prstGeom prst="rect">
+            <a:avLst/>
+          </a:prstGeom>
+          <a:solidFill>
+            <a:srgbClr val="F0F7F7"/>
+          </a:solidFill>
+          <a:ln>
+            <a:noFill/>
+          </a:ln>
+        </p:spPr>
+        <p:style>
+          <a:lnRef idx="1">
+            <a:schemeClr val="accent1"/>
+          </a:lnRef>
+          <a:fillRef idx="3">
+            <a:schemeClr val="accent1"/>
+          </a:fillRef>
+          <a:effectRef idx="2">
+            <a:schemeClr val="accent1"/>
+          </a:effectRef>
+          <a:fontRef idx="minor">
+            <a:schemeClr val="lt1"/>
+          </a:fontRef>
+        </p:style>
+        <p:txBody>
+          <a:bodyPr rtlCol="0" anchor="ctr"/>
+          <a:lstStyle/>
+          <a:p>
+            <a:pPr algn="ctr"/>
+          </a:p>
+        </p:txBody>
+      </p:sp>
+      <p:sp>
+        <p:nvSpPr>
+          <p:cNvPr id="3" name="Rectangle 2"/>
+          <p:cNvSpPr/>
+          <p:nvPr/>
+        </p:nvSpPr>
+        <p:spPr>
+          <a:xfrm>
+            <a:off x="0" y="0"/>
+            <a:ext cx="12188952" cy="658368"/>
+          </a:xfrm>
+          <a:prstGeom prst="rect">
+            <a:avLst/>
+          </a:prstGeom>
+          <a:solidFill>
+            <a:srgbClr val="005555"/>
+          </a:solidFill>
+          <a:ln>
+            <a:noFill/>
+          </a:ln>
+        </p:spPr>
+        <p:style>
+          <a:lnRef idx="1">
+            <a:schemeClr val="accent1"/>
+          </a:lnRef>
+          <a:fillRef idx="3">
+            <a:schemeClr val="accent1"/>
+          </a:fillRef>
+          <a:effectRef idx="2">
+            <a:schemeClr val="accent1"/>
+          </a:effectRef>
+          <a:fontRef idx="minor">
+            <a:schemeClr val="lt1"/>
+          </a:fontRef>
+        </p:style>
+        <p:txBody>
+          <a:bodyPr rtlCol="0" anchor="ctr"/>
+          <a:lstStyle/>
+          <a:p>
+            <a:pPr algn="ctr"/>
+          </a:p>
+        </p:txBody>
+      </p:sp>
+      <p:sp>
+        <p:nvSpPr>
+          <p:cNvPr id="4" name="Rectangle 3"/>
+          <p:cNvSpPr/>
+          <p:nvPr/>
+        </p:nvSpPr>
+        <p:spPr>
+          <a:xfrm>
+            <a:off x="0" y="640080"/>
+            <a:ext cx="12188952" cy="54864"/>
+          </a:xfrm>
+          <a:prstGeom prst="rect">
+            <a:avLst/>
+          </a:prstGeom>
+          <a:solidFill>
+            <a:srgbClr val="FF0000"/>
+          </a:solidFill>
+          <a:ln>
+            <a:noFill/>
+          </a:ln>
+        </p:spPr>
+        <p:style>
+          <a:lnRef idx="1">
+            <a:schemeClr val="accent1"/>
+          </a:lnRef>
+          <a:fillRef idx="3">
+            <a:schemeClr val="accent1"/>
+          </a:fillRef>
+          <a:effectRef idx="2">
+            <a:schemeClr val="accent1"/>
+          </a:effectRef>
+          <a:fontRef idx="minor">
+            <a:schemeClr val="lt1"/>
+          </a:fontRef>
+        </p:style>
+        <p:txBody>
+          <a:bodyPr rtlCol="0" anchor="ctr"/>
+          <a:lstStyle/>
+          <a:p>
+            <a:pPr algn="ctr"/>
+          </a:p>
+        </p:txBody>
+      </p:sp>
+      <p:sp>
+        <p:nvSpPr>
+          <p:cNvPr id="5" name="TextBox 4"/>
+          <p:cNvSpPr txBox="1"/>
+          <p:nvPr/>
+        </p:nvSpPr>
+        <p:spPr>
+          <a:xfrm>
+            <a:off x="164592" y="64008"/>
+            <a:ext cx="685800" cy="530352"/>
+          </a:xfrm>
+          <a:prstGeom prst="rect">
+            <a:avLst/>
+          </a:prstGeom>
+          <a:noFill/>
+        </p:spPr>
+        <p:txBody>
+          <a:bodyPr wrap="square">
+            <a:spAutoFit/>
+          </a:bodyPr>
+          <a:lstStyle/>
+          <a:p>
+            <a:pPr algn="l"/>
+            <a:r>
+              <a:rPr sz="2000" b="1" i="0">
+                <a:solidFill>
+                  <a:srgbClr val="FFFFFF"/>
+                </a:solidFill>
+              </a:rPr>
+              <a:t>SHY</a:t>
+            </a:r>
+          </a:p>
+        </p:txBody>
+      </p:sp>
+      <p:sp>
+        <p:nvSpPr>
+          <p:cNvPr id="6" name="Rectangle 5"/>
+          <p:cNvSpPr/>
+          <p:nvPr/>
+        </p:nvSpPr>
+        <p:spPr>
+          <a:xfrm>
+            <a:off x="914400" y="91440"/>
+            <a:ext cx="36576" cy="475488"/>
+          </a:xfrm>
+          <a:prstGeom prst="rect">
+            <a:avLst/>
+          </a:prstGeom>
+          <a:solidFill>
+            <a:srgbClr val="FF0000"/>
+          </a:solidFill>
+          <a:ln>
+            <a:noFill/>
+          </a:ln>
+        </p:spPr>
+        <p:style>
+          <a:lnRef idx="1">
+            <a:schemeClr val="accent1"/>
+          </a:lnRef>
+          <a:fillRef idx="3">
+            <a:schemeClr val="accent1"/>
+          </a:fillRef>
+          <a:effectRef idx="2">
+            <a:schemeClr val="accent1"/>
+          </a:effectRef>
+          <a:fontRef idx="minor">
+            <a:schemeClr val="lt1"/>
+          </a:fontRef>
+        </p:style>
+        <p:txBody>
+          <a:bodyPr rtlCol="0" anchor="ctr"/>
+          <a:lstStyle/>
+          <a:p>
+            <a:pPr algn="ctr"/>
+          </a:p>
+        </p:txBody>
+      </p:sp>
+      <p:sp>
+        <p:nvSpPr>
+          <p:cNvPr id="7" name="TextBox 6"/>
+          <p:cNvSpPr txBox="1"/>
+          <p:nvPr/>
+        </p:nvSpPr>
+        <p:spPr>
+          <a:xfrm>
+            <a:off x="1024128" y="91440"/>
+            <a:ext cx="10881360" cy="475488"/>
+          </a:xfrm>
+          <a:prstGeom prst="rect">
+            <a:avLst/>
+          </a:prstGeom>
+          <a:noFill/>
+        </p:spPr>
+        <p:txBody>
+          <a:bodyPr wrap="square">
+            <a:spAutoFit/>
+          </a:bodyPr>
+          <a:lstStyle/>
+          <a:p>
+            <a:pPr algn="l"/>
+            <a:r>
+              <a:rPr sz="1700" b="1" i="0">
+                <a:solidFill>
+                  <a:srgbClr val="FFFFFF"/>
+                </a:solidFill>
+              </a:rPr>
+              <a:t>Votre Posture de Fundraiser — Ce que le donateur perçoit en 7 secondes</a:t>
+            </a:r>
+          </a:p>
+        </p:txBody>
+      </p:sp>
+      <p:sp>
+        <p:nvSpPr>
+          <p:cNvPr id="8" name="Rectangle 7"/>
+          <p:cNvSpPr/>
+          <p:nvPr/>
+        </p:nvSpPr>
+        <p:spPr>
+          <a:xfrm>
+            <a:off x="0" y="6492240"/>
+            <a:ext cx="12188952" cy="365760"/>
+          </a:xfrm>
+          <a:prstGeom prst="rect">
+            <a:avLst/>
+          </a:prstGeom>
+          <a:solidFill>
+            <a:srgbClr val="005555"/>
+          </a:solidFill>
+          <a:ln>
+            <a:noFill/>
+          </a:ln>
+        </p:spPr>
+        <p:style>
+          <a:lnRef idx="1">
+            <a:schemeClr val="accent1"/>
+          </a:lnRef>
+          <a:fillRef idx="3">
+            <a:schemeClr val="accent1"/>
+          </a:fillRef>
+          <a:effectRef idx="2">
+            <a:schemeClr val="accent1"/>
+          </a:effectRef>
+          <a:fontRef idx="minor">
+            <a:schemeClr val="lt1"/>
+          </a:fontRef>
+        </p:style>
+        <p:txBody>
+          <a:bodyPr rtlCol="0" anchor="ctr"/>
+          <a:lstStyle/>
+          <a:p>
+            <a:pPr algn="ctr"/>
+          </a:p>
+        </p:txBody>
+      </p:sp>
+      <p:sp>
+        <p:nvSpPr>
+          <p:cNvPr id="9" name="TextBox 8"/>
+          <p:cNvSpPr txBox="1"/>
+          <p:nvPr/>
+        </p:nvSpPr>
+        <p:spPr>
+          <a:xfrm>
+            <a:off x="0" y="6519672"/>
+            <a:ext cx="12188952" cy="274320"/>
+          </a:xfrm>
+          <a:prstGeom prst="rect">
+            <a:avLst/>
+          </a:prstGeom>
+          <a:noFill/>
+        </p:spPr>
+        <p:txBody>
+          <a:bodyPr wrap="square">
+            <a:spAutoFit/>
+          </a:bodyPr>
+          <a:lstStyle/>
+          <a:p>
+            <a:pPr algn="ctr"/>
+            <a:r>
+              <a:rPr sz="900" b="0" i="0">
+                <a:solidFill>
+                  <a:srgbClr val="FFFFFF"/>
+                </a:solidFill>
+              </a:rPr>
+              <a:t>SHY-Performance  ·  Formation FIM  ·  V6-01062026SHY-TE</a:t>
+            </a:r>
+          </a:p>
+        </p:txBody>
+      </p:sp>
+      <p:sp>
+        <p:nvSpPr>
+          <p:cNvPr id="10" name="Rectangle 9"/>
+          <p:cNvSpPr/>
+          <p:nvPr/>
+        </p:nvSpPr>
+        <p:spPr>
+          <a:xfrm>
+            <a:off x="274320" y="822960"/>
+            <a:ext cx="5669280" cy="329184"/>
+          </a:xfrm>
+          <a:prstGeom prst="rect">
+            <a:avLst/>
+          </a:prstGeom>
+          <a:solidFill>
+            <a:srgbClr val="008080"/>
+          </a:solidFill>
+          <a:ln>
+            <a:noFill/>
+          </a:ln>
+        </p:spPr>
+        <p:style>
+          <a:lnRef idx="1">
+            <a:schemeClr val="accent1"/>
+          </a:lnRef>
+          <a:fillRef idx="3">
+            <a:schemeClr val="accent1"/>
+          </a:fillRef>
+          <a:effectRef idx="2">
+            <a:schemeClr val="accent1"/>
+          </a:effectRef>
+          <a:fontRef idx="minor">
+            <a:schemeClr val="lt1"/>
+          </a:fontRef>
+        </p:style>
+        <p:txBody>
+          <a:bodyPr rtlCol="0" anchor="ctr"/>
+          <a:lstStyle/>
+          <a:p>
+            <a:pPr algn="ctr"/>
+          </a:p>
+        </p:txBody>
+      </p:sp>
+      <p:sp>
+        <p:nvSpPr>
+          <p:cNvPr id="11" name="TextBox 10"/>
+          <p:cNvSpPr txBox="1"/>
+          <p:nvPr/>
+        </p:nvSpPr>
+        <p:spPr>
+          <a:xfrm>
+            <a:off x="384048" y="868680"/>
+            <a:ext cx="5486400" cy="256032"/>
+          </a:xfrm>
+          <a:prstGeom prst="rect">
+            <a:avLst/>
+          </a:prstGeom>
+          <a:noFill/>
+        </p:spPr>
+        <p:txBody>
+          <a:bodyPr wrap="square">
+            <a:spAutoFit/>
+          </a:bodyPr>
+          <a:lstStyle/>
+          <a:p>
+            <a:pPr algn="l"/>
+            <a:r>
+              <a:rPr sz="1100" b="1" i="0">
+                <a:solidFill>
+                  <a:srgbClr val="FFFFFF"/>
+                </a:solidFill>
+              </a:rPr>
+              <a:t>Ce qui fait une accroche réussie</a:t>
+            </a:r>
+          </a:p>
+        </p:txBody>
+      </p:sp>
+      <p:sp>
+        <p:nvSpPr>
+          <p:cNvPr id="12" name="Rectangle 11"/>
+          <p:cNvSpPr/>
+          <p:nvPr/>
+        </p:nvSpPr>
+        <p:spPr>
+          <a:xfrm>
+            <a:off x="6355080" y="822960"/>
+            <a:ext cx="5669280" cy="329184"/>
+          </a:xfrm>
+          <a:prstGeom prst="rect">
+            <a:avLst/>
+          </a:prstGeom>
+          <a:solidFill>
+            <a:srgbClr val="008080"/>
+          </a:solidFill>
+          <a:ln>
+            <a:noFill/>
+          </a:ln>
+        </p:spPr>
+        <p:style>
+          <a:lnRef idx="1">
+            <a:schemeClr val="accent1"/>
+          </a:lnRef>
+          <a:fillRef idx="3">
+            <a:schemeClr val="accent1"/>
+          </a:fillRef>
+          <a:effectRef idx="2">
+            <a:schemeClr val="accent1"/>
+          </a:effectRef>
+          <a:fontRef idx="minor">
+            <a:schemeClr val="lt1"/>
+          </a:fontRef>
+        </p:style>
+        <p:txBody>
+          <a:bodyPr rtlCol="0" anchor="ctr"/>
+          <a:lstStyle/>
+          <a:p>
+            <a:pPr algn="ctr"/>
+          </a:p>
+        </p:txBody>
+      </p:sp>
+      <p:sp>
+        <p:nvSpPr>
+          <p:cNvPr id="13" name="TextBox 12"/>
+          <p:cNvSpPr txBox="1"/>
+          <p:nvPr/>
+        </p:nvSpPr>
+        <p:spPr>
+          <a:xfrm>
+            <a:off x="6464808" y="868680"/>
+            <a:ext cx="5486400" cy="256032"/>
+          </a:xfrm>
+          <a:prstGeom prst="rect">
+            <a:avLst/>
+          </a:prstGeom>
+          <a:noFill/>
+        </p:spPr>
+        <p:txBody>
+          <a:bodyPr wrap="square">
+            <a:spAutoFit/>
+          </a:bodyPr>
+          <a:lstStyle/>
+          <a:p>
+            <a:pPr algn="l"/>
+            <a:r>
+              <a:rPr sz="1100" b="1" i="0">
+                <a:solidFill>
+                  <a:srgbClr val="FFFFFF"/>
+                </a:solidFill>
+              </a:rPr>
+              <a:t>Ce qui fait fuir le donateur</a:t>
+            </a:r>
+          </a:p>
+        </p:txBody>
+      </p:sp>
+      <p:sp>
+        <p:nvSpPr>
+          <p:cNvPr id="14" name="Rectangle 13"/>
+          <p:cNvSpPr/>
+          <p:nvPr/>
+        </p:nvSpPr>
+        <p:spPr>
+          <a:xfrm>
+            <a:off x="274320" y="1207008"/>
+            <a:ext cx="5669280" cy="402336"/>
+          </a:xfrm>
+          <a:prstGeom prst="rect">
+            <a:avLst/>
+          </a:prstGeom>
+          <a:solidFill>
+            <a:srgbClr val="F0F7F7"/>
+          </a:solidFill>
+          <a:ln w="5080">
+            <a:solidFill>
+              <a:srgbClr val="008080"/>
+            </a:solidFill>
+          </a:ln>
+        </p:spPr>
+        <p:style>
+          <a:lnRef idx="1">
+            <a:schemeClr val="accent1"/>
+          </a:lnRef>
+          <a:fillRef idx="3">
+            <a:schemeClr val="accent1"/>
+          </a:fillRef>
+          <a:effectRef idx="2">
+            <a:schemeClr val="accent1"/>
+          </a:effectRef>
+          <a:fontRef idx="minor">
+            <a:schemeClr val="lt1"/>
+          </a:fontRef>
+        </p:style>
+        <p:txBody>
+          <a:bodyPr rtlCol="0" anchor="ctr"/>
+          <a:lstStyle/>
+          <a:p>
+            <a:pPr algn="ctr"/>
+          </a:p>
+        </p:txBody>
+      </p:sp>
+      <p:sp>
+        <p:nvSpPr>
+          <p:cNvPr id="15" name="TextBox 14"/>
+          <p:cNvSpPr txBox="1"/>
+          <p:nvPr/>
+        </p:nvSpPr>
+        <p:spPr>
+          <a:xfrm>
+            <a:off x="402336" y="1261872"/>
+            <a:ext cx="5440680" cy="329184"/>
+          </a:xfrm>
+          <a:prstGeom prst="rect">
+            <a:avLst/>
+          </a:prstGeom>
+          <a:noFill/>
+        </p:spPr>
+        <p:txBody>
+          <a:bodyPr wrap="square">
+            <a:spAutoFit/>
+          </a:bodyPr>
+          <a:lstStyle/>
+          <a:p>
+            <a:pPr algn="l"/>
+            <a:r>
+              <a:rPr sz="1000" b="0" i="0">
                 <a:solidFill>
                   <a:srgbClr val="1A1A1A"/>
                 </a:solidFill>
               </a:rPr>
-              <a:t>Debate (Bloom 5) : 'Le don mensuel régulier est-il éthique ?'
-2 équipes · 5 min préparation · 10 min débat · 5 min synthèse formateur</a:t>
-            </a:r>
-          </a:p>
-        </p:txBody>
-      </p:sp>
-      <p:sp>
-        <p:nvSpPr>
-          <p:cNvPr id="37" name="TextBox 36"/>
+              <a:t>• Contact visuel direct et souriant — avant de parler</a:t>
+            </a:r>
+          </a:p>
+        </p:txBody>
+      </p:sp>
+      <p:sp>
+        <p:nvSpPr>
+          <p:cNvPr id="16" name="Rectangle 15"/>
+          <p:cNvSpPr/>
+          <p:nvPr/>
+        </p:nvSpPr>
+        <p:spPr>
+          <a:xfrm>
+            <a:off x="274320" y="1627632"/>
+            <a:ext cx="5669280" cy="402336"/>
+          </a:xfrm>
+          <a:prstGeom prst="rect">
+            <a:avLst/>
+          </a:prstGeom>
+          <a:solidFill>
+            <a:srgbClr val="F0F7F7"/>
+          </a:solidFill>
+          <a:ln w="5080">
+            <a:solidFill>
+              <a:srgbClr val="008080"/>
+            </a:solidFill>
+          </a:ln>
+        </p:spPr>
+        <p:style>
+          <a:lnRef idx="1">
+            <a:schemeClr val="accent1"/>
+          </a:lnRef>
+          <a:fillRef idx="3">
+            <a:schemeClr val="accent1"/>
+          </a:fillRef>
+          <a:effectRef idx="2">
+            <a:schemeClr val="accent1"/>
+          </a:effectRef>
+          <a:fontRef idx="minor">
+            <a:schemeClr val="lt1"/>
+          </a:fontRef>
+        </p:style>
+        <p:txBody>
+          <a:bodyPr rtlCol="0" anchor="ctr"/>
+          <a:lstStyle/>
+          <a:p>
+            <a:pPr algn="ctr"/>
+          </a:p>
+        </p:txBody>
+      </p:sp>
+      <p:sp>
+        <p:nvSpPr>
+          <p:cNvPr id="17" name="TextBox 16"/>
           <p:cNvSpPr txBox="1"/>
           <p:nvPr/>
         </p:nvSpPr>
         <p:spPr>
           <a:xfrm>
-            <a:off x="274320" y="4983480"/>
-            <a:ext cx="11612880" cy="320040"/>
+            <a:off x="402336" y="1682496"/>
+            <a:ext cx="5440680" cy="329184"/>
           </a:xfrm>
           <a:prstGeom prst="rect">
             <a:avLst/>
@@ -6169,26 +7185,71 @@
           <a:p>
             <a:pPr algn="l"/>
             <a:r>
-              <a:rPr sz="1100" b="1" i="0">
+              <a:rPr sz="1000" b="0" i="0">
                 <a:solidFill>
-                  <a:srgbClr val="005050"/>
+                  <a:srgbClr val="1A1A1A"/>
                 </a:solidFill>
               </a:rPr>
-              <a:t>🔗 Lien identitaire : cartographie mentale valeurs personnelles ↔ valeurs UNICEF</a:t>
-            </a:r>
-          </a:p>
-        </p:txBody>
-      </p:sp>
-      <p:sp>
-        <p:nvSpPr>
-          <p:cNvPr id="38" name="TextBox 37"/>
+              <a:t>• Corps ouvert, pieds parallèles, bras détendus</a:t>
+            </a:r>
+          </a:p>
+        </p:txBody>
+      </p:sp>
+      <p:sp>
+        <p:nvSpPr>
+          <p:cNvPr id="18" name="Rectangle 17"/>
+          <p:cNvSpPr/>
+          <p:nvPr/>
+        </p:nvSpPr>
+        <p:spPr>
+          <a:xfrm>
+            <a:off x="274320" y="2048256"/>
+            <a:ext cx="5669280" cy="402336"/>
+          </a:xfrm>
+          <a:prstGeom prst="rect">
+            <a:avLst/>
+          </a:prstGeom>
+          <a:solidFill>
+            <a:srgbClr val="F0F7F7"/>
+          </a:solidFill>
+          <a:ln w="5080">
+            <a:solidFill>
+              <a:srgbClr val="008080"/>
+            </a:solidFill>
+          </a:ln>
+        </p:spPr>
+        <p:style>
+          <a:lnRef idx="1">
+            <a:schemeClr val="accent1"/>
+          </a:lnRef>
+          <a:fillRef idx="3">
+            <a:schemeClr val="accent1"/>
+          </a:fillRef>
+          <a:effectRef idx="2">
+            <a:schemeClr val="accent1"/>
+          </a:effectRef>
+          <a:fontRef idx="minor">
+            <a:schemeClr val="lt1"/>
+          </a:fontRef>
+        </p:style>
+        <p:txBody>
+          <a:bodyPr rtlCol="0" anchor="ctr"/>
+          <a:lstStyle/>
+          <a:p>
+            <a:pPr algn="ctr"/>
+          </a:p>
+        </p:txBody>
+      </p:sp>
+      <p:sp>
+        <p:nvSpPr>
+          <p:cNvPr id="19" name="TextBox 18"/>
           <p:cNvSpPr txBox="1"/>
           <p:nvPr/>
         </p:nvSpPr>
         <p:spPr>
           <a:xfrm>
-            <a:off x="0" y="6492240"/>
-            <a:ext cx="12188952" cy="365760"/>
+            <a:off x="402336" y="2103120"/>
+            <a:ext cx="5440680" cy="329184"/>
           </a:xfrm>
           <a:prstGeom prst="rect">
             <a:avLst/>
@@ -6201,14 +7262,644 @@
           </a:bodyPr>
           <a:lstStyle/>
           <a:p>
-            <a:pPr algn="ctr"/>
-            <a:r>
-              <a:rPr sz="800" b="0" i="0">
+            <a:pPr algn="l"/>
+            <a:r>
+              <a:rPr sz="1000" b="0" i="0">
                 <a:solidFill>
-                  <a:srgbClr val="888888"/>
+                  <a:srgbClr val="1A1A1A"/>
                 </a:solidFill>
               </a:rPr>
-              <a:t>SHY-Performance · V6-01062026SHY-TE</a:t>
+              <a:t>• Ton de voix chaleureux et assuré — ni trop fort, ni trop doux</a:t>
+            </a:r>
+          </a:p>
+        </p:txBody>
+      </p:sp>
+      <p:sp>
+        <p:nvSpPr>
+          <p:cNvPr id="20" name="Rectangle 19"/>
+          <p:cNvSpPr/>
+          <p:nvPr/>
+        </p:nvSpPr>
+        <p:spPr>
+          <a:xfrm>
+            <a:off x="274320" y="2468880"/>
+            <a:ext cx="5669280" cy="402336"/>
+          </a:xfrm>
+          <a:prstGeom prst="rect">
+            <a:avLst/>
+          </a:prstGeom>
+          <a:solidFill>
+            <a:srgbClr val="F0F7F7"/>
+          </a:solidFill>
+          <a:ln w="5080">
+            <a:solidFill>
+              <a:srgbClr val="008080"/>
+            </a:solidFill>
+          </a:ln>
+        </p:spPr>
+        <p:style>
+          <a:lnRef idx="1">
+            <a:schemeClr val="accent1"/>
+          </a:lnRef>
+          <a:fillRef idx="3">
+            <a:schemeClr val="accent1"/>
+          </a:fillRef>
+          <a:effectRef idx="2">
+            <a:schemeClr val="accent1"/>
+          </a:effectRef>
+          <a:fontRef idx="minor">
+            <a:schemeClr val="lt1"/>
+          </a:fontRef>
+        </p:style>
+        <p:txBody>
+          <a:bodyPr rtlCol="0" anchor="ctr"/>
+          <a:lstStyle/>
+          <a:p>
+            <a:pPr algn="ctr"/>
+          </a:p>
+        </p:txBody>
+      </p:sp>
+      <p:sp>
+        <p:nvSpPr>
+          <p:cNvPr id="21" name="TextBox 20"/>
+          <p:cNvSpPr txBox="1"/>
+          <p:nvPr/>
+        </p:nvSpPr>
+        <p:spPr>
+          <a:xfrm>
+            <a:off x="402336" y="2523744"/>
+            <a:ext cx="5440680" cy="329184"/>
+          </a:xfrm>
+          <a:prstGeom prst="rect">
+            <a:avLst/>
+          </a:prstGeom>
+          <a:noFill/>
+        </p:spPr>
+        <p:txBody>
+          <a:bodyPr wrap="square">
+            <a:spAutoFit/>
+          </a:bodyPr>
+          <a:lstStyle/>
+          <a:p>
+            <a:pPr algn="l"/>
+            <a:r>
+              <a:rPr sz="1000" b="0" i="0">
+                <a:solidFill>
+                  <a:srgbClr val="1A1A1A"/>
+                </a:solidFill>
+              </a:rPr>
+              <a:t>• Question ouverte qui invite à s'arrêter</a:t>
+            </a:r>
+          </a:p>
+        </p:txBody>
+      </p:sp>
+      <p:sp>
+        <p:nvSpPr>
+          <p:cNvPr id="22" name="Rectangle 21"/>
+          <p:cNvSpPr/>
+          <p:nvPr/>
+        </p:nvSpPr>
+        <p:spPr>
+          <a:xfrm>
+            <a:off x="274320" y="2889504"/>
+            <a:ext cx="5669280" cy="402336"/>
+          </a:xfrm>
+          <a:prstGeom prst="rect">
+            <a:avLst/>
+          </a:prstGeom>
+          <a:solidFill>
+            <a:srgbClr val="F0F7F7"/>
+          </a:solidFill>
+          <a:ln w="5080">
+            <a:solidFill>
+              <a:srgbClr val="008080"/>
+            </a:solidFill>
+          </a:ln>
+        </p:spPr>
+        <p:style>
+          <a:lnRef idx="1">
+            <a:schemeClr val="accent1"/>
+          </a:lnRef>
+          <a:fillRef idx="3">
+            <a:schemeClr val="accent1"/>
+          </a:fillRef>
+          <a:effectRef idx="2">
+            <a:schemeClr val="accent1"/>
+          </a:effectRef>
+          <a:fontRef idx="minor">
+            <a:schemeClr val="lt1"/>
+          </a:fontRef>
+        </p:style>
+        <p:txBody>
+          <a:bodyPr rtlCol="0" anchor="ctr"/>
+          <a:lstStyle/>
+          <a:p>
+            <a:pPr algn="ctr"/>
+          </a:p>
+        </p:txBody>
+      </p:sp>
+      <p:sp>
+        <p:nvSpPr>
+          <p:cNvPr id="23" name="TextBox 22"/>
+          <p:cNvSpPr txBox="1"/>
+          <p:nvPr/>
+        </p:nvSpPr>
+        <p:spPr>
+          <a:xfrm>
+            <a:off x="402336" y="2944368"/>
+            <a:ext cx="5440680" cy="329184"/>
+          </a:xfrm>
+          <a:prstGeom prst="rect">
+            <a:avLst/>
+          </a:prstGeom>
+          <a:noFill/>
+        </p:spPr>
+        <p:txBody>
+          <a:bodyPr wrap="square">
+            <a:spAutoFit/>
+          </a:bodyPr>
+          <a:lstStyle/>
+          <a:p>
+            <a:pPr algn="l"/>
+            <a:r>
+              <a:rPr sz="1000" b="0" i="0">
+                <a:solidFill>
+                  <a:srgbClr val="1A1A1A"/>
+                </a:solidFill>
+              </a:rPr>
+              <a:t>• Énergie positive constante — même après le 10ème refus</a:t>
+            </a:r>
+          </a:p>
+        </p:txBody>
+      </p:sp>
+      <p:sp>
+        <p:nvSpPr>
+          <p:cNvPr id="24" name="Rectangle 23"/>
+          <p:cNvSpPr/>
+          <p:nvPr/>
+        </p:nvSpPr>
+        <p:spPr>
+          <a:xfrm>
+            <a:off x="6355080" y="1207008"/>
+            <a:ext cx="5669280" cy="402336"/>
+          </a:xfrm>
+          <a:prstGeom prst="rect">
+            <a:avLst/>
+          </a:prstGeom>
+          <a:solidFill>
+            <a:srgbClr val="F0F7F7"/>
+          </a:solidFill>
+          <a:ln w="5080">
+            <a:solidFill>
+              <a:srgbClr val="008080"/>
+            </a:solidFill>
+          </a:ln>
+        </p:spPr>
+        <p:style>
+          <a:lnRef idx="1">
+            <a:schemeClr val="accent1"/>
+          </a:lnRef>
+          <a:fillRef idx="3">
+            <a:schemeClr val="accent1"/>
+          </a:fillRef>
+          <a:effectRef idx="2">
+            <a:schemeClr val="accent1"/>
+          </a:effectRef>
+          <a:fontRef idx="minor">
+            <a:schemeClr val="lt1"/>
+          </a:fontRef>
+        </p:style>
+        <p:txBody>
+          <a:bodyPr rtlCol="0" anchor="ctr"/>
+          <a:lstStyle/>
+          <a:p>
+            <a:pPr algn="ctr"/>
+          </a:p>
+        </p:txBody>
+      </p:sp>
+      <p:sp>
+        <p:nvSpPr>
+          <p:cNvPr id="25" name="TextBox 24"/>
+          <p:cNvSpPr txBox="1"/>
+          <p:nvPr/>
+        </p:nvSpPr>
+        <p:spPr>
+          <a:xfrm>
+            <a:off x="6483096" y="1261872"/>
+            <a:ext cx="5440680" cy="329184"/>
+          </a:xfrm>
+          <a:prstGeom prst="rect">
+            <a:avLst/>
+          </a:prstGeom>
+          <a:noFill/>
+        </p:spPr>
+        <p:txBody>
+          <a:bodyPr wrap="square">
+            <a:spAutoFit/>
+          </a:bodyPr>
+          <a:lstStyle/>
+          <a:p>
+            <a:pPr algn="l"/>
+            <a:r>
+              <a:rPr sz="1000" b="0" i="0">
+                <a:solidFill>
+                  <a:srgbClr val="1A1A1A"/>
+                </a:solidFill>
+              </a:rPr>
+              <a:t>• Regard fuyant ou insistant</a:t>
+            </a:r>
+          </a:p>
+        </p:txBody>
+      </p:sp>
+      <p:sp>
+        <p:nvSpPr>
+          <p:cNvPr id="26" name="Rectangle 25"/>
+          <p:cNvSpPr/>
+          <p:nvPr/>
+        </p:nvSpPr>
+        <p:spPr>
+          <a:xfrm>
+            <a:off x="6355080" y="1627632"/>
+            <a:ext cx="5669280" cy="402336"/>
+          </a:xfrm>
+          <a:prstGeom prst="rect">
+            <a:avLst/>
+          </a:prstGeom>
+          <a:solidFill>
+            <a:srgbClr val="F0F7F7"/>
+          </a:solidFill>
+          <a:ln w="5080">
+            <a:solidFill>
+              <a:srgbClr val="008080"/>
+            </a:solidFill>
+          </a:ln>
+        </p:spPr>
+        <p:style>
+          <a:lnRef idx="1">
+            <a:schemeClr val="accent1"/>
+          </a:lnRef>
+          <a:fillRef idx="3">
+            <a:schemeClr val="accent1"/>
+          </a:fillRef>
+          <a:effectRef idx="2">
+            <a:schemeClr val="accent1"/>
+          </a:effectRef>
+          <a:fontRef idx="minor">
+            <a:schemeClr val="lt1"/>
+          </a:fontRef>
+        </p:style>
+        <p:txBody>
+          <a:bodyPr rtlCol="0" anchor="ctr"/>
+          <a:lstStyle/>
+          <a:p>
+            <a:pPr algn="ctr"/>
+          </a:p>
+        </p:txBody>
+      </p:sp>
+      <p:sp>
+        <p:nvSpPr>
+          <p:cNvPr id="27" name="TextBox 26"/>
+          <p:cNvSpPr txBox="1"/>
+          <p:nvPr/>
+        </p:nvSpPr>
+        <p:spPr>
+          <a:xfrm>
+            <a:off x="6483096" y="1682496"/>
+            <a:ext cx="5440680" cy="329184"/>
+          </a:xfrm>
+          <a:prstGeom prst="rect">
+            <a:avLst/>
+          </a:prstGeom>
+          <a:noFill/>
+        </p:spPr>
+        <p:txBody>
+          <a:bodyPr wrap="square">
+            <a:spAutoFit/>
+          </a:bodyPr>
+          <a:lstStyle/>
+          <a:p>
+            <a:pPr algn="l"/>
+            <a:r>
+              <a:rPr sz="1000" b="0" i="0">
+                <a:solidFill>
+                  <a:srgbClr val="1A1A1A"/>
+                </a:solidFill>
+              </a:rPr>
+              <a:t>• Corps en tension, bras croisés ou agités</a:t>
+            </a:r>
+          </a:p>
+        </p:txBody>
+      </p:sp>
+      <p:sp>
+        <p:nvSpPr>
+          <p:cNvPr id="28" name="Rectangle 27"/>
+          <p:cNvSpPr/>
+          <p:nvPr/>
+        </p:nvSpPr>
+        <p:spPr>
+          <a:xfrm>
+            <a:off x="6355080" y="2048256"/>
+            <a:ext cx="5669280" cy="402336"/>
+          </a:xfrm>
+          <a:prstGeom prst="rect">
+            <a:avLst/>
+          </a:prstGeom>
+          <a:solidFill>
+            <a:srgbClr val="F0F7F7"/>
+          </a:solidFill>
+          <a:ln w="5080">
+            <a:solidFill>
+              <a:srgbClr val="008080"/>
+            </a:solidFill>
+          </a:ln>
+        </p:spPr>
+        <p:style>
+          <a:lnRef idx="1">
+            <a:schemeClr val="accent1"/>
+          </a:lnRef>
+          <a:fillRef idx="3">
+            <a:schemeClr val="accent1"/>
+          </a:fillRef>
+          <a:effectRef idx="2">
+            <a:schemeClr val="accent1"/>
+          </a:effectRef>
+          <a:fontRef idx="minor">
+            <a:schemeClr val="lt1"/>
+          </a:fontRef>
+        </p:style>
+        <p:txBody>
+          <a:bodyPr rtlCol="0" anchor="ctr"/>
+          <a:lstStyle/>
+          <a:p>
+            <a:pPr algn="ctr"/>
+          </a:p>
+        </p:txBody>
+      </p:sp>
+      <p:sp>
+        <p:nvSpPr>
+          <p:cNvPr id="29" name="TextBox 28"/>
+          <p:cNvSpPr txBox="1"/>
+          <p:nvPr/>
+        </p:nvSpPr>
+        <p:spPr>
+          <a:xfrm>
+            <a:off x="6483096" y="2103120"/>
+            <a:ext cx="5440680" cy="329184"/>
+          </a:xfrm>
+          <a:prstGeom prst="rect">
+            <a:avLst/>
+          </a:prstGeom>
+          <a:noFill/>
+        </p:spPr>
+        <p:txBody>
+          <a:bodyPr wrap="square">
+            <a:spAutoFit/>
+          </a:bodyPr>
+          <a:lstStyle/>
+          <a:p>
+            <a:pPr algn="l"/>
+            <a:r>
+              <a:rPr sz="1000" b="0" i="0">
+                <a:solidFill>
+                  <a:srgbClr val="1A1A1A"/>
+                </a:solidFill>
+              </a:rPr>
+              <a:t>• Formule d'excuse : 'Excusez-moi de vous déranger…'</a:t>
+            </a:r>
+          </a:p>
+        </p:txBody>
+      </p:sp>
+      <p:sp>
+        <p:nvSpPr>
+          <p:cNvPr id="30" name="Rectangle 29"/>
+          <p:cNvSpPr/>
+          <p:nvPr/>
+        </p:nvSpPr>
+        <p:spPr>
+          <a:xfrm>
+            <a:off x="6355080" y="2468880"/>
+            <a:ext cx="5669280" cy="402336"/>
+          </a:xfrm>
+          <a:prstGeom prst="rect">
+            <a:avLst/>
+          </a:prstGeom>
+          <a:solidFill>
+            <a:srgbClr val="F0F7F7"/>
+          </a:solidFill>
+          <a:ln w="5080">
+            <a:solidFill>
+              <a:srgbClr val="008080"/>
+            </a:solidFill>
+          </a:ln>
+        </p:spPr>
+        <p:style>
+          <a:lnRef idx="1">
+            <a:schemeClr val="accent1"/>
+          </a:lnRef>
+          <a:fillRef idx="3">
+            <a:schemeClr val="accent1"/>
+          </a:fillRef>
+          <a:effectRef idx="2">
+            <a:schemeClr val="accent1"/>
+          </a:effectRef>
+          <a:fontRef idx="minor">
+            <a:schemeClr val="lt1"/>
+          </a:fontRef>
+        </p:style>
+        <p:txBody>
+          <a:bodyPr rtlCol="0" anchor="ctr"/>
+          <a:lstStyle/>
+          <a:p>
+            <a:pPr algn="ctr"/>
+          </a:p>
+        </p:txBody>
+      </p:sp>
+      <p:sp>
+        <p:nvSpPr>
+          <p:cNvPr id="31" name="TextBox 30"/>
+          <p:cNvSpPr txBox="1"/>
+          <p:nvPr/>
+        </p:nvSpPr>
+        <p:spPr>
+          <a:xfrm>
+            <a:off x="6483096" y="2523744"/>
+            <a:ext cx="5440680" cy="329184"/>
+          </a:xfrm>
+          <a:prstGeom prst="rect">
+            <a:avLst/>
+          </a:prstGeom>
+          <a:noFill/>
+        </p:spPr>
+        <p:txBody>
+          <a:bodyPr wrap="square">
+            <a:spAutoFit/>
+          </a:bodyPr>
+          <a:lstStyle/>
+          <a:p>
+            <a:pPr algn="l"/>
+            <a:r>
+              <a:rPr sz="1000" b="0" i="0">
+                <a:solidFill>
+                  <a:srgbClr val="1A1A1A"/>
+                </a:solidFill>
+              </a:rPr>
+              <a:t>• Question fermée : 'Vous avez 2 minutes ?' (réponse attendue : Non)</a:t>
+            </a:r>
+          </a:p>
+        </p:txBody>
+      </p:sp>
+      <p:sp>
+        <p:nvSpPr>
+          <p:cNvPr id="32" name="Rectangle 31"/>
+          <p:cNvSpPr/>
+          <p:nvPr/>
+        </p:nvSpPr>
+        <p:spPr>
+          <a:xfrm>
+            <a:off x="6355080" y="2889504"/>
+            <a:ext cx="5669280" cy="402336"/>
+          </a:xfrm>
+          <a:prstGeom prst="rect">
+            <a:avLst/>
+          </a:prstGeom>
+          <a:solidFill>
+            <a:srgbClr val="F0F7F7"/>
+          </a:solidFill>
+          <a:ln w="5080">
+            <a:solidFill>
+              <a:srgbClr val="008080"/>
+            </a:solidFill>
+          </a:ln>
+        </p:spPr>
+        <p:style>
+          <a:lnRef idx="1">
+            <a:schemeClr val="accent1"/>
+          </a:lnRef>
+          <a:fillRef idx="3">
+            <a:schemeClr val="accent1"/>
+          </a:fillRef>
+          <a:effectRef idx="2">
+            <a:schemeClr val="accent1"/>
+          </a:effectRef>
+          <a:fontRef idx="minor">
+            <a:schemeClr val="lt1"/>
+          </a:fontRef>
+        </p:style>
+        <p:txBody>
+          <a:bodyPr rtlCol="0" anchor="ctr"/>
+          <a:lstStyle/>
+          <a:p>
+            <a:pPr algn="ctr"/>
+          </a:p>
+        </p:txBody>
+      </p:sp>
+      <p:sp>
+        <p:nvSpPr>
+          <p:cNvPr id="33" name="TextBox 32"/>
+          <p:cNvSpPr txBox="1"/>
+          <p:nvPr/>
+        </p:nvSpPr>
+        <p:spPr>
+          <a:xfrm>
+            <a:off x="6483096" y="2944368"/>
+            <a:ext cx="5440680" cy="329184"/>
+          </a:xfrm>
+          <a:prstGeom prst="rect">
+            <a:avLst/>
+          </a:prstGeom>
+          <a:noFill/>
+        </p:spPr>
+        <p:txBody>
+          <a:bodyPr wrap="square">
+            <a:spAutoFit/>
+          </a:bodyPr>
+          <a:lstStyle/>
+          <a:p>
+            <a:pPr algn="l"/>
+            <a:r>
+              <a:rPr sz="1000" b="0" i="0">
+                <a:solidFill>
+                  <a:srgbClr val="1A1A1A"/>
+                </a:solidFill>
+              </a:rPr>
+              <a:t>• Débuter par 'Je vais vous parler d'argent…'</a:t>
+            </a:r>
+          </a:p>
+        </p:txBody>
+      </p:sp>
+      <p:sp>
+        <p:nvSpPr>
+          <p:cNvPr id="34" name="Rectangle 33"/>
+          <p:cNvSpPr/>
+          <p:nvPr/>
+        </p:nvSpPr>
+        <p:spPr>
+          <a:xfrm>
+            <a:off x="274320" y="5486400"/>
+            <a:ext cx="11640312" cy="402336"/>
+          </a:xfrm>
+          <a:prstGeom prst="rect">
+            <a:avLst/>
+          </a:prstGeom>
+          <a:solidFill>
+            <a:srgbClr val="008080"/>
+          </a:solidFill>
+          <a:ln>
+            <a:noFill/>
+          </a:ln>
+        </p:spPr>
+        <p:style>
+          <a:lnRef idx="1">
+            <a:schemeClr val="accent1"/>
+          </a:lnRef>
+          <a:fillRef idx="3">
+            <a:schemeClr val="accent1"/>
+          </a:fillRef>
+          <a:effectRef idx="2">
+            <a:schemeClr val="accent1"/>
+          </a:effectRef>
+          <a:fontRef idx="minor">
+            <a:schemeClr val="lt1"/>
+          </a:fontRef>
+        </p:style>
+        <p:txBody>
+          <a:bodyPr rtlCol="0" anchor="ctr"/>
+          <a:lstStyle/>
+          <a:p>
+            <a:pPr algn="ctr"/>
+          </a:p>
+        </p:txBody>
+      </p:sp>
+      <p:sp>
+        <p:nvSpPr>
+          <p:cNvPr id="35" name="TextBox 34"/>
+          <p:cNvSpPr txBox="1"/>
+          <p:nvPr/>
+        </p:nvSpPr>
+        <p:spPr>
+          <a:xfrm>
+            <a:off x="411479" y="5559552"/>
+            <a:ext cx="11365992" cy="256032"/>
+          </a:xfrm>
+          <a:prstGeom prst="rect">
+            <a:avLst/>
+          </a:prstGeom>
+          <a:noFill/>
+        </p:spPr>
+        <p:txBody>
+          <a:bodyPr wrap="square">
+            <a:spAutoFit/>
+          </a:bodyPr>
+          <a:lstStyle/>
+          <a:p>
+            <a:pPr algn="l"/>
+            <a:r>
+              <a:rPr sz="1000" b="0" i="0">
+                <a:solidFill>
+                  <a:srgbClr val="FFFFFF"/>
+                </a:solidFill>
+              </a:rPr>
+              <a:t>Exercice miroir : Entraînez-vous 2 minutes devant votre téléphone en mode selfie. Regardez votre propre accroche. Qu'est-ce que vous changeriez ?</a:t>
             </a:r>
           </a:p>
         </p:txBody>

--- a/FIM_BookJ1_Fondations_Mission_V6-01062026SHY-TE.pptx
+++ b/FIM_BookJ1_Fondations_Mission_V6-01062026SHY-TE.pptx
@@ -3143,7 +3143,7 @@
         <p:spPr>
           <a:xfrm>
             <a:off x="0" y="0"/>
-            <a:ext cx="12188952" cy="2286000"/>
+            <a:ext cx="12188952" cy="2331720"/>
           </a:xfrm>
           <a:prstGeom prst="rect">
             <a:avLst/>
@@ -3185,14 +3185,14 @@
         </p:nvSpPr>
         <p:spPr>
           <a:xfrm>
-            <a:off x="0" y="2267712"/>
-            <a:ext cx="12188952" cy="73152"/>
+            <a:off x="0" y="2313432"/>
+            <a:ext cx="12188952" cy="54864"/>
           </a:xfrm>
           <a:prstGeom prst="rect">
             <a:avLst/>
           </a:prstGeom>
           <a:solidFill>
-            <a:srgbClr val="FF0000"/>
+            <a:srgbClr val="00AAAA"/>
           </a:solidFill>
           <a:ln>
             <a:noFill/>
@@ -3222,57 +3222,14 @@
       </p:sp>
       <p:sp>
         <p:nvSpPr>
-          <p:cNvPr id="5" name="Rectangle 4"/>
-          <p:cNvSpPr/>
-          <p:nvPr/>
-        </p:nvSpPr>
-        <p:spPr>
-          <a:xfrm>
-            <a:off x="274320" y="109728"/>
-            <a:ext cx="2926080" cy="822960"/>
-          </a:xfrm>
-          <a:prstGeom prst="rect">
-            <a:avLst/>
-          </a:prstGeom>
-          <a:solidFill>
-            <a:srgbClr val="008080"/>
-          </a:solidFill>
-          <a:ln>
-            <a:noFill/>
-          </a:ln>
-        </p:spPr>
-        <p:style>
-          <a:lnRef idx="1">
-            <a:schemeClr val="accent1"/>
-          </a:lnRef>
-          <a:fillRef idx="3">
-            <a:schemeClr val="accent1"/>
-          </a:fillRef>
-          <a:effectRef idx="2">
-            <a:schemeClr val="accent1"/>
-          </a:effectRef>
-          <a:fontRef idx="minor">
-            <a:schemeClr val="lt1"/>
-          </a:fontRef>
-        </p:style>
-        <p:txBody>
-          <a:bodyPr rtlCol="0" anchor="ctr"/>
-          <a:lstStyle/>
-          <a:p>
-            <a:pPr algn="ctr"/>
-          </a:p>
-        </p:txBody>
-      </p:sp>
-      <p:sp>
-        <p:nvSpPr>
-          <p:cNvPr id="6" name="TextBox 5"/>
+          <p:cNvPr id="5" name="TextBox 4"/>
           <p:cNvSpPr txBox="1"/>
           <p:nvPr/>
         </p:nvSpPr>
         <p:spPr>
           <a:xfrm>
-            <a:off x="320040" y="118872"/>
-            <a:ext cx="1097280" cy="804672"/>
+            <a:off x="347472" y="91440"/>
+            <a:ext cx="3200400" cy="438912"/>
           </a:xfrm>
           <a:prstGeom prst="rect">
             <a:avLst/>
@@ -3287,26 +3244,26 @@
           <a:p>
             <a:pPr algn="l"/>
             <a:r>
-              <a:rPr sz="3600" b="1" i="0">
+              <a:rPr sz="2200" b="1" i="0">
                 <a:solidFill>
                   <a:srgbClr val="FFFFFF"/>
                 </a:solidFill>
               </a:rPr>
-              <a:t>SHY</a:t>
-            </a:r>
-          </a:p>
-        </p:txBody>
-      </p:sp>
-      <p:sp>
-        <p:nvSpPr>
-          <p:cNvPr id="7" name="TextBox 6"/>
+              <a:t>SHY-Performance</a:t>
+            </a:r>
+          </a:p>
+        </p:txBody>
+      </p:sp>
+      <p:sp>
+        <p:nvSpPr>
+          <p:cNvPr id="6" name="TextBox 5"/>
           <p:cNvSpPr txBox="1"/>
           <p:nvPr/>
         </p:nvSpPr>
         <p:spPr>
           <a:xfrm>
-            <a:off x="1371600" y="347472"/>
-            <a:ext cx="1828800" cy="411480"/>
+            <a:off x="347472" y="530352"/>
+            <a:ext cx="7772400" cy="347472"/>
           </a:xfrm>
           <a:prstGeom prst="rect">
             <a:avLst/>
@@ -3321,69 +3278,26 @@
           <a:p>
             <a:pPr algn="l"/>
             <a:r>
-              <a:rPr sz="1400" b="1" i="0">
-                <a:solidFill>
-                  <a:srgbClr val="FFFFFF"/>
+              <a:rPr sz="1000" b="0" i="1">
+                <a:solidFill>
+                  <a:srgbClr val="BBEEEE"/>
                 </a:solidFill>
               </a:rPr>
-              <a:t>Performance</a:t>
-            </a:r>
-          </a:p>
-        </p:txBody>
-      </p:sp>
-      <p:sp>
-        <p:nvSpPr>
-          <p:cNvPr id="8" name="Rectangle 7"/>
-          <p:cNvSpPr/>
-          <p:nvPr/>
-        </p:nvSpPr>
-        <p:spPr>
-          <a:xfrm>
-            <a:off x="3337560" y="164592"/>
-            <a:ext cx="36576" cy="658368"/>
-          </a:xfrm>
-          <a:prstGeom prst="rect">
-            <a:avLst/>
-          </a:prstGeom>
-          <a:solidFill>
-            <a:srgbClr val="FF0000"/>
-          </a:solidFill>
-          <a:ln>
-            <a:noFill/>
-          </a:ln>
-        </p:spPr>
-        <p:style>
-          <a:lnRef idx="1">
-            <a:schemeClr val="accent1"/>
-          </a:lnRef>
-          <a:fillRef idx="3">
-            <a:schemeClr val="accent1"/>
-          </a:fillRef>
-          <a:effectRef idx="2">
-            <a:schemeClr val="accent1"/>
-          </a:effectRef>
-          <a:fontRef idx="minor">
-            <a:schemeClr val="lt1"/>
-          </a:fontRef>
-        </p:style>
-        <p:txBody>
-          <a:bodyPr rtlCol="0" anchor="ctr"/>
-          <a:lstStyle/>
-          <a:p>
-            <a:pPr algn="ctr"/>
-          </a:p>
-        </p:txBody>
-      </p:sp>
-      <p:sp>
-        <p:nvSpPr>
-          <p:cNvPr id="9" name="TextBox 8"/>
+              <a:t>Formation Initiale Module — Fundraising Téléphonique UNICEF</a:t>
+            </a:r>
+          </a:p>
+        </p:txBody>
+      </p:sp>
+      <p:sp>
+        <p:nvSpPr>
+          <p:cNvPr id="7" name="TextBox 6"/>
           <p:cNvSpPr txBox="1"/>
           <p:nvPr/>
         </p:nvSpPr>
         <p:spPr>
           <a:xfrm>
-            <a:off x="3474720" y="164592"/>
-            <a:ext cx="8503920" cy="347472"/>
+            <a:off x="347472" y="932688"/>
+            <a:ext cx="7772400" cy="292608"/>
           </a:xfrm>
           <a:prstGeom prst="rect">
             <a:avLst/>
@@ -3400,24 +3314,24 @@
             <a:r>
               <a:rPr sz="900" b="1" i="0">
                 <a:solidFill>
-                  <a:srgbClr val="BBEEEE"/>
+                  <a:srgbClr val="88DDDD"/>
                 </a:solidFill>
               </a:rPr>
-              <a:t>BOOK J1  ·  Journée 1  ·  Identité &amp; Valeurs</a:t>
-            </a:r>
-          </a:p>
-        </p:txBody>
-      </p:sp>
-      <p:sp>
-        <p:nvSpPr>
-          <p:cNvPr id="10" name="TextBox 9"/>
+              <a:t>BOOK J1  ·  Journée 1  ·  UNICEF France × SHY-Performance</a:t>
+            </a:r>
+          </a:p>
+        </p:txBody>
+      </p:sp>
+      <p:sp>
+        <p:nvSpPr>
+          <p:cNvPr id="8" name="TextBox 7"/>
           <p:cNvSpPr txBox="1"/>
           <p:nvPr/>
         </p:nvSpPr>
         <p:spPr>
           <a:xfrm>
-            <a:off x="320040" y="960120"/>
-            <a:ext cx="11521440" cy="1143000"/>
+            <a:off x="347472" y="1207008"/>
+            <a:ext cx="10515600" cy="914400"/>
           </a:xfrm>
           <a:prstGeom prst="rect">
             <a:avLst/>
@@ -3444,14 +3358,14 @@
       </p:sp>
       <p:sp>
         <p:nvSpPr>
-          <p:cNvPr id="11" name="TextBox 10"/>
+          <p:cNvPr id="9" name="TextBox 8"/>
           <p:cNvSpPr txBox="1"/>
           <p:nvPr/>
         </p:nvSpPr>
         <p:spPr>
           <a:xfrm>
-            <a:off x="320040" y="1920240"/>
-            <a:ext cx="11521440" cy="347472"/>
+            <a:off x="347472" y="1901952"/>
+            <a:ext cx="10515600" cy="402336"/>
           </a:xfrm>
           <a:prstGeom prst="rect">
             <a:avLst/>
@@ -3471,14 +3385,38 @@
                   <a:srgbClr val="CCEEEE"/>
                 </a:solidFill>
               </a:rPr>
-              <a:t>Qui êtes-vous ? Pourquoi êtes-vous là ? Quelle est votre mission ?</a:t>
-            </a:r>
-          </a:p>
-        </p:txBody>
-      </p:sp>
-      <p:sp>
-        <p:nvSpPr>
-          <p:cNvPr id="12" name="Rectangle 11"/>
+              <a:t>Votre identité de fundraiser · La cause · Votre raison d'agir</a:t>
+            </a:r>
+          </a:p>
+        </p:txBody>
+      </p:sp>
+      <p:pic>
+        <p:nvPicPr>
+          <p:cNvPr id="10" name="Picture 9" descr="shy_logo_v2.png"/>
+          <p:cNvPicPr>
+            <a:picLocks noChangeAspect="1"/>
+          </p:cNvPicPr>
+          <p:nvPr/>
+        </p:nvPicPr>
+        <p:blipFill>
+          <a:blip r:embed="rId2"/>
+          <a:stretch>
+            <a:fillRect/>
+          </a:stretch>
+        </p:blipFill>
+        <p:spPr>
+          <a:xfrm>
+            <a:off x="11247120" y="45720"/>
+            <a:ext cx="822960" cy="804672"/>
+          </a:xfrm>
+          <a:prstGeom prst="rect">
+            <a:avLst/>
+          </a:prstGeom>
+        </p:spPr>
+      </p:pic>
+      <p:sp>
+        <p:nvSpPr>
+          <p:cNvPr id="11" name="Rectangle 10"/>
           <p:cNvSpPr/>
           <p:nvPr/>
         </p:nvSpPr>
@@ -3521,7 +3459,7 @@
       </p:sp>
       <p:sp>
         <p:nvSpPr>
-          <p:cNvPr id="13" name="TextBox 12"/>
+          <p:cNvPr id="12" name="TextBox 11"/>
           <p:cNvSpPr txBox="1"/>
           <p:nvPr/>
         </p:nvSpPr>
@@ -3543,26 +3481,26 @@
           <a:p>
             <a:pPr algn="ctr"/>
             <a:r>
-              <a:rPr sz="900" b="0" i="0">
+              <a:rPr sz="800" b="0" i="0">
                 <a:solidFill>
                   <a:srgbClr val="FFFFFF"/>
                 </a:solidFill>
               </a:rPr>
-              <a:t>SHY-Performance  ·  Formation FIM  ·  V6-01062026SHY-TE</a:t>
-            </a:r>
-          </a:p>
-        </p:txBody>
-      </p:sp>
-      <p:sp>
-        <p:nvSpPr>
-          <p:cNvPr id="14" name="TextBox 13"/>
+              <a:t>SHY-Performance  ·  Formation FIM  ·  UNICEF France  ·  V6-01062026SHY-TE</a:t>
+            </a:r>
+          </a:p>
+        </p:txBody>
+      </p:sp>
+      <p:sp>
+        <p:nvSpPr>
+          <p:cNvPr id="13" name="TextBox 12"/>
           <p:cNvSpPr txBox="1"/>
           <p:nvPr/>
         </p:nvSpPr>
         <p:spPr>
           <a:xfrm>
             <a:off x="457200" y="2514600"/>
-            <a:ext cx="11247120" cy="1097280"/>
+            <a:ext cx="10789920" cy="1005840"/>
           </a:xfrm>
           <a:prstGeom prst="rect">
             <a:avLst/>
@@ -3582,9 +3520,9 @@
                   <a:srgbClr val="1A1A1A"/>
                 </a:solidFill>
               </a:rPr>
-              <a:t>Aujourd'hui, vous allez ancrer votre identité de fundraiser.
-Vous comprendrez la cause que vous défendez, les valeurs qui vous guident
-et la posture qui fait toute la différence sur le terrain.</a:t>
+              <a:t>Aujourd'hui vous ancrez votre identité de fundraiser téléphonique.
+Vous comprenez la mission UNICEF, les KPI de production et la nomenclature
+qui structurera chacune de vos journées de travail.</a:t>
             </a:r>
           </a:p>
         </p:txBody>
@@ -3659,7 +3597,7 @@
         <p:spPr>
           <a:xfrm>
             <a:off x="0" y="0"/>
-            <a:ext cx="12188952" cy="658368"/>
+            <a:ext cx="12188952" cy="685800"/>
           </a:xfrm>
           <a:prstGeom prst="rect">
             <a:avLst/>
@@ -3701,14 +3639,14 @@
         </p:nvSpPr>
         <p:spPr>
           <a:xfrm>
-            <a:off x="0" y="640080"/>
-            <a:ext cx="12188952" cy="54864"/>
+            <a:off x="0" y="667512"/>
+            <a:ext cx="12188952" cy="45720"/>
           </a:xfrm>
           <a:prstGeom prst="rect">
             <a:avLst/>
           </a:prstGeom>
           <a:solidFill>
-            <a:srgbClr val="FF0000"/>
+            <a:srgbClr val="00AAAA"/>
           </a:solidFill>
           <a:ln>
             <a:noFill/>
@@ -3744,8 +3682,8 @@
         </p:nvSpPr>
         <p:spPr>
           <a:xfrm>
-            <a:off x="164592" y="64008"/>
-            <a:ext cx="685800" cy="530352"/>
+            <a:off x="164592" y="73152"/>
+            <a:ext cx="2011680" cy="347472"/>
           </a:xfrm>
           <a:prstGeom prst="rect">
             <a:avLst/>
@@ -3760,12 +3698,12 @@
           <a:p>
             <a:pPr algn="l"/>
             <a:r>
-              <a:rPr sz="2000" b="1" i="0">
+              <a:rPr sz="1400" b="1" i="0">
                 <a:solidFill>
                   <a:srgbClr val="FFFFFF"/>
                 </a:solidFill>
               </a:rPr>
-              <a:t>SHY</a:t>
+              <a:t>SHY-Performance</a:t>
             </a:r>
           </a:p>
         </p:txBody>
@@ -3778,14 +3716,14 @@
         </p:nvSpPr>
         <p:spPr>
           <a:xfrm>
-            <a:off x="914400" y="91440"/>
-            <a:ext cx="36576" cy="475488"/>
+            <a:off x="2286000" y="91440"/>
+            <a:ext cx="36576" cy="502920"/>
           </a:xfrm>
           <a:prstGeom prst="rect">
             <a:avLst/>
           </a:prstGeom>
           <a:solidFill>
-            <a:srgbClr val="FF0000"/>
+            <a:srgbClr val="00AAAA"/>
           </a:solidFill>
           <a:ln>
             <a:noFill/>
@@ -3821,8 +3759,8 @@
         </p:nvSpPr>
         <p:spPr>
           <a:xfrm>
-            <a:off x="1024128" y="91440"/>
-            <a:ext cx="10881360" cy="475488"/>
+            <a:off x="2423160" y="91440"/>
+            <a:ext cx="9235440" cy="502920"/>
           </a:xfrm>
           <a:prstGeom prst="rect">
             <a:avLst/>
@@ -3837,7 +3775,7 @@
           <a:p>
             <a:pPr algn="l"/>
             <a:r>
-              <a:rPr sz="1700" b="1" i="0">
+              <a:rPr sz="1600" b="1" i="0">
                 <a:solidFill>
                   <a:srgbClr val="FFFFFF"/>
                 </a:solidFill>
@@ -3847,9 +3785,33 @@
           </a:p>
         </p:txBody>
       </p:sp>
-      <p:sp>
-        <p:nvSpPr>
-          <p:cNvPr id="8" name="Rectangle 7"/>
+      <p:pic>
+        <p:nvPicPr>
+          <p:cNvPr id="8" name="Picture 7" descr="shy_logo_v2.png"/>
+          <p:cNvPicPr>
+            <a:picLocks noChangeAspect="1"/>
+          </p:cNvPicPr>
+          <p:nvPr/>
+        </p:nvPicPr>
+        <p:blipFill>
+          <a:blip r:embed="rId2"/>
+          <a:stretch>
+            <a:fillRect/>
+          </a:stretch>
+        </p:blipFill>
+        <p:spPr>
+          <a:xfrm>
+            <a:off x="11247120" y="0"/>
+            <a:ext cx="822960" cy="676656"/>
+          </a:xfrm>
+          <a:prstGeom prst="rect">
+            <a:avLst/>
+          </a:prstGeom>
+        </p:spPr>
+      </p:pic>
+      <p:sp>
+        <p:nvSpPr>
+          <p:cNvPr id="9" name="Rectangle 8"/>
           <p:cNvSpPr/>
           <p:nvPr/>
         </p:nvSpPr>
@@ -3892,7 +3854,7 @@
       </p:sp>
       <p:sp>
         <p:nvSpPr>
-          <p:cNvPr id="9" name="TextBox 8"/>
+          <p:cNvPr id="10" name="TextBox 9"/>
           <p:cNvSpPr txBox="1"/>
           <p:nvPr/>
         </p:nvSpPr>
@@ -3914,26 +3876,26 @@
           <a:p>
             <a:pPr algn="ctr"/>
             <a:r>
-              <a:rPr sz="900" b="0" i="0">
+              <a:rPr sz="800" b="0" i="0">
                 <a:solidFill>
                   <a:srgbClr val="FFFFFF"/>
                 </a:solidFill>
               </a:rPr>
-              <a:t>SHY-Performance  ·  Formation FIM  ·  V6-01062026SHY-TE</a:t>
-            </a:r>
-          </a:p>
-        </p:txBody>
-      </p:sp>
-      <p:sp>
-        <p:nvSpPr>
-          <p:cNvPr id="10" name="Rectangle 9"/>
+              <a:t>SHY-Performance  ·  Formation FIM  ·  UNICEF France  ·  V6-01062026SHY-TE</a:t>
+            </a:r>
+          </a:p>
+        </p:txBody>
+      </p:sp>
+      <p:sp>
+        <p:nvSpPr>
+          <p:cNvPr id="11" name="Rectangle 10"/>
           <p:cNvSpPr/>
           <p:nvPr/>
         </p:nvSpPr>
         <p:spPr>
           <a:xfrm>
             <a:off x="274320" y="804672"/>
-            <a:ext cx="2910078" cy="274320"/>
+            <a:ext cx="2910078" cy="292608"/>
           </a:xfrm>
           <a:prstGeom prst="rect">
             <a:avLst/>
@@ -3969,14 +3931,14 @@
       </p:sp>
       <p:sp>
         <p:nvSpPr>
-          <p:cNvPr id="11" name="TextBox 10"/>
+          <p:cNvPr id="12" name="TextBox 11"/>
           <p:cNvSpPr txBox="1"/>
           <p:nvPr/>
         </p:nvSpPr>
         <p:spPr>
           <a:xfrm>
-            <a:off x="347472" y="841248"/>
-            <a:ext cx="2763774" cy="219456"/>
+            <a:off x="365760" y="841248"/>
+            <a:ext cx="2745486" cy="237744"/>
           </a:xfrm>
           <a:prstGeom prst="rect">
             <a:avLst/>
@@ -3991,26 +3953,26 @@
           <a:p>
             <a:pPr algn="l"/>
             <a:r>
-              <a:rPr sz="800" b="1" i="0">
+              <a:rPr sz="900" b="1" i="0">
                 <a:solidFill>
                   <a:srgbClr val="FFFFFF"/>
                 </a:solidFill>
               </a:rPr>
-              <a:t>DÉCOUVERTE</a:t>
-            </a:r>
-          </a:p>
-        </p:txBody>
-      </p:sp>
-      <p:sp>
-        <p:nvSpPr>
-          <p:cNvPr id="12" name="Rectangle 11"/>
+              <a:t>IMMERSION</a:t>
+            </a:r>
+          </a:p>
+        </p:txBody>
+      </p:sp>
+      <p:sp>
+        <p:nvSpPr>
+          <p:cNvPr id="13" name="Rectangle 12"/>
           <p:cNvSpPr/>
           <p:nvPr/>
         </p:nvSpPr>
         <p:spPr>
           <a:xfrm>
-            <a:off x="274320" y="1078992"/>
-            <a:ext cx="2910078" cy="3840480"/>
+            <a:off x="274320" y="1097280"/>
+            <a:ext cx="2910078" cy="4370831"/>
           </a:xfrm>
           <a:prstGeom prst="rect">
             <a:avLst/>
@@ -4018,7 +3980,7 @@
           <a:solidFill>
             <a:srgbClr val="FFFFFF"/>
           </a:solidFill>
-          <a:ln w="12700">
+          <a:ln w="15240">
             <a:solidFill>
               <a:srgbClr val="005555"/>
             </a:solidFill>
@@ -4048,14 +4010,14 @@
       </p:sp>
       <p:sp>
         <p:nvSpPr>
-          <p:cNvPr id="13" name="TextBox 12"/>
+          <p:cNvPr id="14" name="TextBox 13"/>
           <p:cNvSpPr txBox="1"/>
           <p:nvPr/>
         </p:nvSpPr>
         <p:spPr>
           <a:xfrm>
-            <a:off x="384048" y="1124712"/>
-            <a:ext cx="2690622" cy="3657600"/>
+            <a:off x="384048" y="1152144"/>
+            <a:ext cx="2708910" cy="4160520"/>
           </a:xfrm>
           <a:prstGeom prst="rect">
             <a:avLst/>
@@ -4070,13 +4032,13 @@
           <a:p>
             <a:pPr algn="l"/>
             <a:r>
-              <a:rPr sz="900" b="0" i="0">
+              <a:rPr sz="950" b="0" i="0">
                 <a:solidFill>
                   <a:srgbClr val="1A1A1A"/>
                 </a:solidFill>
               </a:rPr>
-              <a:t>Vous regardez le témoignage
-d'un enfant bénéficiaire.
+              <a:t>Vous entendez le témoignage
+d'un enfant bénéficiaire UNICEF.
 Notez ce que vous ressentez.</a:t>
             </a:r>
           </a:p>
@@ -4084,14 +4046,14 @@
       </p:sp>
       <p:sp>
         <p:nvSpPr>
-          <p:cNvPr id="14" name="Rectangle 13"/>
+          <p:cNvPr id="15" name="Rectangle 14"/>
           <p:cNvSpPr/>
           <p:nvPr/>
         </p:nvSpPr>
         <p:spPr>
           <a:xfrm>
             <a:off x="3202686" y="804672"/>
-            <a:ext cx="2910078" cy="274320"/>
+            <a:ext cx="2910078" cy="292608"/>
           </a:xfrm>
           <a:prstGeom prst="rect">
             <a:avLst/>
@@ -4127,14 +4089,14 @@
       </p:sp>
       <p:sp>
         <p:nvSpPr>
-          <p:cNvPr id="15" name="TextBox 14"/>
+          <p:cNvPr id="16" name="TextBox 15"/>
           <p:cNvSpPr txBox="1"/>
           <p:nvPr/>
         </p:nvSpPr>
         <p:spPr>
           <a:xfrm>
-            <a:off x="3275838" y="841248"/>
-            <a:ext cx="2763774" cy="219456"/>
+            <a:off x="3294126" y="841248"/>
+            <a:ext cx="2745486" cy="237744"/>
           </a:xfrm>
           <a:prstGeom prst="rect">
             <a:avLst/>
@@ -4149,7 +4111,7 @@
           <a:p>
             <a:pPr algn="l"/>
             <a:r>
-              <a:rPr sz="800" b="1" i="0">
+              <a:rPr sz="900" b="1" i="0">
                 <a:solidFill>
                   <a:srgbClr val="FFFFFF"/>
                 </a:solidFill>
@@ -4161,14 +4123,14 @@
       </p:sp>
       <p:sp>
         <p:nvSpPr>
-          <p:cNvPr id="16" name="Rectangle 15"/>
+          <p:cNvPr id="17" name="Rectangle 16"/>
           <p:cNvSpPr/>
           <p:nvPr/>
         </p:nvSpPr>
         <p:spPr>
           <a:xfrm>
-            <a:off x="3202686" y="1078992"/>
-            <a:ext cx="2910078" cy="3840480"/>
+            <a:off x="3202686" y="1097280"/>
+            <a:ext cx="2910078" cy="4370831"/>
           </a:xfrm>
           <a:prstGeom prst="rect">
             <a:avLst/>
@@ -4176,7 +4138,7 @@
           <a:solidFill>
             <a:srgbClr val="FFFFFF"/>
           </a:solidFill>
-          <a:ln w="12700">
+          <a:ln w="15240">
             <a:solidFill>
               <a:srgbClr val="008080"/>
             </a:solidFill>
@@ -4206,14 +4168,14 @@
       </p:sp>
       <p:sp>
         <p:nvSpPr>
-          <p:cNvPr id="17" name="TextBox 16"/>
+          <p:cNvPr id="18" name="TextBox 17"/>
           <p:cNvSpPr txBox="1"/>
           <p:nvPr/>
         </p:nvSpPr>
         <p:spPr>
           <a:xfrm>
-            <a:off x="3312414" y="1124712"/>
-            <a:ext cx="2690622" cy="3657600"/>
+            <a:off x="3312414" y="1152144"/>
+            <a:ext cx="2708910" cy="4160520"/>
           </a:xfrm>
           <a:prstGeom prst="rect">
             <a:avLst/>
@@ -4228,34 +4190,34 @@
           <a:p>
             <a:pPr algn="l"/>
             <a:r>
-              <a:rPr sz="900" b="0" i="0">
+              <a:rPr sz="950" b="0" i="0">
                 <a:solidFill>
                   <a:srgbClr val="1A1A1A"/>
                 </a:solidFill>
               </a:rPr>
               <a:t>En groupe : 'Qu'avez-vous
-ressenti ? Qu'auriez-vous
-dit à cet instant ?'</a:t>
-            </a:r>
-          </a:p>
-        </p:txBody>
-      </p:sp>
-      <p:sp>
-        <p:nvSpPr>
-          <p:cNvPr id="18" name="Rectangle 17"/>
+ressenti ? Qu'est-ce qui vous
+a le plus touché ?'</a:t>
+            </a:r>
+          </a:p>
+        </p:txBody>
+      </p:sp>
+      <p:sp>
+        <p:nvSpPr>
+          <p:cNvPr id="19" name="Rectangle 18"/>
           <p:cNvSpPr/>
           <p:nvPr/>
         </p:nvSpPr>
         <p:spPr>
           <a:xfrm>
             <a:off x="6131052" y="804672"/>
-            <a:ext cx="2910078" cy="274320"/>
+            <a:ext cx="2910078" cy="292608"/>
           </a:xfrm>
           <a:prstGeom prst="rect">
             <a:avLst/>
           </a:prstGeom>
           <a:solidFill>
-            <a:srgbClr val="2A7A50"/>
+            <a:srgbClr val="006A6A"/>
           </a:solidFill>
           <a:ln>
             <a:noFill/>
@@ -4285,14 +4247,14 @@
       </p:sp>
       <p:sp>
         <p:nvSpPr>
-          <p:cNvPr id="19" name="TextBox 18"/>
+          <p:cNvPr id="20" name="TextBox 19"/>
           <p:cNvSpPr txBox="1"/>
           <p:nvPr/>
         </p:nvSpPr>
         <p:spPr>
           <a:xfrm>
-            <a:off x="6204204" y="841248"/>
-            <a:ext cx="2763774" cy="219456"/>
+            <a:off x="6222492" y="841248"/>
+            <a:ext cx="2745486" cy="237744"/>
           </a:xfrm>
           <a:prstGeom prst="rect">
             <a:avLst/>
@@ -4307,7 +4269,7 @@
           <a:p>
             <a:pPr algn="l"/>
             <a:r>
-              <a:rPr sz="800" b="1" i="0">
+              <a:rPr sz="900" b="1" i="0">
                 <a:solidFill>
                   <a:srgbClr val="FFFFFF"/>
                 </a:solidFill>
@@ -4319,14 +4281,14 @@
       </p:sp>
       <p:sp>
         <p:nvSpPr>
-          <p:cNvPr id="20" name="Rectangle 19"/>
+          <p:cNvPr id="21" name="Rectangle 20"/>
           <p:cNvSpPr/>
           <p:nvPr/>
         </p:nvSpPr>
         <p:spPr>
           <a:xfrm>
-            <a:off x="6131052" y="1078992"/>
-            <a:ext cx="2910078" cy="3840480"/>
+            <a:off x="6131052" y="1097280"/>
+            <a:ext cx="2910078" cy="4370831"/>
           </a:xfrm>
           <a:prstGeom prst="rect">
             <a:avLst/>
@@ -4334,9 +4296,9 @@
           <a:solidFill>
             <a:srgbClr val="FFFFFF"/>
           </a:solidFill>
-          <a:ln w="12700">
+          <a:ln w="15240">
             <a:solidFill>
-              <a:srgbClr val="2A7A50"/>
+              <a:srgbClr val="006A6A"/>
             </a:solidFill>
           </a:ln>
         </p:spPr>
@@ -4364,14 +4326,14 @@
       </p:sp>
       <p:sp>
         <p:nvSpPr>
-          <p:cNvPr id="21" name="TextBox 20"/>
+          <p:cNvPr id="22" name="TextBox 21"/>
           <p:cNvSpPr txBox="1"/>
           <p:nvPr/>
         </p:nvSpPr>
         <p:spPr>
           <a:xfrm>
-            <a:off x="6240780" y="1124712"/>
-            <a:ext cx="2690622" cy="3657600"/>
+            <a:off x="6240780" y="1152144"/>
+            <a:ext cx="2708910" cy="4160520"/>
           </a:xfrm>
           <a:prstGeom prst="rect">
             <a:avLst/>
@@ -4386,34 +4348,34 @@
           <a:p>
             <a:pPr algn="l"/>
             <a:r>
-              <a:rPr sz="900" b="0" i="0">
+              <a:rPr sz="950" b="0" i="0">
                 <a:solidFill>
                   <a:srgbClr val="1A1A1A"/>
                 </a:solidFill>
               </a:rPr>
-              <a:t>L'UNICEF en chiffres.
-La cause. Le cadre.
-Vos droits et devoirs.</a:t>
-            </a:r>
-          </a:p>
-        </p:txBody>
-      </p:sp>
-      <p:sp>
-        <p:nvSpPr>
-          <p:cNvPr id="22" name="Rectangle 21"/>
+              <a:t>Mission UNICEF · KPI FIDELIS
+Nomenclature DON/INDÉCIS/REFUS
+Organisation de la journée</a:t>
+            </a:r>
+          </a:p>
+        </p:txBody>
+      </p:sp>
+      <p:sp>
+        <p:nvSpPr>
+          <p:cNvPr id="23" name="Rectangle 22"/>
           <p:cNvSpPr/>
           <p:nvPr/>
         </p:nvSpPr>
         <p:spPr>
           <a:xfrm>
             <a:off x="9059418" y="804672"/>
-            <a:ext cx="2910078" cy="274320"/>
+            <a:ext cx="2910078" cy="292608"/>
           </a:xfrm>
           <a:prstGeom prst="rect">
             <a:avLst/>
           </a:prstGeom>
           <a:solidFill>
-            <a:srgbClr val="FF0000"/>
+            <a:srgbClr val="00AAAA"/>
           </a:solidFill>
           <a:ln>
             <a:noFill/>
@@ -4443,14 +4405,14 @@
       </p:sp>
       <p:sp>
         <p:nvSpPr>
-          <p:cNvPr id="23" name="TextBox 22"/>
+          <p:cNvPr id="24" name="TextBox 23"/>
           <p:cNvSpPr txBox="1"/>
           <p:nvPr/>
         </p:nvSpPr>
         <p:spPr>
           <a:xfrm>
-            <a:off x="9132570" y="841248"/>
-            <a:ext cx="2763774" cy="219456"/>
+            <a:off x="9150858" y="841248"/>
+            <a:ext cx="2745486" cy="237744"/>
           </a:xfrm>
           <a:prstGeom prst="rect">
             <a:avLst/>
@@ -4465,7 +4427,7 @@
           <a:p>
             <a:pPr algn="l"/>
             <a:r>
-              <a:rPr sz="800" b="1" i="0">
+              <a:rPr sz="900" b="1" i="0">
                 <a:solidFill>
                   <a:srgbClr val="FFFFFF"/>
                 </a:solidFill>
@@ -4477,14 +4439,14 @@
       </p:sp>
       <p:sp>
         <p:nvSpPr>
-          <p:cNvPr id="24" name="Rectangle 23"/>
+          <p:cNvPr id="25" name="Rectangle 24"/>
           <p:cNvSpPr/>
           <p:nvPr/>
         </p:nvSpPr>
         <p:spPr>
           <a:xfrm>
-            <a:off x="9059418" y="1078992"/>
-            <a:ext cx="2910078" cy="3840480"/>
+            <a:off x="9059418" y="1097280"/>
+            <a:ext cx="2910078" cy="4370831"/>
           </a:xfrm>
           <a:prstGeom prst="rect">
             <a:avLst/>
@@ -4492,9 +4454,9 @@
           <a:solidFill>
             <a:srgbClr val="FFFFFF"/>
           </a:solidFill>
-          <a:ln w="12700">
+          <a:ln w="15240">
             <a:solidFill>
-              <a:srgbClr val="FF0000"/>
+              <a:srgbClr val="00AAAA"/>
             </a:solidFill>
           </a:ln>
         </p:spPr>
@@ -4522,14 +4484,14 @@
       </p:sp>
       <p:sp>
         <p:nvSpPr>
-          <p:cNvPr id="25" name="TextBox 24"/>
+          <p:cNvPr id="26" name="TextBox 25"/>
           <p:cNvSpPr txBox="1"/>
           <p:nvPr/>
         </p:nvSpPr>
         <p:spPr>
           <a:xfrm>
-            <a:off x="9169146" y="1124712"/>
-            <a:ext cx="2690622" cy="3657600"/>
+            <a:off x="9169146" y="1152144"/>
+            <a:ext cx="2708910" cy="4160520"/>
           </a:xfrm>
           <a:prstGeom prst="rect">
             <a:avLst/>
@@ -4544,34 +4506,34 @@
           <a:p>
             <a:pPr algn="l"/>
             <a:r>
-              <a:rPr sz="900" b="0" i="0">
+              <a:rPr sz="950" b="0" i="0">
                 <a:solidFill>
                   <a:srgbClr val="1A1A1A"/>
                 </a:solidFill>
               </a:rPr>
-              <a:t>Vous présentez la mission
+              <a:t>Vous expliquez la mission
 UNICEF en 60 secondes
-à votre binôme.</a:t>
-            </a:r>
-          </a:p>
-        </p:txBody>
-      </p:sp>
-      <p:sp>
-        <p:nvSpPr>
-          <p:cNvPr id="26" name="Rectangle 25"/>
+à votre binôme — sans notes.</a:t>
+            </a:r>
+          </a:p>
+        </p:txBody>
+      </p:sp>
+      <p:sp>
+        <p:nvSpPr>
+          <p:cNvPr id="27" name="Rectangle 26"/>
           <p:cNvSpPr/>
           <p:nvPr/>
         </p:nvSpPr>
         <p:spPr>
           <a:xfrm>
-            <a:off x="274320" y="5074920"/>
-            <a:ext cx="11640312" cy="274320"/>
+            <a:off x="274320" y="5596128"/>
+            <a:ext cx="11640312" cy="256032"/>
           </a:xfrm>
           <a:prstGeom prst="rect">
             <a:avLst/>
           </a:prstGeom>
           <a:solidFill>
-            <a:srgbClr val="FF0000"/>
+            <a:srgbClr val="008080"/>
           </a:solidFill>
           <a:ln>
             <a:noFill/>
@@ -4601,14 +4563,14 @@
       </p:sp>
       <p:sp>
         <p:nvSpPr>
-          <p:cNvPr id="27" name="TextBox 26"/>
+          <p:cNvPr id="28" name="TextBox 27"/>
           <p:cNvSpPr txBox="1"/>
           <p:nvPr/>
         </p:nvSpPr>
         <p:spPr>
           <a:xfrm>
-            <a:off x="384048" y="5111496"/>
-            <a:ext cx="11430000" cy="219456"/>
+            <a:off x="384048" y="5632704"/>
+            <a:ext cx="11430000" cy="201168"/>
           </a:xfrm>
           <a:prstGeom prst="rect">
             <a:avLst/>
@@ -4623,7 +4585,7 @@
           <a:p>
             <a:pPr algn="l"/>
             <a:r>
-              <a:rPr sz="900" b="1" i="0">
+              <a:rPr sz="800" b="1" i="0">
                 <a:solidFill>
                   <a:srgbClr val="FFFFFF"/>
                 </a:solidFill>
@@ -4635,13 +4597,13 @@
       </p:sp>
       <p:sp>
         <p:nvSpPr>
-          <p:cNvPr id="28" name="Rectangle 27"/>
+          <p:cNvPr id="29" name="Rectangle 28"/>
           <p:cNvSpPr/>
           <p:nvPr/>
         </p:nvSpPr>
         <p:spPr>
           <a:xfrm>
-            <a:off x="274320" y="5367528"/>
+            <a:off x="274320" y="5870448"/>
             <a:ext cx="3843528" cy="502920"/>
           </a:xfrm>
           <a:prstGeom prst="rect">
@@ -4650,9 +4612,9 @@
           <a:solidFill>
             <a:srgbClr val="FFFFFF"/>
           </a:solidFill>
-          <a:ln w="10160">
+          <a:ln w="7620">
             <a:solidFill>
-              <a:srgbClr val="FF0000"/>
+              <a:srgbClr val="008080"/>
             </a:solidFill>
           </a:ln>
         </p:spPr>
@@ -4680,13 +4642,13 @@
       </p:sp>
       <p:sp>
         <p:nvSpPr>
-          <p:cNvPr id="29" name="TextBox 28"/>
+          <p:cNvPr id="30" name="TextBox 29"/>
           <p:cNvSpPr txBox="1"/>
           <p:nvPr/>
         </p:nvSpPr>
         <p:spPr>
           <a:xfrm>
-            <a:off x="365760" y="5404104"/>
+            <a:off x="384048" y="5907024"/>
             <a:ext cx="3715512" cy="420624"/>
           </a:xfrm>
           <a:prstGeom prst="rect">
@@ -4707,31 +4669,31 @@
                   <a:srgbClr val="1A1A1A"/>
                 </a:solidFill>
               </a:rPr>
-              <a:t>✔ Pitch 60s évalué avec votre formateur</a:t>
-            </a:r>
-          </a:p>
-        </p:txBody>
-      </p:sp>
-      <p:sp>
-        <p:nvSpPr>
-          <p:cNvPr id="30" name="Rectangle 29"/>
+              <a:t>✔ Pitch mission 60s validé</a:t>
+            </a:r>
+          </a:p>
+        </p:txBody>
+      </p:sp>
+      <p:sp>
+        <p:nvSpPr>
+          <p:cNvPr id="31" name="Rectangle 30"/>
           <p:cNvSpPr/>
           <p:nvPr/>
         </p:nvSpPr>
         <p:spPr>
           <a:xfrm>
-            <a:off x="4154423" y="5367528"/>
+            <a:off x="4154423" y="5870448"/>
             <a:ext cx="3843528" cy="502920"/>
           </a:xfrm>
           <a:prstGeom prst="rect">
             <a:avLst/>
           </a:prstGeom>
           <a:solidFill>
-            <a:srgbClr val="FFFFFF"/>
+            <a:srgbClr val="F0F7F7"/>
           </a:solidFill>
-          <a:ln w="10160">
+          <a:ln w="7620">
             <a:solidFill>
-              <a:srgbClr val="FF0000"/>
+              <a:srgbClr val="008080"/>
             </a:solidFill>
           </a:ln>
         </p:spPr>
@@ -4759,13 +4721,13 @@
       </p:sp>
       <p:sp>
         <p:nvSpPr>
-          <p:cNvPr id="31" name="TextBox 30"/>
+          <p:cNvPr id="32" name="TextBox 31"/>
           <p:cNvSpPr txBox="1"/>
           <p:nvPr/>
         </p:nvSpPr>
         <p:spPr>
           <a:xfrm>
-            <a:off x="4245863" y="5404104"/>
+            <a:off x="4264152" y="5907024"/>
             <a:ext cx="3715512" cy="420624"/>
           </a:xfrm>
           <a:prstGeom prst="rect">
@@ -4793,13 +4755,13 @@
       </p:sp>
       <p:sp>
         <p:nvSpPr>
-          <p:cNvPr id="32" name="Rectangle 31"/>
+          <p:cNvPr id="33" name="Rectangle 32"/>
           <p:cNvSpPr/>
           <p:nvPr/>
         </p:nvSpPr>
         <p:spPr>
           <a:xfrm>
-            <a:off x="8034527" y="5367528"/>
+            <a:off x="8034528" y="5870448"/>
             <a:ext cx="3843528" cy="502920"/>
           </a:xfrm>
           <a:prstGeom prst="rect">
@@ -4808,9 +4770,9 @@
           <a:solidFill>
             <a:srgbClr val="FFFFFF"/>
           </a:solidFill>
-          <a:ln w="10160">
+          <a:ln w="7620">
             <a:solidFill>
-              <a:srgbClr val="FF0000"/>
+              <a:srgbClr val="008080"/>
             </a:solidFill>
           </a:ln>
         </p:spPr>
@@ -4838,13 +4800,13 @@
       </p:sp>
       <p:sp>
         <p:nvSpPr>
-          <p:cNvPr id="33" name="TextBox 32"/>
+          <p:cNvPr id="34" name="TextBox 33"/>
           <p:cNvSpPr txBox="1"/>
           <p:nvPr/>
         </p:nvSpPr>
         <p:spPr>
           <a:xfrm>
-            <a:off x="8125967" y="5404104"/>
+            <a:off x="8144256" y="5907024"/>
             <a:ext cx="3715512" cy="420624"/>
           </a:xfrm>
           <a:prstGeom prst="rect">
@@ -4940,7 +4902,7 @@
         <p:spPr>
           <a:xfrm>
             <a:off x="0" y="0"/>
-            <a:ext cx="12188952" cy="658368"/>
+            <a:ext cx="12188952" cy="685800"/>
           </a:xfrm>
           <a:prstGeom prst="rect">
             <a:avLst/>
@@ -4982,14 +4944,14 @@
         </p:nvSpPr>
         <p:spPr>
           <a:xfrm>
-            <a:off x="0" y="640080"/>
-            <a:ext cx="12188952" cy="54864"/>
+            <a:off x="0" y="667512"/>
+            <a:ext cx="12188952" cy="45720"/>
           </a:xfrm>
           <a:prstGeom prst="rect">
             <a:avLst/>
           </a:prstGeom>
           <a:solidFill>
-            <a:srgbClr val="FF0000"/>
+            <a:srgbClr val="00AAAA"/>
           </a:solidFill>
           <a:ln>
             <a:noFill/>
@@ -5025,8 +4987,8 @@
         </p:nvSpPr>
         <p:spPr>
           <a:xfrm>
-            <a:off x="164592" y="64008"/>
-            <a:ext cx="685800" cy="530352"/>
+            <a:off x="164592" y="73152"/>
+            <a:ext cx="2011680" cy="347472"/>
           </a:xfrm>
           <a:prstGeom prst="rect">
             <a:avLst/>
@@ -5041,12 +5003,12 @@
           <a:p>
             <a:pPr algn="l"/>
             <a:r>
-              <a:rPr sz="2000" b="1" i="0">
+              <a:rPr sz="1400" b="1" i="0">
                 <a:solidFill>
                   <a:srgbClr val="FFFFFF"/>
                 </a:solidFill>
               </a:rPr>
-              <a:t>SHY</a:t>
+              <a:t>SHY-Performance</a:t>
             </a:r>
           </a:p>
         </p:txBody>
@@ -5059,14 +5021,14 @@
         </p:nvSpPr>
         <p:spPr>
           <a:xfrm>
-            <a:off x="914400" y="91440"/>
-            <a:ext cx="36576" cy="475488"/>
+            <a:off x="2286000" y="91440"/>
+            <a:ext cx="36576" cy="502920"/>
           </a:xfrm>
           <a:prstGeom prst="rect">
             <a:avLst/>
           </a:prstGeom>
           <a:solidFill>
-            <a:srgbClr val="FF0000"/>
+            <a:srgbClr val="00AAAA"/>
           </a:solidFill>
           <a:ln>
             <a:noFill/>
@@ -5102,8 +5064,8 @@
         </p:nvSpPr>
         <p:spPr>
           <a:xfrm>
-            <a:off x="1024128" y="91440"/>
-            <a:ext cx="10881360" cy="475488"/>
+            <a:off x="2423160" y="91440"/>
+            <a:ext cx="9235440" cy="502920"/>
           </a:xfrm>
           <a:prstGeom prst="rect">
             <a:avLst/>
@@ -5118,19 +5080,43 @@
           <a:p>
             <a:pPr algn="l"/>
             <a:r>
-              <a:rPr sz="1700" b="1" i="0">
+              <a:rPr sz="1600" b="1" i="0">
                 <a:solidFill>
                   <a:srgbClr val="FFFFFF"/>
                 </a:solidFill>
               </a:rPr>
-              <a:t>L'UNICEF — La cause que vous défendez</a:t>
-            </a:r>
-          </a:p>
-        </p:txBody>
-      </p:sp>
-      <p:sp>
-        <p:nvSpPr>
-          <p:cNvPr id="8" name="Rectangle 7"/>
+              <a:t>L'UNICEF — La Cause que Vous Défendez par Téléphone</a:t>
+            </a:r>
+          </a:p>
+        </p:txBody>
+      </p:sp>
+      <p:pic>
+        <p:nvPicPr>
+          <p:cNvPr id="8" name="Picture 7" descr="shy_logo_v2.png"/>
+          <p:cNvPicPr>
+            <a:picLocks noChangeAspect="1"/>
+          </p:cNvPicPr>
+          <p:nvPr/>
+        </p:nvPicPr>
+        <p:blipFill>
+          <a:blip r:embed="rId2"/>
+          <a:stretch>
+            <a:fillRect/>
+          </a:stretch>
+        </p:blipFill>
+        <p:spPr>
+          <a:xfrm>
+            <a:off x="11247120" y="0"/>
+            <a:ext cx="822960" cy="676656"/>
+          </a:xfrm>
+          <a:prstGeom prst="rect">
+            <a:avLst/>
+          </a:prstGeom>
+        </p:spPr>
+      </p:pic>
+      <p:sp>
+        <p:nvSpPr>
+          <p:cNvPr id="9" name="Rectangle 8"/>
           <p:cNvSpPr/>
           <p:nvPr/>
         </p:nvSpPr>
@@ -5173,7 +5159,7 @@
       </p:sp>
       <p:sp>
         <p:nvSpPr>
-          <p:cNvPr id="9" name="TextBox 8"/>
+          <p:cNvPr id="10" name="TextBox 9"/>
           <p:cNvSpPr txBox="1"/>
           <p:nvPr/>
         </p:nvSpPr>
@@ -5195,26 +5181,26 @@
           <a:p>
             <a:pPr algn="ctr"/>
             <a:r>
-              <a:rPr sz="900" b="0" i="0">
+              <a:rPr sz="800" b="0" i="0">
                 <a:solidFill>
                   <a:srgbClr val="FFFFFF"/>
                 </a:solidFill>
               </a:rPr>
-              <a:t>SHY-Performance  ·  Formation FIM  ·  V6-01062026SHY-TE</a:t>
-            </a:r>
-          </a:p>
-        </p:txBody>
-      </p:sp>
-      <p:sp>
-        <p:nvSpPr>
-          <p:cNvPr id="10" name="Rectangle 9"/>
+              <a:t>SHY-Performance  ·  Formation FIM  ·  UNICEF France  ·  V6-01062026SHY-TE</a:t>
+            </a:r>
+          </a:p>
+        </p:txBody>
+      </p:sp>
+      <p:sp>
+        <p:nvSpPr>
+          <p:cNvPr id="11" name="Rectangle 10"/>
           <p:cNvSpPr/>
           <p:nvPr/>
         </p:nvSpPr>
         <p:spPr>
           <a:xfrm>
             <a:off x="274320" y="804672"/>
-            <a:ext cx="1920240" cy="987552"/>
+            <a:ext cx="1920240" cy="960120"/>
           </a:xfrm>
           <a:prstGeom prst="rect">
             <a:avLst/>
@@ -5250,14 +5236,14 @@
       </p:sp>
       <p:sp>
         <p:nvSpPr>
-          <p:cNvPr id="11" name="TextBox 10"/>
+          <p:cNvPr id="12" name="TextBox 11"/>
           <p:cNvSpPr txBox="1"/>
           <p:nvPr/>
         </p:nvSpPr>
         <p:spPr>
           <a:xfrm>
             <a:off x="365760" y="822960"/>
-            <a:ext cx="1737360" cy="594360"/>
+            <a:ext cx="1737360" cy="566928"/>
           </a:xfrm>
           <a:prstGeom prst="rect">
             <a:avLst/>
@@ -5272,25 +5258,25 @@
           <a:p>
             <a:pPr algn="ctr"/>
             <a:r>
-              <a:rPr sz="2600" b="1" i="0">
+              <a:rPr sz="2200" b="1" i="0">
                 <a:solidFill>
                   <a:srgbClr val="FFFFFF"/>
                 </a:solidFill>
               </a:rPr>
-              <a:t>190+</a:t>
-            </a:r>
-          </a:p>
-        </p:txBody>
-      </p:sp>
-      <p:sp>
-        <p:nvSpPr>
-          <p:cNvPr id="12" name="TextBox 11"/>
+              <a:t>1946</a:t>
+            </a:r>
+          </a:p>
+        </p:txBody>
+      </p:sp>
+      <p:sp>
+        <p:nvSpPr>
+          <p:cNvPr id="13" name="TextBox 12"/>
           <p:cNvSpPr txBox="1"/>
           <p:nvPr/>
         </p:nvSpPr>
         <p:spPr>
           <a:xfrm>
-            <a:off x="365760" y="1408176"/>
+            <a:off x="365760" y="1371600"/>
             <a:ext cx="1737360" cy="365760"/>
           </a:xfrm>
           <a:prstGeom prst="rect">
@@ -5311,22 +5297,22 @@
                   <a:srgbClr val="CCEEEE"/>
                 </a:solidFill>
               </a:rPr>
-              <a:t>pays où l'UNICEF
-est présent</a:t>
-            </a:r>
-          </a:p>
-        </p:txBody>
-      </p:sp>
-      <p:sp>
-        <p:nvSpPr>
-          <p:cNvPr id="13" name="Rectangle 12"/>
+              <a:t>Fondation de
+l'UNICEF (ONU)</a:t>
+            </a:r>
+          </a:p>
+        </p:txBody>
+      </p:sp>
+      <p:sp>
+        <p:nvSpPr>
+          <p:cNvPr id="14" name="Rectangle 13"/>
           <p:cNvSpPr/>
           <p:nvPr/>
         </p:nvSpPr>
         <p:spPr>
           <a:xfrm>
-            <a:off x="2240279" y="804672"/>
-            <a:ext cx="1920240" cy="987552"/>
+            <a:off x="2249424" y="804672"/>
+            <a:ext cx="1920240" cy="960120"/>
           </a:xfrm>
           <a:prstGeom prst="rect">
             <a:avLst/>
@@ -5362,14 +5348,14 @@
       </p:sp>
       <p:sp>
         <p:nvSpPr>
-          <p:cNvPr id="14" name="TextBox 13"/>
+          <p:cNvPr id="15" name="TextBox 14"/>
           <p:cNvSpPr txBox="1"/>
           <p:nvPr/>
         </p:nvSpPr>
         <p:spPr>
           <a:xfrm>
-            <a:off x="2331720" y="822960"/>
-            <a:ext cx="1737360" cy="594360"/>
+            <a:off x="2340864" y="822960"/>
+            <a:ext cx="1737360" cy="566928"/>
           </a:xfrm>
           <a:prstGeom prst="rect">
             <a:avLst/>
@@ -5384,25 +5370,25 @@
           <a:p>
             <a:pPr algn="ctr"/>
             <a:r>
-              <a:rPr sz="2600" b="1" i="0">
+              <a:rPr sz="2200" b="1" i="0">
                 <a:solidFill>
                   <a:srgbClr val="FFFFFF"/>
                 </a:solidFill>
               </a:rPr>
-              <a:t>200M+</a:t>
-            </a:r>
-          </a:p>
-        </p:txBody>
-      </p:sp>
-      <p:sp>
-        <p:nvSpPr>
-          <p:cNvPr id="15" name="TextBox 14"/>
+              <a:t>190</a:t>
+            </a:r>
+          </a:p>
+        </p:txBody>
+      </p:sp>
+      <p:sp>
+        <p:nvSpPr>
+          <p:cNvPr id="16" name="TextBox 15"/>
           <p:cNvSpPr txBox="1"/>
           <p:nvPr/>
         </p:nvSpPr>
         <p:spPr>
           <a:xfrm>
-            <a:off x="2331720" y="1408176"/>
+            <a:off x="2340864" y="1371600"/>
             <a:ext cx="1737360" cy="365760"/>
           </a:xfrm>
           <a:prstGeom prst="rect">
@@ -5423,22 +5409,22 @@
                   <a:srgbClr val="CCEEEE"/>
                 </a:solidFill>
               </a:rPr>
-              <a:t>enfants aidés
-chaque année</a:t>
-            </a:r>
-          </a:p>
-        </p:txBody>
-      </p:sp>
-      <p:sp>
-        <p:nvSpPr>
-          <p:cNvPr id="16" name="Rectangle 15"/>
+              <a:t>pays où l'UNICEF
+est présent</a:t>
+            </a:r>
+          </a:p>
+        </p:txBody>
+      </p:sp>
+      <p:sp>
+        <p:nvSpPr>
+          <p:cNvPr id="17" name="Rectangle 16"/>
           <p:cNvSpPr/>
           <p:nvPr/>
         </p:nvSpPr>
         <p:spPr>
           <a:xfrm>
-            <a:off x="4206240" y="804672"/>
-            <a:ext cx="1920240" cy="987552"/>
+            <a:off x="4224528" y="804672"/>
+            <a:ext cx="1920240" cy="960120"/>
           </a:xfrm>
           <a:prstGeom prst="rect">
             <a:avLst/>
@@ -5474,14 +5460,14 @@
       </p:sp>
       <p:sp>
         <p:nvSpPr>
-          <p:cNvPr id="17" name="TextBox 16"/>
+          <p:cNvPr id="18" name="TextBox 17"/>
           <p:cNvSpPr txBox="1"/>
           <p:nvPr/>
         </p:nvSpPr>
         <p:spPr>
           <a:xfrm>
-            <a:off x="4297679" y="822960"/>
-            <a:ext cx="1737360" cy="594360"/>
+            <a:off x="4315968" y="822960"/>
+            <a:ext cx="1737360" cy="566928"/>
           </a:xfrm>
           <a:prstGeom prst="rect">
             <a:avLst/>
@@ -5496,25 +5482,25 @@
           <a:p>
             <a:pPr algn="ctr"/>
             <a:r>
-              <a:rPr sz="2600" b="1" i="0">
+              <a:rPr sz="2200" b="1" i="0">
                 <a:solidFill>
                   <a:srgbClr val="FFFFFF"/>
                 </a:solidFill>
               </a:rPr>
-              <a:t>830M€</a:t>
-            </a:r>
-          </a:p>
-        </p:txBody>
-      </p:sp>
-      <p:sp>
-        <p:nvSpPr>
-          <p:cNvPr id="18" name="TextBox 17"/>
+              <a:t>45%</a:t>
+            </a:r>
+          </a:p>
+        </p:txBody>
+      </p:sp>
+      <p:sp>
+        <p:nvSpPr>
+          <p:cNvPr id="19" name="TextBox 18"/>
           <p:cNvSpPr txBox="1"/>
           <p:nvPr/>
         </p:nvSpPr>
         <p:spPr>
           <a:xfrm>
-            <a:off x="4297679" y="1408176"/>
+            <a:off x="4315968" y="1371600"/>
             <a:ext cx="1737360" cy="365760"/>
           </a:xfrm>
           <a:prstGeom prst="rect">
@@ -5535,22 +5521,22 @@
                   <a:srgbClr val="CCEEEE"/>
                 </a:solidFill>
               </a:rPr>
-              <a:t>collectés en France
-en 2024</a:t>
-            </a:r>
-          </a:p>
-        </p:txBody>
-      </p:sp>
-      <p:sp>
-        <p:nvSpPr>
-          <p:cNvPr id="19" name="Rectangle 18"/>
+              <a:t>des enfants du monde
+vaccinés par l'UNICEF</a:t>
+            </a:r>
+          </a:p>
+        </p:txBody>
+      </p:sp>
+      <p:sp>
+        <p:nvSpPr>
+          <p:cNvPr id="20" name="Rectangle 19"/>
           <p:cNvSpPr/>
           <p:nvPr/>
         </p:nvSpPr>
         <p:spPr>
           <a:xfrm>
-            <a:off x="6172200" y="804672"/>
-            <a:ext cx="1920240" cy="987552"/>
+            <a:off x="6199632" y="804672"/>
+            <a:ext cx="1920240" cy="960120"/>
           </a:xfrm>
           <a:prstGeom prst="rect">
             <a:avLst/>
@@ -5586,14 +5572,14 @@
       </p:sp>
       <p:sp>
         <p:nvSpPr>
-          <p:cNvPr id="20" name="TextBox 19"/>
+          <p:cNvPr id="21" name="TextBox 20"/>
           <p:cNvSpPr txBox="1"/>
           <p:nvPr/>
         </p:nvSpPr>
         <p:spPr>
           <a:xfrm>
-            <a:off x="6263640" y="822960"/>
-            <a:ext cx="1737360" cy="594360"/>
+            <a:off x="6291072" y="822960"/>
+            <a:ext cx="1737360" cy="566928"/>
           </a:xfrm>
           <a:prstGeom prst="rect">
             <a:avLst/>
@@ -5608,25 +5594,25 @@
           <a:p>
             <a:pPr algn="ctr"/>
             <a:r>
-              <a:rPr sz="2600" b="1" i="0">
+              <a:rPr sz="2200" b="1" i="0">
                 <a:solidFill>
                   <a:srgbClr val="FFFFFF"/>
                 </a:solidFill>
               </a:rPr>
-              <a:t>72%</a:t>
-            </a:r>
-          </a:p>
-        </p:txBody>
-      </p:sp>
-      <p:sp>
-        <p:nvSpPr>
-          <p:cNvPr id="21" name="TextBox 20"/>
+              <a:t>92g</a:t>
+            </a:r>
+          </a:p>
+        </p:txBody>
+      </p:sp>
+      <p:sp>
+        <p:nvSpPr>
+          <p:cNvPr id="22" name="TextBox 21"/>
           <p:cNvSpPr txBox="1"/>
           <p:nvPr/>
         </p:nvSpPr>
         <p:spPr>
           <a:xfrm>
-            <a:off x="6263640" y="1408176"/>
+            <a:off x="6291072" y="1371600"/>
             <a:ext cx="1737360" cy="365760"/>
           </a:xfrm>
           <a:prstGeom prst="rect">
@@ -5647,22 +5633,22 @@
                   <a:srgbClr val="CCEEEE"/>
                 </a:solidFill>
               </a:rPr>
-              <a:t>des fonds viennent
-des dons privés</a:t>
-            </a:r>
-          </a:p>
-        </p:txBody>
-      </p:sp>
-      <p:sp>
-        <p:nvSpPr>
-          <p:cNvPr id="22" name="Rectangle 21"/>
+              <a:t>poids d'1 sachet RUTF
+traitement malnutrition</a:t>
+            </a:r>
+          </a:p>
+        </p:txBody>
+      </p:sp>
+      <p:sp>
+        <p:nvSpPr>
+          <p:cNvPr id="23" name="Rectangle 22"/>
           <p:cNvSpPr/>
           <p:nvPr/>
         </p:nvSpPr>
         <p:spPr>
           <a:xfrm>
-            <a:off x="8138160" y="804672"/>
-            <a:ext cx="1920240" cy="987552"/>
+            <a:off x="8174736" y="804672"/>
+            <a:ext cx="1920240" cy="960120"/>
           </a:xfrm>
           <a:prstGeom prst="rect">
             <a:avLst/>
@@ -5698,14 +5684,14 @@
       </p:sp>
       <p:sp>
         <p:nvSpPr>
-          <p:cNvPr id="23" name="TextBox 22"/>
+          <p:cNvPr id="24" name="TextBox 23"/>
           <p:cNvSpPr txBox="1"/>
           <p:nvPr/>
         </p:nvSpPr>
         <p:spPr>
           <a:xfrm>
-            <a:off x="8229600" y="822960"/>
-            <a:ext cx="1737360" cy="594360"/>
+            <a:off x="8266176" y="822960"/>
+            <a:ext cx="1737360" cy="566928"/>
           </a:xfrm>
           <a:prstGeom prst="rect">
             <a:avLst/>
@@ -5720,25 +5706,25 @@
           <a:p>
             <a:pPr algn="ctr"/>
             <a:r>
-              <a:rPr sz="2600" b="1" i="0">
+              <a:rPr sz="2200" b="1" i="0">
                 <a:solidFill>
                   <a:srgbClr val="FFFFFF"/>
                 </a:solidFill>
               </a:rPr>
-              <a:t>3€/j</a:t>
-            </a:r>
-          </a:p>
-        </p:txBody>
-      </p:sp>
-      <p:sp>
-        <p:nvSpPr>
-          <p:cNvPr id="24" name="TextBox 23"/>
+              <a:t>3 princ.</a:t>
+            </a:r>
+          </a:p>
+        </p:txBody>
+      </p:sp>
+      <p:sp>
+        <p:nvSpPr>
+          <p:cNvPr id="25" name="TextBox 24"/>
           <p:cNvSpPr txBox="1"/>
           <p:nvPr/>
         </p:nvSpPr>
         <p:spPr>
           <a:xfrm>
-            <a:off x="8229600" y="1408176"/>
+            <a:off x="8266176" y="1371600"/>
             <a:ext cx="1737360" cy="365760"/>
           </a:xfrm>
           <a:prstGeom prst="rect">
@@ -5759,22 +5745,23 @@
                   <a:srgbClr val="CCEEEE"/>
                 </a:solidFill>
               </a:rPr>
-              <a:t>coût d'1 journée
-d'alimentation enfant</a:t>
-            </a:r>
-          </a:p>
-        </p:txBody>
-      </p:sp>
-      <p:sp>
-        <p:nvSpPr>
-          <p:cNvPr id="25" name="Rectangle 24"/>
+              <a:t>Humanité
+Impartialité
+Neutralité</a:t>
+            </a:r>
+          </a:p>
+        </p:txBody>
+      </p:sp>
+      <p:sp>
+        <p:nvSpPr>
+          <p:cNvPr id="26" name="Rectangle 25"/>
           <p:cNvSpPr/>
           <p:nvPr/>
         </p:nvSpPr>
         <p:spPr>
           <a:xfrm>
-            <a:off x="10104120" y="804672"/>
-            <a:ext cx="1920240" cy="987552"/>
+            <a:off x="10149840" y="804672"/>
+            <a:ext cx="1920240" cy="960120"/>
           </a:xfrm>
           <a:prstGeom prst="rect">
             <a:avLst/>
@@ -5810,14 +5797,14 @@
       </p:sp>
       <p:sp>
         <p:nvSpPr>
-          <p:cNvPr id="26" name="TextBox 25"/>
+          <p:cNvPr id="27" name="TextBox 26"/>
           <p:cNvSpPr txBox="1"/>
           <p:nvPr/>
         </p:nvSpPr>
         <p:spPr>
           <a:xfrm>
-            <a:off x="10195560" y="822960"/>
-            <a:ext cx="1737360" cy="594360"/>
+            <a:off x="10241280" y="822960"/>
+            <a:ext cx="1737360" cy="566928"/>
           </a:xfrm>
           <a:prstGeom prst="rect">
             <a:avLst/>
@@ -5832,25 +5819,25 @@
           <a:p>
             <a:pPr algn="ctr"/>
             <a:r>
-              <a:rPr sz="2600" b="1" i="0">
+              <a:rPr sz="2200" b="1" i="0">
                 <a:solidFill>
                   <a:srgbClr val="FFFFFF"/>
                 </a:solidFill>
               </a:rPr>
-              <a:t>82%</a:t>
-            </a:r>
-          </a:p>
-        </p:txBody>
-      </p:sp>
-      <p:sp>
-        <p:nvSpPr>
-          <p:cNvPr id="27" name="TextBox 26"/>
+              <a:t>Loi 1901</a:t>
+            </a:r>
+          </a:p>
+        </p:txBody>
+      </p:sp>
+      <p:sp>
+        <p:nvSpPr>
+          <p:cNvPr id="28" name="TextBox 27"/>
           <p:cNvSpPr txBox="1"/>
           <p:nvPr/>
         </p:nvSpPr>
         <p:spPr>
           <a:xfrm>
-            <a:off x="10195560" y="1408176"/>
+            <a:off x="10241280" y="1371600"/>
             <a:ext cx="1737360" cy="365760"/>
           </a:xfrm>
           <a:prstGeom prst="rect">
@@ -5871,22 +5858,22 @@
                   <a:srgbClr val="CCEEEE"/>
                 </a:solidFill>
               </a:rPr>
-              <a:t>des dons affectés
-directement aux programmes</a:t>
-            </a:r>
-          </a:p>
-        </p:txBody>
-      </p:sp>
-      <p:sp>
-        <p:nvSpPr>
-          <p:cNvPr id="28" name="TextBox 27"/>
+              <a:t>Cadre juridique
+associatif français</a:t>
+            </a:r>
+          </a:p>
+        </p:txBody>
+      </p:sp>
+      <p:sp>
+        <p:nvSpPr>
+          <p:cNvPr id="29" name="TextBox 28"/>
           <p:cNvSpPr txBox="1"/>
           <p:nvPr/>
         </p:nvSpPr>
         <p:spPr>
           <a:xfrm>
-            <a:off x="274320" y="1920240"/>
-            <a:ext cx="11640312" cy="320040"/>
+            <a:off x="274320" y="1938528"/>
+            <a:ext cx="11640312" cy="274320"/>
           </a:xfrm>
           <a:prstGeom prst="rect">
             <a:avLst/>
@@ -5906,21 +5893,64 @@
                   <a:srgbClr val="005555"/>
                 </a:solidFill>
               </a:rPr>
-              <a:t>Ce que vous dites à chaque donateur :</a:t>
-            </a:r>
-          </a:p>
-        </p:txBody>
-      </p:sp>
-      <p:sp>
-        <p:nvSpPr>
-          <p:cNvPr id="29" name="Rectangle 28"/>
+              <a:t>La cause centrale de la campagne :</a:t>
+            </a:r>
+          </a:p>
+        </p:txBody>
+      </p:sp>
+      <p:sp>
+        <p:nvSpPr>
+          <p:cNvPr id="30" name="Rectangle 29"/>
           <p:cNvSpPr/>
           <p:nvPr/>
         </p:nvSpPr>
         <p:spPr>
           <a:xfrm>
-            <a:off x="274320" y="2286000"/>
-            <a:ext cx="11640312" cy="749808"/>
+            <a:off x="274320" y="2267712"/>
+            <a:ext cx="109728" cy="749808"/>
+          </a:xfrm>
+          <a:prstGeom prst="rect">
+            <a:avLst/>
+          </a:prstGeom>
+          <a:solidFill>
+            <a:srgbClr val="008080"/>
+          </a:solidFill>
+          <a:ln>
+            <a:noFill/>
+          </a:ln>
+        </p:spPr>
+        <p:style>
+          <a:lnRef idx="1">
+            <a:schemeClr val="accent1"/>
+          </a:lnRef>
+          <a:fillRef idx="3">
+            <a:schemeClr val="accent1"/>
+          </a:fillRef>
+          <a:effectRef idx="2">
+            <a:schemeClr val="accent1"/>
+          </a:effectRef>
+          <a:fontRef idx="minor">
+            <a:schemeClr val="lt1"/>
+          </a:fontRef>
+        </p:style>
+        <p:txBody>
+          <a:bodyPr rtlCol="0" anchor="ctr"/>
+          <a:lstStyle/>
+          <a:p>
+            <a:pPr algn="ctr"/>
+          </a:p>
+        </p:txBody>
+      </p:sp>
+      <p:sp>
+        <p:nvSpPr>
+          <p:cNvPr id="31" name="Rectangle 30"/>
+          <p:cNvSpPr/>
+          <p:nvPr/>
+        </p:nvSpPr>
+        <p:spPr>
+          <a:xfrm>
+            <a:off x="402336" y="2267712"/>
+            <a:ext cx="11512296" cy="749808"/>
           </a:xfrm>
           <a:prstGeom prst="rect">
             <a:avLst/>
@@ -5956,14 +5986,14 @@
       </p:sp>
       <p:sp>
         <p:nvSpPr>
-          <p:cNvPr id="30" name="TextBox 29"/>
+          <p:cNvPr id="32" name="TextBox 31"/>
           <p:cNvSpPr txBox="1"/>
           <p:nvPr/>
         </p:nvSpPr>
         <p:spPr>
           <a:xfrm>
-            <a:off x="411479" y="2359152"/>
-            <a:ext cx="11365992" cy="603503"/>
+            <a:off x="539496" y="2340864"/>
+            <a:ext cx="11237976" cy="603503"/>
           </a:xfrm>
           <a:prstGeom prst="rect">
             <a:avLst/>
@@ -5983,28 +6013,62 @@
                   <a:srgbClr val="1A1A1A"/>
                 </a:solidFill>
               </a:rPr>
-              <a:t>« Un don de 10€/mois, c'est 30 centimes par jour — moins qu'un café.
-En 1 an, vous offrez à 6 enfants l'accès à l'eau potable, à la nutrition et aux soins. »</a:t>
-            </a:r>
-          </a:p>
-        </p:txBody>
-      </p:sp>
-      <p:sp>
-        <p:nvSpPr>
-          <p:cNvPr id="31" name="Rectangle 30"/>
+              <a:t>La malnutrition aigüe sévère — 1 enfant meurt de faim toutes les 11 secondes dans le monde.
+Les sachets RUTF (92g) permettent à un enfant sévèrement malnutri de guérir en 6 à 8 semaines.</a:t>
+            </a:r>
+          </a:p>
+        </p:txBody>
+      </p:sp>
+      <p:sp>
+        <p:nvSpPr>
+          <p:cNvPr id="33" name="TextBox 32"/>
+          <p:cNvSpPr txBox="1"/>
+          <p:nvPr/>
+        </p:nvSpPr>
+        <p:spPr>
+          <a:xfrm>
+            <a:off x="274320" y="3200400"/>
+            <a:ext cx="11640312" cy="274320"/>
+          </a:xfrm>
+          <a:prstGeom prst="rect">
+            <a:avLst/>
+          </a:prstGeom>
+          <a:noFill/>
+        </p:spPr>
+        <p:txBody>
+          <a:bodyPr wrap="square">
+            <a:spAutoFit/>
+          </a:bodyPr>
+          <a:lstStyle/>
+          <a:p>
+            <a:pPr algn="l"/>
+            <a:r>
+              <a:rPr sz="1200" b="1" i="0">
+                <a:solidFill>
+                  <a:srgbClr val="005555"/>
+                </a:solidFill>
+              </a:rPr>
+              <a:t>Les KPI qui structurent votre journée de production :</a:t>
+            </a:r>
+          </a:p>
+        </p:txBody>
+      </p:sp>
+      <p:sp>
+        <p:nvSpPr>
+          <p:cNvPr id="34" name="Rectangle 33"/>
           <p:cNvSpPr/>
           <p:nvPr/>
         </p:nvSpPr>
         <p:spPr>
           <a:xfrm>
-            <a:off x="274320" y="2286000"/>
-            <a:ext cx="109728" cy="749808"/>
+            <a:off x="274320" y="3547872"/>
+            <a:ext cx="1920240" cy="987552"/>
           </a:xfrm>
           <a:prstGeom prst="rect">
             <a:avLst/>
           </a:prstGeom>
           <a:solidFill>
-            <a:srgbClr val="FF0000"/>
+            <a:srgbClr val="008080"/>
           </a:solidFill>
           <a:ln>
             <a:noFill/>
@@ -6034,14 +6098,14 @@
       </p:sp>
       <p:sp>
         <p:nvSpPr>
-          <p:cNvPr id="32" name="TextBox 31"/>
+          <p:cNvPr id="35" name="TextBox 34"/>
           <p:cNvSpPr txBox="1"/>
           <p:nvPr/>
         </p:nvSpPr>
         <p:spPr>
           <a:xfrm>
-            <a:off x="274320" y="3218688"/>
-            <a:ext cx="11640312" cy="292608"/>
+            <a:off x="365760" y="3566160"/>
+            <a:ext cx="1737360" cy="502920"/>
           </a:xfrm>
           <a:prstGeom prst="rect">
             <a:avLst/>
@@ -6054,39 +6118,72 @@
           </a:bodyPr>
           <a:lstStyle/>
           <a:p>
-            <a:pPr algn="l"/>
-            <a:r>
-              <a:rPr sz="1200" b="1" i="0">
-                <a:solidFill>
-                  <a:srgbClr val="005555"/>
+            <a:pPr algn="ctr"/>
+            <a:r>
+              <a:rPr sz="1400" b="1" i="0">
+                <a:solidFill>
+                  <a:srgbClr val="FFFFFF"/>
                 </a:solidFill>
               </a:rPr>
-              <a:t>Votre activité : L'ascenseur de mission</a:t>
-            </a:r>
-          </a:p>
-        </p:txBody>
-      </p:sp>
-      <p:sp>
-        <p:nvSpPr>
-          <p:cNvPr id="33" name="Rectangle 32"/>
+              <a:t>CU/H ≥ 9</a:t>
+            </a:r>
+          </a:p>
+        </p:txBody>
+      </p:sp>
+      <p:sp>
+        <p:nvSpPr>
+          <p:cNvPr id="36" name="TextBox 35"/>
+          <p:cNvSpPr txBox="1"/>
+          <p:nvPr/>
+        </p:nvSpPr>
+        <p:spPr>
+          <a:xfrm>
+            <a:off x="365760" y="4059936"/>
+            <a:ext cx="1737360" cy="438912"/>
+          </a:xfrm>
+          <a:prstGeom prst="rect">
+            <a:avLst/>
+          </a:prstGeom>
+          <a:noFill/>
+        </p:spPr>
+        <p:txBody>
+          <a:bodyPr wrap="square">
+            <a:spAutoFit/>
+          </a:bodyPr>
+          <a:lstStyle/>
+          <a:p>
+            <a:pPr algn="ctr"/>
+            <a:r>
+              <a:rPr sz="900" b="0" i="0">
+                <a:solidFill>
+                  <a:srgbClr val="CCEEEE"/>
+                </a:solidFill>
+              </a:rPr>
+              <a:t>Contacts Utiles
+par heure minimum</a:t>
+            </a:r>
+          </a:p>
+        </p:txBody>
+      </p:sp>
+      <p:sp>
+        <p:nvSpPr>
+          <p:cNvPr id="37" name="Rectangle 36"/>
           <p:cNvSpPr/>
           <p:nvPr/>
         </p:nvSpPr>
         <p:spPr>
           <a:xfrm>
-            <a:off x="274320" y="3584448"/>
-            <a:ext cx="2249424" cy="960120"/>
+            <a:off x="2249424" y="3547872"/>
+            <a:ext cx="1920240" cy="987552"/>
           </a:xfrm>
           <a:prstGeom prst="rect">
             <a:avLst/>
           </a:prstGeom>
           <a:solidFill>
-            <a:srgbClr val="FFFFFF"/>
+            <a:srgbClr val="008080"/>
           </a:solidFill>
-          <a:ln w="12700">
-            <a:solidFill>
-              <a:srgbClr val="008080"/>
-            </a:solidFill>
+          <a:ln>
+            <a:noFill/>
           </a:ln>
         </p:spPr>
         <p:style>
@@ -6113,14 +6210,14 @@
       </p:sp>
       <p:sp>
         <p:nvSpPr>
-          <p:cNvPr id="34" name="TextBox 33"/>
+          <p:cNvPr id="38" name="TextBox 37"/>
           <p:cNvSpPr txBox="1"/>
           <p:nvPr/>
         </p:nvSpPr>
         <p:spPr>
           <a:xfrm>
-            <a:off x="384048" y="3639312"/>
-            <a:ext cx="2029968" cy="841248"/>
+            <a:off x="2340864" y="3566160"/>
+            <a:ext cx="1737360" cy="502920"/>
           </a:xfrm>
           <a:prstGeom prst="rect">
             <a:avLst/>
@@ -6133,41 +6230,72 @@
           </a:bodyPr>
           <a:lstStyle/>
           <a:p>
-            <a:pPr algn="l"/>
+            <a:pPr algn="ctr"/>
+            <a:r>
+              <a:rPr sz="1400" b="1" i="0">
+                <a:solidFill>
+                  <a:srgbClr val="FFFFFF"/>
+                </a:solidFill>
+              </a:rPr>
+              <a:t>TX Transfo</a:t>
+            </a:r>
+          </a:p>
+        </p:txBody>
+      </p:sp>
+      <p:sp>
+        <p:nvSpPr>
+          <p:cNvPr id="39" name="TextBox 38"/>
+          <p:cNvSpPr txBox="1"/>
+          <p:nvPr/>
+        </p:nvSpPr>
+        <p:spPr>
+          <a:xfrm>
+            <a:off x="2340864" y="4059936"/>
+            <a:ext cx="1737360" cy="438912"/>
+          </a:xfrm>
+          <a:prstGeom prst="rect">
+            <a:avLst/>
+          </a:prstGeom>
+          <a:noFill/>
+        </p:spPr>
+        <p:txBody>
+          <a:bodyPr wrap="square">
+            <a:spAutoFit/>
+          </a:bodyPr>
+          <a:lstStyle/>
+          <a:p>
+            <a:pPr algn="ctr"/>
             <a:r>
               <a:rPr sz="900" b="0" i="0">
                 <a:solidFill>
-                  <a:srgbClr val="1A1A1A"/>
+                  <a:srgbClr val="CCEEEE"/>
                 </a:solidFill>
               </a:rPr>
-              <a:t>① Lisez seul
-le brief mission
-(3 min)</a:t>
-            </a:r>
-          </a:p>
-        </p:txBody>
-      </p:sp>
-      <p:sp>
-        <p:nvSpPr>
-          <p:cNvPr id="35" name="Rectangle 34"/>
+              <a:t>% PEL+PA
+parmi les CU</a:t>
+            </a:r>
+          </a:p>
+        </p:txBody>
+      </p:sp>
+      <p:sp>
+        <p:nvSpPr>
+          <p:cNvPr id="40" name="Rectangle 39"/>
           <p:cNvSpPr/>
           <p:nvPr/>
         </p:nvSpPr>
         <p:spPr>
           <a:xfrm>
-            <a:off x="2560320" y="3584448"/>
-            <a:ext cx="2249424" cy="960120"/>
+            <a:off x="4224528" y="3547872"/>
+            <a:ext cx="1920240" cy="987552"/>
           </a:xfrm>
           <a:prstGeom prst="rect">
             <a:avLst/>
           </a:prstGeom>
           <a:solidFill>
-            <a:srgbClr val="FFFFFF"/>
+            <a:srgbClr val="008080"/>
           </a:solidFill>
-          <a:ln w="12700">
-            <a:solidFill>
-              <a:srgbClr val="008080"/>
-            </a:solidFill>
+          <a:ln>
+            <a:noFill/>
           </a:ln>
         </p:spPr>
         <p:style>
@@ -6194,14 +6322,14 @@
       </p:sp>
       <p:sp>
         <p:nvSpPr>
-          <p:cNvPr id="36" name="TextBox 35"/>
+          <p:cNvPr id="41" name="TextBox 40"/>
           <p:cNvSpPr txBox="1"/>
           <p:nvPr/>
         </p:nvSpPr>
         <p:spPr>
           <a:xfrm>
-            <a:off x="2670048" y="3639312"/>
-            <a:ext cx="2029968" cy="841248"/>
+            <a:off x="4315968" y="3566160"/>
+            <a:ext cx="1737360" cy="502920"/>
           </a:xfrm>
           <a:prstGeom prst="rect">
             <a:avLst/>
@@ -6214,41 +6342,72 @@
           </a:bodyPr>
           <a:lstStyle/>
           <a:p>
-            <a:pPr algn="l"/>
+            <a:pPr algn="ctr"/>
+            <a:r>
+              <a:rPr sz="1400" b="1" i="0">
+                <a:solidFill>
+                  <a:srgbClr val="FFFFFF"/>
+                </a:solidFill>
+              </a:rPr>
+              <a:t>PDC</a:t>
+            </a:r>
+          </a:p>
+        </p:txBody>
+      </p:sp>
+      <p:sp>
+        <p:nvSpPr>
+          <p:cNvPr id="42" name="TextBox 41"/>
+          <p:cNvSpPr txBox="1"/>
+          <p:nvPr/>
+        </p:nvSpPr>
+        <p:spPr>
+          <a:xfrm>
+            <a:off x="4315968" y="4059936"/>
+            <a:ext cx="1737360" cy="438912"/>
+          </a:xfrm>
+          <a:prstGeom prst="rect">
+            <a:avLst/>
+          </a:prstGeom>
+          <a:noFill/>
+        </p:spPr>
+        <p:txBody>
+          <a:bodyPr wrap="square">
+            <a:spAutoFit/>
+          </a:bodyPr>
+          <a:lstStyle/>
+          <a:p>
+            <a:pPr algn="ctr"/>
             <a:r>
               <a:rPr sz="900" b="0" i="0">
                 <a:solidFill>
-                  <a:srgbClr val="1A1A1A"/>
+                  <a:srgbClr val="CCEEEE"/>
                 </a:solidFill>
               </a:rPr>
-              <a:t>② Formulez
-votre pitch 60s
-(5 min)</a:t>
-            </a:r>
-          </a:p>
-        </p:txBody>
-      </p:sp>
-      <p:sp>
-        <p:nvSpPr>
-          <p:cNvPr id="37" name="Rectangle 36"/>
+              <a:t>Plan de Charge
+mensuel FIDELIS</a:t>
+            </a:r>
+          </a:p>
+        </p:txBody>
+      </p:sp>
+      <p:sp>
+        <p:nvSpPr>
+          <p:cNvPr id="43" name="Rectangle 42"/>
           <p:cNvSpPr/>
           <p:nvPr/>
         </p:nvSpPr>
         <p:spPr>
           <a:xfrm>
-            <a:off x="4846320" y="3584448"/>
-            <a:ext cx="2249424" cy="960120"/>
+            <a:off x="6199632" y="3547872"/>
+            <a:ext cx="1920240" cy="987552"/>
           </a:xfrm>
           <a:prstGeom prst="rect">
             <a:avLst/>
           </a:prstGeom>
           <a:solidFill>
-            <a:srgbClr val="FFFFFF"/>
+            <a:srgbClr val="008080"/>
           </a:solidFill>
-          <a:ln w="12700">
-            <a:solidFill>
-              <a:srgbClr val="008080"/>
-            </a:solidFill>
+          <a:ln>
+            <a:noFill/>
           </a:ln>
         </p:spPr>
         <p:style>
@@ -6275,14 +6434,14 @@
       </p:sp>
       <p:sp>
         <p:nvSpPr>
-          <p:cNvPr id="38" name="TextBox 37"/>
+          <p:cNvPr id="44" name="TextBox 43"/>
           <p:cNvSpPr txBox="1"/>
           <p:nvPr/>
         </p:nvSpPr>
         <p:spPr>
           <a:xfrm>
-            <a:off x="4956048" y="3639312"/>
-            <a:ext cx="2029968" cy="841248"/>
+            <a:off x="6291072" y="3566160"/>
+            <a:ext cx="1737360" cy="502920"/>
           </a:xfrm>
           <a:prstGeom prst="rect">
             <a:avLst/>
@@ -6295,41 +6454,72 @@
           </a:bodyPr>
           <a:lstStyle/>
           <a:p>
-            <a:pPr algn="l"/>
+            <a:pPr algn="ctr"/>
+            <a:r>
+              <a:rPr sz="1400" b="1" i="0">
+                <a:solidFill>
+                  <a:srgbClr val="FFFFFF"/>
+                </a:solidFill>
+              </a:rPr>
+              <a:t>DON</a:t>
+            </a:r>
+          </a:p>
+        </p:txBody>
+      </p:sp>
+      <p:sp>
+        <p:nvSpPr>
+          <p:cNvPr id="45" name="TextBox 44"/>
+          <p:cNvSpPr txBox="1"/>
+          <p:nvPr/>
+        </p:nvSpPr>
+        <p:spPr>
+          <a:xfrm>
+            <a:off x="6291072" y="4059936"/>
+            <a:ext cx="1737360" cy="438912"/>
+          </a:xfrm>
+          <a:prstGeom prst="rect">
+            <a:avLst/>
+          </a:prstGeom>
+          <a:noFill/>
+        </p:spPr>
+        <p:txBody>
+          <a:bodyPr wrap="square">
+            <a:spAutoFit/>
+          </a:bodyPr>
+          <a:lstStyle/>
+          <a:p>
+            <a:pPr algn="ctr"/>
             <a:r>
               <a:rPr sz="900" b="0" i="0">
                 <a:solidFill>
-                  <a:srgbClr val="1A1A1A"/>
+                  <a:srgbClr val="CCEEEE"/>
                 </a:solidFill>
               </a:rPr>
-              <a:t>③ Présentez à
-votre binôme
-(60 sec)</a:t>
-            </a:r>
-          </a:p>
-        </p:txBody>
-      </p:sp>
-      <p:sp>
-        <p:nvSpPr>
-          <p:cNvPr id="39" name="Rectangle 38"/>
+              <a:t>Contact qui accepte
+le don régulier</a:t>
+            </a:r>
+          </a:p>
+        </p:txBody>
+      </p:sp>
+      <p:sp>
+        <p:nvSpPr>
+          <p:cNvPr id="46" name="Rectangle 45"/>
           <p:cNvSpPr/>
           <p:nvPr/>
         </p:nvSpPr>
         <p:spPr>
           <a:xfrm>
-            <a:off x="7132320" y="3584448"/>
-            <a:ext cx="2249424" cy="960120"/>
+            <a:off x="8174736" y="3547872"/>
+            <a:ext cx="1920240" cy="987552"/>
           </a:xfrm>
           <a:prstGeom prst="rect">
             <a:avLst/>
           </a:prstGeom>
           <a:solidFill>
-            <a:srgbClr val="FFFFFF"/>
+            <a:srgbClr val="008080"/>
           </a:solidFill>
-          <a:ln w="12700">
-            <a:solidFill>
-              <a:srgbClr val="008080"/>
-            </a:solidFill>
+          <a:ln>
+            <a:noFill/>
           </a:ln>
         </p:spPr>
         <p:style>
@@ -6356,14 +6546,14 @@
       </p:sp>
       <p:sp>
         <p:nvSpPr>
-          <p:cNvPr id="40" name="TextBox 39"/>
+          <p:cNvPr id="47" name="TextBox 46"/>
           <p:cNvSpPr txBox="1"/>
           <p:nvPr/>
         </p:nvSpPr>
         <p:spPr>
           <a:xfrm>
-            <a:off x="7242048" y="3639312"/>
-            <a:ext cx="2029968" cy="841248"/>
+            <a:off x="8266176" y="3566160"/>
+            <a:ext cx="1737360" cy="502920"/>
           </a:xfrm>
           <a:prstGeom prst="rect">
             <a:avLst/>
@@ -6376,41 +6566,72 @@
           </a:bodyPr>
           <a:lstStyle/>
           <a:p>
-            <a:pPr algn="l"/>
+            <a:pPr algn="ctr"/>
+            <a:r>
+              <a:rPr sz="1400" b="1" i="0">
+                <a:solidFill>
+                  <a:srgbClr val="FFFFFF"/>
+                </a:solidFill>
+              </a:rPr>
+              <a:t>INDÉCIS</a:t>
+            </a:r>
+          </a:p>
+        </p:txBody>
+      </p:sp>
+      <p:sp>
+        <p:nvSpPr>
+          <p:cNvPr id="48" name="TextBox 47"/>
+          <p:cNvSpPr txBox="1"/>
+          <p:nvPr/>
+        </p:nvSpPr>
+        <p:spPr>
+          <a:xfrm>
+            <a:off x="8266176" y="4059936"/>
+            <a:ext cx="1737360" cy="438912"/>
+          </a:xfrm>
+          <a:prstGeom prst="rect">
+            <a:avLst/>
+          </a:prstGeom>
+          <a:noFill/>
+        </p:spPr>
+        <p:txBody>
+          <a:bodyPr wrap="square">
+            <a:spAutoFit/>
+          </a:bodyPr>
+          <a:lstStyle/>
+          <a:p>
+            <a:pPr algn="ctr"/>
             <a:r>
               <a:rPr sz="900" b="0" i="0">
                 <a:solidFill>
-                  <a:srgbClr val="1A1A1A"/>
+                  <a:srgbClr val="CCEEEE"/>
                 </a:solidFill>
               </a:rPr>
-              <a:t>④ Feedback pair :
-1 force + 1 conseil
-(3 min)</a:t>
-            </a:r>
-          </a:p>
-        </p:txBody>
-      </p:sp>
-      <p:sp>
-        <p:nvSpPr>
-          <p:cNvPr id="41" name="Rectangle 40"/>
+              <a:t>Contact à relancer
+après réflexion</a:t>
+            </a:r>
+          </a:p>
+        </p:txBody>
+      </p:sp>
+      <p:sp>
+        <p:nvSpPr>
+          <p:cNvPr id="49" name="Rectangle 48"/>
           <p:cNvSpPr/>
           <p:nvPr/>
         </p:nvSpPr>
         <p:spPr>
           <a:xfrm>
-            <a:off x="9418320" y="3584448"/>
-            <a:ext cx="2249424" cy="960120"/>
+            <a:off x="10149840" y="3547872"/>
+            <a:ext cx="1920240" cy="987552"/>
           </a:xfrm>
           <a:prstGeom prst="rect">
             <a:avLst/>
           </a:prstGeom>
           <a:solidFill>
-            <a:srgbClr val="FFFFFF"/>
+            <a:srgbClr val="008080"/>
           </a:solidFill>
-          <a:ln w="12700">
-            <a:solidFill>
-              <a:srgbClr val="008080"/>
-            </a:solidFill>
+          <a:ln>
+            <a:noFill/>
           </a:ln>
         </p:spPr>
         <p:style>
@@ -6437,14 +6658,14 @@
       </p:sp>
       <p:sp>
         <p:nvSpPr>
-          <p:cNvPr id="42" name="TextBox 41"/>
+          <p:cNvPr id="50" name="TextBox 49"/>
           <p:cNvSpPr txBox="1"/>
           <p:nvPr/>
         </p:nvSpPr>
         <p:spPr>
           <a:xfrm>
-            <a:off x="9528048" y="3639312"/>
-            <a:ext cx="2029968" cy="841248"/>
+            <a:off x="10241280" y="3566160"/>
+            <a:ext cx="1737360" cy="502920"/>
           </a:xfrm>
           <a:prstGeom prst="rect">
             <a:avLst/>
@@ -6457,36 +6678,69 @@
           </a:bodyPr>
           <a:lstStyle/>
           <a:p>
-            <a:pPr algn="l"/>
+            <a:pPr algn="ctr"/>
+            <a:r>
+              <a:rPr sz="1400" b="1" i="0">
+                <a:solidFill>
+                  <a:srgbClr val="FFFFFF"/>
+                </a:solidFill>
+              </a:rPr>
+              <a:t>REFUS</a:t>
+            </a:r>
+          </a:p>
+        </p:txBody>
+      </p:sp>
+      <p:sp>
+        <p:nvSpPr>
+          <p:cNvPr id="51" name="TextBox 50"/>
+          <p:cNvSpPr txBox="1"/>
+          <p:nvPr/>
+        </p:nvSpPr>
+        <p:spPr>
+          <a:xfrm>
+            <a:off x="10241280" y="4059936"/>
+            <a:ext cx="1737360" cy="438912"/>
+          </a:xfrm>
+          <a:prstGeom prst="rect">
+            <a:avLst/>
+          </a:prstGeom>
+          <a:noFill/>
+        </p:spPr>
+        <p:txBody>
+          <a:bodyPr wrap="square">
+            <a:spAutoFit/>
+          </a:bodyPr>
+          <a:lstStyle/>
+          <a:p>
+            <a:pPr algn="ctr"/>
             <a:r>
               <a:rPr sz="900" b="0" i="0">
                 <a:solidFill>
-                  <a:srgbClr val="1A1A1A"/>
+                  <a:srgbClr val="CCEEEE"/>
                 </a:solidFill>
               </a:rPr>
-              <a:t>⑤ Améliorez et
-représentez
-(5 min)</a:t>
-            </a:r>
-          </a:p>
-        </p:txBody>
-      </p:sp>
-      <p:sp>
-        <p:nvSpPr>
-          <p:cNvPr id="43" name="Rectangle 42"/>
+              <a:t>Contact qui refuse
+définitivement</a:t>
+            </a:r>
+          </a:p>
+        </p:txBody>
+      </p:sp>
+      <p:sp>
+        <p:nvSpPr>
+          <p:cNvPr id="52" name="Rectangle 51"/>
           <p:cNvSpPr/>
           <p:nvPr/>
         </p:nvSpPr>
         <p:spPr>
           <a:xfrm>
-            <a:off x="274320" y="4709160"/>
-            <a:ext cx="11640312" cy="384048"/>
+            <a:off x="274320" y="4681728"/>
+            <a:ext cx="11640312" cy="566928"/>
           </a:xfrm>
           <a:prstGeom prst="rect">
             <a:avLst/>
           </a:prstGeom>
           <a:solidFill>
-            <a:srgbClr val="FF0000"/>
+            <a:srgbClr val="008080"/>
           </a:solidFill>
           <a:ln>
             <a:noFill/>
@@ -6516,14 +6770,14 @@
       </p:sp>
       <p:sp>
         <p:nvSpPr>
-          <p:cNvPr id="44" name="TextBox 43"/>
+          <p:cNvPr id="53" name="TextBox 52"/>
           <p:cNvSpPr txBox="1"/>
           <p:nvPr/>
         </p:nvSpPr>
         <p:spPr>
           <a:xfrm>
-            <a:off x="411479" y="4782312"/>
-            <a:ext cx="11365992" cy="237744"/>
+            <a:off x="411479" y="4754880"/>
+            <a:ext cx="11365992" cy="420623"/>
           </a:xfrm>
           <a:prstGeom prst="rect">
             <a:avLst/>
@@ -6543,7 +6797,8 @@
                   <a:srgbClr val="FFFFFF"/>
                 </a:solidFill>
               </a:rPr>
-              <a:t>Éthique fundraiser : Vous représentez l'UNICEF. Badge visible en permanence. Aucune pression sur le donateur. Respect total du refus.</a:t>
+              <a:t>Organisation journée de production : 9h30–17h30  ·  6h40 de production effective
+Opérations Conquête (nouveaux prospects) vs Fidélisation / Réactivation (anciens donateurs)</a:t>
             </a:r>
           </a:p>
         </p:txBody>
@@ -6618,7 +6873,7 @@
         <p:spPr>
           <a:xfrm>
             <a:off x="0" y="0"/>
-            <a:ext cx="12188952" cy="658368"/>
+            <a:ext cx="12188952" cy="685800"/>
           </a:xfrm>
           <a:prstGeom prst="rect">
             <a:avLst/>
@@ -6660,14 +6915,14 @@
         </p:nvSpPr>
         <p:spPr>
           <a:xfrm>
-            <a:off x="0" y="640080"/>
-            <a:ext cx="12188952" cy="54864"/>
+            <a:off x="0" y="667512"/>
+            <a:ext cx="12188952" cy="45720"/>
           </a:xfrm>
           <a:prstGeom prst="rect">
             <a:avLst/>
           </a:prstGeom>
           <a:solidFill>
-            <a:srgbClr val="FF0000"/>
+            <a:srgbClr val="00AAAA"/>
           </a:solidFill>
           <a:ln>
             <a:noFill/>
@@ -6703,8 +6958,8 @@
         </p:nvSpPr>
         <p:spPr>
           <a:xfrm>
-            <a:off x="164592" y="64008"/>
-            <a:ext cx="685800" cy="530352"/>
+            <a:off x="164592" y="73152"/>
+            <a:ext cx="2011680" cy="347472"/>
           </a:xfrm>
           <a:prstGeom prst="rect">
             <a:avLst/>
@@ -6719,12 +6974,12 @@
           <a:p>
             <a:pPr algn="l"/>
             <a:r>
-              <a:rPr sz="2000" b="1" i="0">
+              <a:rPr sz="1400" b="1" i="0">
                 <a:solidFill>
                   <a:srgbClr val="FFFFFF"/>
                 </a:solidFill>
               </a:rPr>
-              <a:t>SHY</a:t>
+              <a:t>SHY-Performance</a:t>
             </a:r>
           </a:p>
         </p:txBody>
@@ -6737,14 +6992,14 @@
         </p:nvSpPr>
         <p:spPr>
           <a:xfrm>
-            <a:off x="914400" y="91440"/>
-            <a:ext cx="36576" cy="475488"/>
+            <a:off x="2286000" y="91440"/>
+            <a:ext cx="36576" cy="502920"/>
           </a:xfrm>
           <a:prstGeom prst="rect">
             <a:avLst/>
           </a:prstGeom>
           <a:solidFill>
-            <a:srgbClr val="FF0000"/>
+            <a:srgbClr val="00AAAA"/>
           </a:solidFill>
           <a:ln>
             <a:noFill/>
@@ -6780,8 +7035,8 @@
         </p:nvSpPr>
         <p:spPr>
           <a:xfrm>
-            <a:off x="1024128" y="91440"/>
-            <a:ext cx="10881360" cy="475488"/>
+            <a:off x="2423160" y="91440"/>
+            <a:ext cx="9235440" cy="502920"/>
           </a:xfrm>
           <a:prstGeom prst="rect">
             <a:avLst/>
@@ -6796,19 +7051,43 @@
           <a:p>
             <a:pPr algn="l"/>
             <a:r>
-              <a:rPr sz="1700" b="1" i="0">
+              <a:rPr sz="1600" b="1" i="0">
                 <a:solidFill>
                   <a:srgbClr val="FFFFFF"/>
                 </a:solidFill>
               </a:rPr>
-              <a:t>Votre Posture de Fundraiser — Ce que le donateur perçoit en 7 secondes</a:t>
-            </a:r>
-          </a:p>
-        </p:txBody>
-      </p:sp>
-      <p:sp>
-        <p:nvSpPr>
-          <p:cNvPr id="8" name="Rectangle 7"/>
+              <a:t>Votre Posture Vocale — Ce que le Donateur Perçoit en 3 Secondes</a:t>
+            </a:r>
+          </a:p>
+        </p:txBody>
+      </p:sp>
+      <p:pic>
+        <p:nvPicPr>
+          <p:cNvPr id="8" name="Picture 7" descr="shy_logo_v2.png"/>
+          <p:cNvPicPr>
+            <a:picLocks noChangeAspect="1"/>
+          </p:cNvPicPr>
+          <p:nvPr/>
+        </p:nvPicPr>
+        <p:blipFill>
+          <a:blip r:embed="rId2"/>
+          <a:stretch>
+            <a:fillRect/>
+          </a:stretch>
+        </p:blipFill>
+        <p:spPr>
+          <a:xfrm>
+            <a:off x="11247120" y="0"/>
+            <a:ext cx="822960" cy="676656"/>
+          </a:xfrm>
+          <a:prstGeom prst="rect">
+            <a:avLst/>
+          </a:prstGeom>
+        </p:spPr>
+      </p:pic>
+      <p:sp>
+        <p:nvSpPr>
+          <p:cNvPr id="9" name="Rectangle 8"/>
           <p:cNvSpPr/>
           <p:nvPr/>
         </p:nvSpPr>
@@ -6851,7 +7130,7 @@
       </p:sp>
       <p:sp>
         <p:nvSpPr>
-          <p:cNvPr id="9" name="TextBox 8"/>
+          <p:cNvPr id="10" name="TextBox 9"/>
           <p:cNvSpPr txBox="1"/>
           <p:nvPr/>
         </p:nvSpPr>
@@ -6873,26 +7152,26 @@
           <a:p>
             <a:pPr algn="ctr"/>
             <a:r>
-              <a:rPr sz="900" b="0" i="0">
+              <a:rPr sz="800" b="0" i="0">
                 <a:solidFill>
                   <a:srgbClr val="FFFFFF"/>
                 </a:solidFill>
               </a:rPr>
-              <a:t>SHY-Performance  ·  Formation FIM  ·  V6-01062026SHY-TE</a:t>
-            </a:r>
-          </a:p>
-        </p:txBody>
-      </p:sp>
-      <p:sp>
-        <p:nvSpPr>
-          <p:cNvPr id="10" name="Rectangle 9"/>
+              <a:t>SHY-Performance  ·  Formation FIM  ·  UNICEF France  ·  V6-01062026SHY-TE</a:t>
+            </a:r>
+          </a:p>
+        </p:txBody>
+      </p:sp>
+      <p:sp>
+        <p:nvSpPr>
+          <p:cNvPr id="11" name="Rectangle 10"/>
           <p:cNvSpPr/>
           <p:nvPr/>
         </p:nvSpPr>
         <p:spPr>
           <a:xfrm>
-            <a:off x="274320" y="822960"/>
-            <a:ext cx="5669280" cy="329184"/>
+            <a:off x="274320" y="804672"/>
+            <a:ext cx="5650992" cy="329184"/>
           </a:xfrm>
           <a:prstGeom prst="rect">
             <a:avLst/>
@@ -6928,14 +7207,14 @@
       </p:sp>
       <p:sp>
         <p:nvSpPr>
-          <p:cNvPr id="11" name="TextBox 10"/>
+          <p:cNvPr id="12" name="TextBox 11"/>
           <p:cNvSpPr txBox="1"/>
           <p:nvPr/>
         </p:nvSpPr>
         <p:spPr>
           <a:xfrm>
-            <a:off x="384048" y="868680"/>
-            <a:ext cx="5486400" cy="256032"/>
+            <a:off x="384048" y="850392"/>
+            <a:ext cx="5468112" cy="256032"/>
           </a:xfrm>
           <a:prstGeom prst="rect">
             <a:avLst/>
@@ -6950,35 +7229,37 @@
           <a:p>
             <a:pPr algn="l"/>
             <a:r>
-              <a:rPr sz="1100" b="1" i="0">
+              <a:rPr sz="1000" b="1" i="0">
                 <a:solidFill>
                   <a:srgbClr val="FFFFFF"/>
                 </a:solidFill>
               </a:rPr>
-              <a:t>Ce qui fait une accroche réussie</a:t>
-            </a:r>
-          </a:p>
-        </p:txBody>
-      </p:sp>
-      <p:sp>
-        <p:nvSpPr>
-          <p:cNvPr id="12" name="Rectangle 11"/>
+              <a:t>Ce qui crée la confiance dès l'accroche</a:t>
+            </a:r>
+          </a:p>
+        </p:txBody>
+      </p:sp>
+      <p:sp>
+        <p:nvSpPr>
+          <p:cNvPr id="13" name="Rectangle 12"/>
           <p:cNvSpPr/>
           <p:nvPr/>
         </p:nvSpPr>
         <p:spPr>
           <a:xfrm>
-            <a:off x="6355080" y="822960"/>
-            <a:ext cx="5669280" cy="329184"/>
+            <a:off x="274320" y="1152144"/>
+            <a:ext cx="5650992" cy="402336"/>
           </a:xfrm>
           <a:prstGeom prst="rect">
             <a:avLst/>
           </a:prstGeom>
           <a:solidFill>
-            <a:srgbClr val="008080"/>
+            <a:srgbClr val="FFFFFF"/>
           </a:solidFill>
-          <a:ln>
-            <a:noFill/>
+          <a:ln w="5080">
+            <a:solidFill>
+              <a:srgbClr val="008080"/>
+            </a:solidFill>
           </a:ln>
         </p:spPr>
         <p:style>
@@ -7005,14 +7286,14 @@
       </p:sp>
       <p:sp>
         <p:nvSpPr>
-          <p:cNvPr id="13" name="TextBox 12"/>
+          <p:cNvPr id="14" name="TextBox 13"/>
           <p:cNvSpPr txBox="1"/>
           <p:nvPr/>
         </p:nvSpPr>
         <p:spPr>
           <a:xfrm>
-            <a:off x="6464808" y="868680"/>
-            <a:ext cx="5486400" cy="256032"/>
+            <a:off x="402336" y="1207008"/>
+            <a:ext cx="5431536" cy="310896"/>
           </a:xfrm>
           <a:prstGeom prst="rect">
             <a:avLst/>
@@ -7027,26 +7308,26 @@
           <a:p>
             <a:pPr algn="l"/>
             <a:r>
-              <a:rPr sz="1100" b="1" i="0">
-                <a:solidFill>
-                  <a:srgbClr val="FFFFFF"/>
+              <a:rPr sz="1000" b="0" i="0">
+                <a:solidFill>
+                  <a:srgbClr val="1A1A1A"/>
                 </a:solidFill>
               </a:rPr>
-              <a:t>Ce qui fait fuir le donateur</a:t>
-            </a:r>
-          </a:p>
-        </p:txBody>
-      </p:sp>
-      <p:sp>
-        <p:nvSpPr>
-          <p:cNvPr id="14" name="Rectangle 13"/>
+              <a:t>• Sourire audible dès le mot 'Bonjour' — le prospect l'entend vraiment</a:t>
+            </a:r>
+          </a:p>
+        </p:txBody>
+      </p:sp>
+      <p:sp>
+        <p:nvSpPr>
+          <p:cNvPr id="15" name="Rectangle 14"/>
           <p:cNvSpPr/>
           <p:nvPr/>
         </p:nvSpPr>
         <p:spPr>
           <a:xfrm>
-            <a:off x="274320" y="1207008"/>
-            <a:ext cx="5669280" cy="402336"/>
+            <a:off x="274320" y="1572768"/>
+            <a:ext cx="5650992" cy="402336"/>
           </a:xfrm>
           <a:prstGeom prst="rect">
             <a:avLst/>
@@ -7084,14 +7365,14 @@
       </p:sp>
       <p:sp>
         <p:nvSpPr>
-          <p:cNvPr id="15" name="TextBox 14"/>
+          <p:cNvPr id="16" name="TextBox 15"/>
           <p:cNvSpPr txBox="1"/>
           <p:nvPr/>
         </p:nvSpPr>
         <p:spPr>
           <a:xfrm>
-            <a:off x="402336" y="1261872"/>
-            <a:ext cx="5440680" cy="329184"/>
+            <a:off x="402336" y="1627632"/>
+            <a:ext cx="5431536" cy="310896"/>
           </a:xfrm>
           <a:prstGeom prst="rect">
             <a:avLst/>
@@ -7111,21 +7392,100 @@
                   <a:srgbClr val="1A1A1A"/>
                 </a:solidFill>
               </a:rPr>
-              <a:t>• Contact visuel direct et souriant — avant de parler</a:t>
-            </a:r>
-          </a:p>
-        </p:txBody>
-      </p:sp>
-      <p:sp>
-        <p:nvSpPr>
-          <p:cNvPr id="16" name="Rectangle 15"/>
+              <a:t>• Ton chaleureux et naturel — ni trop commercial, ni trop distant</a:t>
+            </a:r>
+          </a:p>
+        </p:txBody>
+      </p:sp>
+      <p:sp>
+        <p:nvSpPr>
+          <p:cNvPr id="17" name="Rectangle 16"/>
           <p:cNvSpPr/>
           <p:nvPr/>
         </p:nvSpPr>
         <p:spPr>
           <a:xfrm>
-            <a:off x="274320" y="1627632"/>
-            <a:ext cx="5669280" cy="402336"/>
+            <a:off x="274320" y="1993392"/>
+            <a:ext cx="5650992" cy="402336"/>
+          </a:xfrm>
+          <a:prstGeom prst="rect">
+            <a:avLst/>
+          </a:prstGeom>
+          <a:solidFill>
+            <a:srgbClr val="FFFFFF"/>
+          </a:solidFill>
+          <a:ln w="5080">
+            <a:solidFill>
+              <a:srgbClr val="008080"/>
+            </a:solidFill>
+          </a:ln>
+        </p:spPr>
+        <p:style>
+          <a:lnRef idx="1">
+            <a:schemeClr val="accent1"/>
+          </a:lnRef>
+          <a:fillRef idx="3">
+            <a:schemeClr val="accent1"/>
+          </a:fillRef>
+          <a:effectRef idx="2">
+            <a:schemeClr val="accent1"/>
+          </a:effectRef>
+          <a:fontRef idx="minor">
+            <a:schemeClr val="lt1"/>
+          </a:fontRef>
+        </p:style>
+        <p:txBody>
+          <a:bodyPr rtlCol="0" anchor="ctr"/>
+          <a:lstStyle/>
+          <a:p>
+            <a:pPr algn="ctr"/>
+          </a:p>
+        </p:txBody>
+      </p:sp>
+      <p:sp>
+        <p:nvSpPr>
+          <p:cNvPr id="18" name="TextBox 17"/>
+          <p:cNvSpPr txBox="1"/>
+          <p:nvPr/>
+        </p:nvSpPr>
+        <p:spPr>
+          <a:xfrm>
+            <a:off x="402336" y="2048256"/>
+            <a:ext cx="5431536" cy="310896"/>
+          </a:xfrm>
+          <a:prstGeom prst="rect">
+            <a:avLst/>
+          </a:prstGeom>
+          <a:noFill/>
+        </p:spPr>
+        <p:txBody>
+          <a:bodyPr wrap="square">
+            <a:spAutoFit/>
+          </a:bodyPr>
+          <a:lstStyle/>
+          <a:p>
+            <a:pPr algn="l"/>
+            <a:r>
+              <a:rPr sz="1000" b="0" i="0">
+                <a:solidFill>
+                  <a:srgbClr val="1A1A1A"/>
+                </a:solidFill>
+              </a:rPr>
+              <a:t>• Débit posé : 130–150 mots/minute — pas de précipitation</a:t>
+            </a:r>
+          </a:p>
+        </p:txBody>
+      </p:sp>
+      <p:sp>
+        <p:nvSpPr>
+          <p:cNvPr id="19" name="Rectangle 18"/>
+          <p:cNvSpPr/>
+          <p:nvPr/>
+        </p:nvSpPr>
+        <p:spPr>
+          <a:xfrm>
+            <a:off x="274320" y="2414016"/>
+            <a:ext cx="5650992" cy="402336"/>
           </a:xfrm>
           <a:prstGeom prst="rect">
             <a:avLst/>
@@ -7163,14 +7523,14 @@
       </p:sp>
       <p:sp>
         <p:nvSpPr>
-          <p:cNvPr id="17" name="TextBox 16"/>
+          <p:cNvPr id="20" name="TextBox 19"/>
           <p:cNvSpPr txBox="1"/>
           <p:nvPr/>
         </p:nvSpPr>
         <p:spPr>
           <a:xfrm>
-            <a:off x="402336" y="1682496"/>
-            <a:ext cx="5440680" cy="329184"/>
+            <a:off x="402336" y="2468880"/>
+            <a:ext cx="5431536" cy="310896"/>
           </a:xfrm>
           <a:prstGeom prst="rect">
             <a:avLst/>
@@ -7190,21 +7550,256 @@
                   <a:srgbClr val="1A1A1A"/>
                 </a:solidFill>
               </a:rPr>
-              <a:t>• Corps ouvert, pieds parallèles, bras détendus</a:t>
-            </a:r>
-          </a:p>
-        </p:txBody>
-      </p:sp>
-      <p:sp>
-        <p:nvSpPr>
-          <p:cNvPr id="18" name="Rectangle 17"/>
+              <a:t>• Articulation claire — chaque mot compte au téléphone</a:t>
+            </a:r>
+          </a:p>
+        </p:txBody>
+      </p:sp>
+      <p:sp>
+        <p:nvSpPr>
+          <p:cNvPr id="21" name="Rectangle 20"/>
           <p:cNvSpPr/>
           <p:nvPr/>
         </p:nvSpPr>
         <p:spPr>
           <a:xfrm>
-            <a:off x="274320" y="2048256"/>
-            <a:ext cx="5669280" cy="402336"/>
+            <a:off x="274320" y="2834640"/>
+            <a:ext cx="5650992" cy="402336"/>
+          </a:xfrm>
+          <a:prstGeom prst="rect">
+            <a:avLst/>
+          </a:prstGeom>
+          <a:solidFill>
+            <a:srgbClr val="FFFFFF"/>
+          </a:solidFill>
+          <a:ln w="5080">
+            <a:solidFill>
+              <a:srgbClr val="008080"/>
+            </a:solidFill>
+          </a:ln>
+        </p:spPr>
+        <p:style>
+          <a:lnRef idx="1">
+            <a:schemeClr val="accent1"/>
+          </a:lnRef>
+          <a:fillRef idx="3">
+            <a:schemeClr val="accent1"/>
+          </a:fillRef>
+          <a:effectRef idx="2">
+            <a:schemeClr val="accent1"/>
+          </a:effectRef>
+          <a:fontRef idx="minor">
+            <a:schemeClr val="lt1"/>
+          </a:fontRef>
+        </p:style>
+        <p:txBody>
+          <a:bodyPr rtlCol="0" anchor="ctr"/>
+          <a:lstStyle/>
+          <a:p>
+            <a:pPr algn="ctr"/>
+          </a:p>
+        </p:txBody>
+      </p:sp>
+      <p:sp>
+        <p:nvSpPr>
+          <p:cNvPr id="22" name="TextBox 21"/>
+          <p:cNvSpPr txBox="1"/>
+          <p:nvPr/>
+        </p:nvSpPr>
+        <p:spPr>
+          <a:xfrm>
+            <a:off x="402336" y="2889504"/>
+            <a:ext cx="5431536" cy="310896"/>
+          </a:xfrm>
+          <a:prstGeom prst="rect">
+            <a:avLst/>
+          </a:prstGeom>
+          <a:noFill/>
+        </p:spPr>
+        <p:txBody>
+          <a:bodyPr wrap="square">
+            <a:spAutoFit/>
+          </a:bodyPr>
+          <a:lstStyle/>
+          <a:p>
+            <a:pPr algn="l"/>
+            <a:r>
+              <a:rPr sz="1000" b="0" i="0">
+                <a:solidFill>
+                  <a:srgbClr val="1A1A1A"/>
+                </a:solidFill>
+              </a:rPr>
+              <a:t>• Conviction sincère — vous croyez en la mission UNICEF</a:t>
+            </a:r>
+          </a:p>
+        </p:txBody>
+      </p:sp>
+      <p:sp>
+        <p:nvSpPr>
+          <p:cNvPr id="23" name="Rectangle 22"/>
+          <p:cNvSpPr/>
+          <p:nvPr/>
+        </p:nvSpPr>
+        <p:spPr>
+          <a:xfrm>
+            <a:off x="6245352" y="804672"/>
+            <a:ext cx="5650992" cy="329184"/>
+          </a:xfrm>
+          <a:prstGeom prst="rect">
+            <a:avLst/>
+          </a:prstGeom>
+          <a:solidFill>
+            <a:srgbClr val="008080"/>
+          </a:solidFill>
+          <a:ln>
+            <a:noFill/>
+          </a:ln>
+        </p:spPr>
+        <p:style>
+          <a:lnRef idx="1">
+            <a:schemeClr val="accent1"/>
+          </a:lnRef>
+          <a:fillRef idx="3">
+            <a:schemeClr val="accent1"/>
+          </a:fillRef>
+          <a:effectRef idx="2">
+            <a:schemeClr val="accent1"/>
+          </a:effectRef>
+          <a:fontRef idx="minor">
+            <a:schemeClr val="lt1"/>
+          </a:fontRef>
+        </p:style>
+        <p:txBody>
+          <a:bodyPr rtlCol="0" anchor="ctr"/>
+          <a:lstStyle/>
+          <a:p>
+            <a:pPr algn="ctr"/>
+          </a:p>
+        </p:txBody>
+      </p:sp>
+      <p:sp>
+        <p:nvSpPr>
+          <p:cNvPr id="24" name="TextBox 23"/>
+          <p:cNvSpPr txBox="1"/>
+          <p:nvPr/>
+        </p:nvSpPr>
+        <p:spPr>
+          <a:xfrm>
+            <a:off x="6355080" y="850392"/>
+            <a:ext cx="5468112" cy="256032"/>
+          </a:xfrm>
+          <a:prstGeom prst="rect">
+            <a:avLst/>
+          </a:prstGeom>
+          <a:noFill/>
+        </p:spPr>
+        <p:txBody>
+          <a:bodyPr wrap="square">
+            <a:spAutoFit/>
+          </a:bodyPr>
+          <a:lstStyle/>
+          <a:p>
+            <a:pPr algn="l"/>
+            <a:r>
+              <a:rPr sz="1000" b="1" i="0">
+                <a:solidFill>
+                  <a:srgbClr val="FFFFFF"/>
+                </a:solidFill>
+              </a:rPr>
+              <a:t>Ce qui fait raccrocher le donateur</a:t>
+            </a:r>
+          </a:p>
+        </p:txBody>
+      </p:sp>
+      <p:sp>
+        <p:nvSpPr>
+          <p:cNvPr id="25" name="Rectangle 24"/>
+          <p:cNvSpPr/>
+          <p:nvPr/>
+        </p:nvSpPr>
+        <p:spPr>
+          <a:xfrm>
+            <a:off x="6245352" y="1152144"/>
+            <a:ext cx="5650992" cy="402336"/>
+          </a:xfrm>
+          <a:prstGeom prst="rect">
+            <a:avLst/>
+          </a:prstGeom>
+          <a:solidFill>
+            <a:srgbClr val="FFFFFF"/>
+          </a:solidFill>
+          <a:ln w="5080">
+            <a:solidFill>
+              <a:srgbClr val="008080"/>
+            </a:solidFill>
+          </a:ln>
+        </p:spPr>
+        <p:style>
+          <a:lnRef idx="1">
+            <a:schemeClr val="accent1"/>
+          </a:lnRef>
+          <a:fillRef idx="3">
+            <a:schemeClr val="accent1"/>
+          </a:fillRef>
+          <a:effectRef idx="2">
+            <a:schemeClr val="accent1"/>
+          </a:effectRef>
+          <a:fontRef idx="minor">
+            <a:schemeClr val="lt1"/>
+          </a:fontRef>
+        </p:style>
+        <p:txBody>
+          <a:bodyPr rtlCol="0" anchor="ctr"/>
+          <a:lstStyle/>
+          <a:p>
+            <a:pPr algn="ctr"/>
+          </a:p>
+        </p:txBody>
+      </p:sp>
+      <p:sp>
+        <p:nvSpPr>
+          <p:cNvPr id="26" name="TextBox 25"/>
+          <p:cNvSpPr txBox="1"/>
+          <p:nvPr/>
+        </p:nvSpPr>
+        <p:spPr>
+          <a:xfrm>
+            <a:off x="6373368" y="1207008"/>
+            <a:ext cx="5431536" cy="310896"/>
+          </a:xfrm>
+          <a:prstGeom prst="rect">
+            <a:avLst/>
+          </a:prstGeom>
+          <a:noFill/>
+        </p:spPr>
+        <p:txBody>
+          <a:bodyPr wrap="square">
+            <a:spAutoFit/>
+          </a:bodyPr>
+          <a:lstStyle/>
+          <a:p>
+            <a:pPr algn="l"/>
+            <a:r>
+              <a:rPr sz="1000" b="0" i="0">
+                <a:solidFill>
+                  <a:srgbClr val="1A1A1A"/>
+                </a:solidFill>
+              </a:rPr>
+              <a:t>• Voix monocorde ou mécanique — lecture évidente du script</a:t>
+            </a:r>
+          </a:p>
+        </p:txBody>
+      </p:sp>
+      <p:sp>
+        <p:nvSpPr>
+          <p:cNvPr id="27" name="Rectangle 26"/>
+          <p:cNvSpPr/>
+          <p:nvPr/>
+        </p:nvSpPr>
+        <p:spPr>
+          <a:xfrm>
+            <a:off x="6245352" y="1572768"/>
+            <a:ext cx="5650992" cy="402336"/>
           </a:xfrm>
           <a:prstGeom prst="rect">
             <a:avLst/>
@@ -7242,14 +7837,14 @@
       </p:sp>
       <p:sp>
         <p:nvSpPr>
-          <p:cNvPr id="19" name="TextBox 18"/>
+          <p:cNvPr id="28" name="TextBox 27"/>
           <p:cNvSpPr txBox="1"/>
           <p:nvPr/>
         </p:nvSpPr>
         <p:spPr>
           <a:xfrm>
-            <a:off x="402336" y="2103120"/>
-            <a:ext cx="5440680" cy="329184"/>
+            <a:off x="6373368" y="1627632"/>
+            <a:ext cx="5431536" cy="310896"/>
           </a:xfrm>
           <a:prstGeom prst="rect">
             <a:avLst/>
@@ -7269,21 +7864,100 @@
                   <a:srgbClr val="1A1A1A"/>
                 </a:solidFill>
               </a:rPr>
-              <a:t>• Ton de voix chaleureux et assuré — ni trop fort, ni trop doux</a:t>
-            </a:r>
-          </a:p>
-        </p:txBody>
-      </p:sp>
-      <p:sp>
-        <p:nvSpPr>
-          <p:cNvPr id="20" name="Rectangle 19"/>
+              <a:t>• Débit trop rapide — le prospect décroche mentalement</a:t>
+            </a:r>
+          </a:p>
+        </p:txBody>
+      </p:sp>
+      <p:sp>
+        <p:nvSpPr>
+          <p:cNvPr id="29" name="Rectangle 28"/>
           <p:cNvSpPr/>
           <p:nvPr/>
         </p:nvSpPr>
         <p:spPr>
           <a:xfrm>
-            <a:off x="274320" y="2468880"/>
-            <a:ext cx="5669280" cy="402336"/>
+            <a:off x="6245352" y="1993392"/>
+            <a:ext cx="5650992" cy="402336"/>
+          </a:xfrm>
+          <a:prstGeom prst="rect">
+            <a:avLst/>
+          </a:prstGeom>
+          <a:solidFill>
+            <a:srgbClr val="FFFFFF"/>
+          </a:solidFill>
+          <a:ln w="5080">
+            <a:solidFill>
+              <a:srgbClr val="008080"/>
+            </a:solidFill>
+          </a:ln>
+        </p:spPr>
+        <p:style>
+          <a:lnRef idx="1">
+            <a:schemeClr val="accent1"/>
+          </a:lnRef>
+          <a:fillRef idx="3">
+            <a:schemeClr val="accent1"/>
+          </a:fillRef>
+          <a:effectRef idx="2">
+            <a:schemeClr val="accent1"/>
+          </a:effectRef>
+          <a:fontRef idx="minor">
+            <a:schemeClr val="lt1"/>
+          </a:fontRef>
+        </p:style>
+        <p:txBody>
+          <a:bodyPr rtlCol="0" anchor="ctr"/>
+          <a:lstStyle/>
+          <a:p>
+            <a:pPr algn="ctr"/>
+          </a:p>
+        </p:txBody>
+      </p:sp>
+      <p:sp>
+        <p:nvSpPr>
+          <p:cNvPr id="30" name="TextBox 29"/>
+          <p:cNvSpPr txBox="1"/>
+          <p:nvPr/>
+        </p:nvSpPr>
+        <p:spPr>
+          <a:xfrm>
+            <a:off x="6373368" y="2048256"/>
+            <a:ext cx="5431536" cy="310896"/>
+          </a:xfrm>
+          <a:prstGeom prst="rect">
+            <a:avLst/>
+          </a:prstGeom>
+          <a:noFill/>
+        </p:spPr>
+        <p:txBody>
+          <a:bodyPr wrap="square">
+            <a:spAutoFit/>
+          </a:bodyPr>
+          <a:lstStyle/>
+          <a:p>
+            <a:pPr algn="l"/>
+            <a:r>
+              <a:rPr sz="1000" b="0" i="0">
+                <a:solidFill>
+                  <a:srgbClr val="1A1A1A"/>
+                </a:solidFill>
+              </a:rPr>
+              <a:t>• Hésitations répétées : 'euh…', 'donc…', 'voilà…'</a:t>
+            </a:r>
+          </a:p>
+        </p:txBody>
+      </p:sp>
+      <p:sp>
+        <p:nvSpPr>
+          <p:cNvPr id="31" name="Rectangle 30"/>
+          <p:cNvSpPr/>
+          <p:nvPr/>
+        </p:nvSpPr>
+        <p:spPr>
+          <a:xfrm>
+            <a:off x="6245352" y="2414016"/>
+            <a:ext cx="5650992" cy="402336"/>
           </a:xfrm>
           <a:prstGeom prst="rect">
             <a:avLst/>
@@ -7321,14 +7995,14 @@
       </p:sp>
       <p:sp>
         <p:nvSpPr>
-          <p:cNvPr id="21" name="TextBox 20"/>
+          <p:cNvPr id="32" name="TextBox 31"/>
           <p:cNvSpPr txBox="1"/>
           <p:nvPr/>
         </p:nvSpPr>
         <p:spPr>
           <a:xfrm>
-            <a:off x="402336" y="2523744"/>
-            <a:ext cx="5440680" cy="329184"/>
+            <a:off x="6373368" y="2468880"/>
+            <a:ext cx="5431536" cy="310896"/>
           </a:xfrm>
           <a:prstGeom prst="rect">
             <a:avLst/>
@@ -7348,27 +8022,27 @@
                   <a:srgbClr val="1A1A1A"/>
                 </a:solidFill>
               </a:rPr>
-              <a:t>• Question ouverte qui invite à s'arrêter</a:t>
-            </a:r>
-          </a:p>
-        </p:txBody>
-      </p:sp>
-      <p:sp>
-        <p:nvSpPr>
-          <p:cNvPr id="22" name="Rectangle 21"/>
+              <a:t>• Ton défensif face aux premières objections</a:t>
+            </a:r>
+          </a:p>
+        </p:txBody>
+      </p:sp>
+      <p:sp>
+        <p:nvSpPr>
+          <p:cNvPr id="33" name="Rectangle 32"/>
           <p:cNvSpPr/>
           <p:nvPr/>
         </p:nvSpPr>
         <p:spPr>
           <a:xfrm>
-            <a:off x="274320" y="2889504"/>
-            <a:ext cx="5669280" cy="402336"/>
+            <a:off x="6245352" y="2834640"/>
+            <a:ext cx="5650992" cy="402336"/>
           </a:xfrm>
           <a:prstGeom prst="rect">
             <a:avLst/>
           </a:prstGeom>
           <a:solidFill>
-            <a:srgbClr val="F0F7F7"/>
+            <a:srgbClr val="FFFFFF"/>
           </a:solidFill>
           <a:ln w="5080">
             <a:solidFill>
@@ -7400,14 +8074,14 @@
       </p:sp>
       <p:sp>
         <p:nvSpPr>
-          <p:cNvPr id="23" name="TextBox 22"/>
+          <p:cNvPr id="34" name="TextBox 33"/>
           <p:cNvSpPr txBox="1"/>
           <p:nvPr/>
         </p:nvSpPr>
         <p:spPr>
           <a:xfrm>
-            <a:off x="402336" y="2944368"/>
-            <a:ext cx="5440680" cy="329184"/>
+            <a:off x="6373368" y="2889504"/>
+            <a:ext cx="5431536" cy="310896"/>
           </a:xfrm>
           <a:prstGeom prst="rect">
             <a:avLst/>
@@ -7427,415 +8101,20 @@
                   <a:srgbClr val="1A1A1A"/>
                 </a:solidFill>
               </a:rPr>
-              <a:t>• Énergie positive constante — même après le 10ème refus</a:t>
-            </a:r>
-          </a:p>
-        </p:txBody>
-      </p:sp>
-      <p:sp>
-        <p:nvSpPr>
-          <p:cNvPr id="24" name="Rectangle 23"/>
+              <a:t>• Manque d'énergie — s'entend même à travers le téléphone</a:t>
+            </a:r>
+          </a:p>
+        </p:txBody>
+      </p:sp>
+      <p:sp>
+        <p:nvSpPr>
+          <p:cNvPr id="35" name="Rectangle 34"/>
           <p:cNvSpPr/>
           <p:nvPr/>
         </p:nvSpPr>
         <p:spPr>
           <a:xfrm>
-            <a:off x="6355080" y="1207008"/>
-            <a:ext cx="5669280" cy="402336"/>
-          </a:xfrm>
-          <a:prstGeom prst="rect">
-            <a:avLst/>
-          </a:prstGeom>
-          <a:solidFill>
-            <a:srgbClr val="F0F7F7"/>
-          </a:solidFill>
-          <a:ln w="5080">
-            <a:solidFill>
-              <a:srgbClr val="008080"/>
-            </a:solidFill>
-          </a:ln>
-        </p:spPr>
-        <p:style>
-          <a:lnRef idx="1">
-            <a:schemeClr val="accent1"/>
-          </a:lnRef>
-          <a:fillRef idx="3">
-            <a:schemeClr val="accent1"/>
-          </a:fillRef>
-          <a:effectRef idx="2">
-            <a:schemeClr val="accent1"/>
-          </a:effectRef>
-          <a:fontRef idx="minor">
-            <a:schemeClr val="lt1"/>
-          </a:fontRef>
-        </p:style>
-        <p:txBody>
-          <a:bodyPr rtlCol="0" anchor="ctr"/>
-          <a:lstStyle/>
-          <a:p>
-            <a:pPr algn="ctr"/>
-          </a:p>
-        </p:txBody>
-      </p:sp>
-      <p:sp>
-        <p:nvSpPr>
-          <p:cNvPr id="25" name="TextBox 24"/>
-          <p:cNvSpPr txBox="1"/>
-          <p:nvPr/>
-        </p:nvSpPr>
-        <p:spPr>
-          <a:xfrm>
-            <a:off x="6483096" y="1261872"/>
-            <a:ext cx="5440680" cy="329184"/>
-          </a:xfrm>
-          <a:prstGeom prst="rect">
-            <a:avLst/>
-          </a:prstGeom>
-          <a:noFill/>
-        </p:spPr>
-        <p:txBody>
-          <a:bodyPr wrap="square">
-            <a:spAutoFit/>
-          </a:bodyPr>
-          <a:lstStyle/>
-          <a:p>
-            <a:pPr algn="l"/>
-            <a:r>
-              <a:rPr sz="1000" b="0" i="0">
-                <a:solidFill>
-                  <a:srgbClr val="1A1A1A"/>
-                </a:solidFill>
-              </a:rPr>
-              <a:t>• Regard fuyant ou insistant</a:t>
-            </a:r>
-          </a:p>
-        </p:txBody>
-      </p:sp>
-      <p:sp>
-        <p:nvSpPr>
-          <p:cNvPr id="26" name="Rectangle 25"/>
-          <p:cNvSpPr/>
-          <p:nvPr/>
-        </p:nvSpPr>
-        <p:spPr>
-          <a:xfrm>
-            <a:off x="6355080" y="1627632"/>
-            <a:ext cx="5669280" cy="402336"/>
-          </a:xfrm>
-          <a:prstGeom prst="rect">
-            <a:avLst/>
-          </a:prstGeom>
-          <a:solidFill>
-            <a:srgbClr val="F0F7F7"/>
-          </a:solidFill>
-          <a:ln w="5080">
-            <a:solidFill>
-              <a:srgbClr val="008080"/>
-            </a:solidFill>
-          </a:ln>
-        </p:spPr>
-        <p:style>
-          <a:lnRef idx="1">
-            <a:schemeClr val="accent1"/>
-          </a:lnRef>
-          <a:fillRef idx="3">
-            <a:schemeClr val="accent1"/>
-          </a:fillRef>
-          <a:effectRef idx="2">
-            <a:schemeClr val="accent1"/>
-          </a:effectRef>
-          <a:fontRef idx="minor">
-            <a:schemeClr val="lt1"/>
-          </a:fontRef>
-        </p:style>
-        <p:txBody>
-          <a:bodyPr rtlCol="0" anchor="ctr"/>
-          <a:lstStyle/>
-          <a:p>
-            <a:pPr algn="ctr"/>
-          </a:p>
-        </p:txBody>
-      </p:sp>
-      <p:sp>
-        <p:nvSpPr>
-          <p:cNvPr id="27" name="TextBox 26"/>
-          <p:cNvSpPr txBox="1"/>
-          <p:nvPr/>
-        </p:nvSpPr>
-        <p:spPr>
-          <a:xfrm>
-            <a:off x="6483096" y="1682496"/>
-            <a:ext cx="5440680" cy="329184"/>
-          </a:xfrm>
-          <a:prstGeom prst="rect">
-            <a:avLst/>
-          </a:prstGeom>
-          <a:noFill/>
-        </p:spPr>
-        <p:txBody>
-          <a:bodyPr wrap="square">
-            <a:spAutoFit/>
-          </a:bodyPr>
-          <a:lstStyle/>
-          <a:p>
-            <a:pPr algn="l"/>
-            <a:r>
-              <a:rPr sz="1000" b="0" i="0">
-                <a:solidFill>
-                  <a:srgbClr val="1A1A1A"/>
-                </a:solidFill>
-              </a:rPr>
-              <a:t>• Corps en tension, bras croisés ou agités</a:t>
-            </a:r>
-          </a:p>
-        </p:txBody>
-      </p:sp>
-      <p:sp>
-        <p:nvSpPr>
-          <p:cNvPr id="28" name="Rectangle 27"/>
-          <p:cNvSpPr/>
-          <p:nvPr/>
-        </p:nvSpPr>
-        <p:spPr>
-          <a:xfrm>
-            <a:off x="6355080" y="2048256"/>
-            <a:ext cx="5669280" cy="402336"/>
-          </a:xfrm>
-          <a:prstGeom prst="rect">
-            <a:avLst/>
-          </a:prstGeom>
-          <a:solidFill>
-            <a:srgbClr val="F0F7F7"/>
-          </a:solidFill>
-          <a:ln w="5080">
-            <a:solidFill>
-              <a:srgbClr val="008080"/>
-            </a:solidFill>
-          </a:ln>
-        </p:spPr>
-        <p:style>
-          <a:lnRef idx="1">
-            <a:schemeClr val="accent1"/>
-          </a:lnRef>
-          <a:fillRef idx="3">
-            <a:schemeClr val="accent1"/>
-          </a:fillRef>
-          <a:effectRef idx="2">
-            <a:schemeClr val="accent1"/>
-          </a:effectRef>
-          <a:fontRef idx="minor">
-            <a:schemeClr val="lt1"/>
-          </a:fontRef>
-        </p:style>
-        <p:txBody>
-          <a:bodyPr rtlCol="0" anchor="ctr"/>
-          <a:lstStyle/>
-          <a:p>
-            <a:pPr algn="ctr"/>
-          </a:p>
-        </p:txBody>
-      </p:sp>
-      <p:sp>
-        <p:nvSpPr>
-          <p:cNvPr id="29" name="TextBox 28"/>
-          <p:cNvSpPr txBox="1"/>
-          <p:nvPr/>
-        </p:nvSpPr>
-        <p:spPr>
-          <a:xfrm>
-            <a:off x="6483096" y="2103120"/>
-            <a:ext cx="5440680" cy="329184"/>
-          </a:xfrm>
-          <a:prstGeom prst="rect">
-            <a:avLst/>
-          </a:prstGeom>
-          <a:noFill/>
-        </p:spPr>
-        <p:txBody>
-          <a:bodyPr wrap="square">
-            <a:spAutoFit/>
-          </a:bodyPr>
-          <a:lstStyle/>
-          <a:p>
-            <a:pPr algn="l"/>
-            <a:r>
-              <a:rPr sz="1000" b="0" i="0">
-                <a:solidFill>
-                  <a:srgbClr val="1A1A1A"/>
-                </a:solidFill>
-              </a:rPr>
-              <a:t>• Formule d'excuse : 'Excusez-moi de vous déranger…'</a:t>
-            </a:r>
-          </a:p>
-        </p:txBody>
-      </p:sp>
-      <p:sp>
-        <p:nvSpPr>
-          <p:cNvPr id="30" name="Rectangle 29"/>
-          <p:cNvSpPr/>
-          <p:nvPr/>
-        </p:nvSpPr>
-        <p:spPr>
-          <a:xfrm>
-            <a:off x="6355080" y="2468880"/>
-            <a:ext cx="5669280" cy="402336"/>
-          </a:xfrm>
-          <a:prstGeom prst="rect">
-            <a:avLst/>
-          </a:prstGeom>
-          <a:solidFill>
-            <a:srgbClr val="F0F7F7"/>
-          </a:solidFill>
-          <a:ln w="5080">
-            <a:solidFill>
-              <a:srgbClr val="008080"/>
-            </a:solidFill>
-          </a:ln>
-        </p:spPr>
-        <p:style>
-          <a:lnRef idx="1">
-            <a:schemeClr val="accent1"/>
-          </a:lnRef>
-          <a:fillRef idx="3">
-            <a:schemeClr val="accent1"/>
-          </a:fillRef>
-          <a:effectRef idx="2">
-            <a:schemeClr val="accent1"/>
-          </a:effectRef>
-          <a:fontRef idx="minor">
-            <a:schemeClr val="lt1"/>
-          </a:fontRef>
-        </p:style>
-        <p:txBody>
-          <a:bodyPr rtlCol="0" anchor="ctr"/>
-          <a:lstStyle/>
-          <a:p>
-            <a:pPr algn="ctr"/>
-          </a:p>
-        </p:txBody>
-      </p:sp>
-      <p:sp>
-        <p:nvSpPr>
-          <p:cNvPr id="31" name="TextBox 30"/>
-          <p:cNvSpPr txBox="1"/>
-          <p:nvPr/>
-        </p:nvSpPr>
-        <p:spPr>
-          <a:xfrm>
-            <a:off x="6483096" y="2523744"/>
-            <a:ext cx="5440680" cy="329184"/>
-          </a:xfrm>
-          <a:prstGeom prst="rect">
-            <a:avLst/>
-          </a:prstGeom>
-          <a:noFill/>
-        </p:spPr>
-        <p:txBody>
-          <a:bodyPr wrap="square">
-            <a:spAutoFit/>
-          </a:bodyPr>
-          <a:lstStyle/>
-          <a:p>
-            <a:pPr algn="l"/>
-            <a:r>
-              <a:rPr sz="1000" b="0" i="0">
-                <a:solidFill>
-                  <a:srgbClr val="1A1A1A"/>
-                </a:solidFill>
-              </a:rPr>
-              <a:t>• Question fermée : 'Vous avez 2 minutes ?' (réponse attendue : Non)</a:t>
-            </a:r>
-          </a:p>
-        </p:txBody>
-      </p:sp>
-      <p:sp>
-        <p:nvSpPr>
-          <p:cNvPr id="32" name="Rectangle 31"/>
-          <p:cNvSpPr/>
-          <p:nvPr/>
-        </p:nvSpPr>
-        <p:spPr>
-          <a:xfrm>
-            <a:off x="6355080" y="2889504"/>
-            <a:ext cx="5669280" cy="402336"/>
-          </a:xfrm>
-          <a:prstGeom prst="rect">
-            <a:avLst/>
-          </a:prstGeom>
-          <a:solidFill>
-            <a:srgbClr val="F0F7F7"/>
-          </a:solidFill>
-          <a:ln w="5080">
-            <a:solidFill>
-              <a:srgbClr val="008080"/>
-            </a:solidFill>
-          </a:ln>
-        </p:spPr>
-        <p:style>
-          <a:lnRef idx="1">
-            <a:schemeClr val="accent1"/>
-          </a:lnRef>
-          <a:fillRef idx="3">
-            <a:schemeClr val="accent1"/>
-          </a:fillRef>
-          <a:effectRef idx="2">
-            <a:schemeClr val="accent1"/>
-          </a:effectRef>
-          <a:fontRef idx="minor">
-            <a:schemeClr val="lt1"/>
-          </a:fontRef>
-        </p:style>
-        <p:txBody>
-          <a:bodyPr rtlCol="0" anchor="ctr"/>
-          <a:lstStyle/>
-          <a:p>
-            <a:pPr algn="ctr"/>
-          </a:p>
-        </p:txBody>
-      </p:sp>
-      <p:sp>
-        <p:nvSpPr>
-          <p:cNvPr id="33" name="TextBox 32"/>
-          <p:cNvSpPr txBox="1"/>
-          <p:nvPr/>
-        </p:nvSpPr>
-        <p:spPr>
-          <a:xfrm>
-            <a:off x="6483096" y="2944368"/>
-            <a:ext cx="5440680" cy="329184"/>
-          </a:xfrm>
-          <a:prstGeom prst="rect">
-            <a:avLst/>
-          </a:prstGeom>
-          <a:noFill/>
-        </p:spPr>
-        <p:txBody>
-          <a:bodyPr wrap="square">
-            <a:spAutoFit/>
-          </a:bodyPr>
-          <a:lstStyle/>
-          <a:p>
-            <a:pPr algn="l"/>
-            <a:r>
-              <a:rPr sz="1000" b="0" i="0">
-                <a:solidFill>
-                  <a:srgbClr val="1A1A1A"/>
-                </a:solidFill>
-              </a:rPr>
-              <a:t>• Débuter par 'Je vais vous parler d'argent…'</a:t>
-            </a:r>
-          </a:p>
-        </p:txBody>
-      </p:sp>
-      <p:sp>
-        <p:nvSpPr>
-          <p:cNvPr id="34" name="Rectangle 33"/>
-          <p:cNvSpPr/>
-          <p:nvPr/>
-        </p:nvSpPr>
-        <p:spPr>
-          <a:xfrm>
-            <a:off x="274320" y="5486400"/>
+            <a:off x="274320" y="5504688"/>
             <a:ext cx="11640312" cy="402336"/>
           </a:xfrm>
           <a:prstGeom prst="rect">
@@ -7872,13 +8151,13 @@
       </p:sp>
       <p:sp>
         <p:nvSpPr>
-          <p:cNvPr id="35" name="TextBox 34"/>
+          <p:cNvPr id="36" name="TextBox 35"/>
           <p:cNvSpPr txBox="1"/>
           <p:nvPr/>
         </p:nvSpPr>
         <p:spPr>
           <a:xfrm>
-            <a:off x="411479" y="5559552"/>
+            <a:off x="411479" y="5577840"/>
             <a:ext cx="11365992" cy="256032"/>
           </a:xfrm>
           <a:prstGeom prst="rect">
@@ -7899,7 +8178,7 @@
                   <a:srgbClr val="FFFFFF"/>
                 </a:solidFill>
               </a:rPr>
-              <a:t>Exercice miroir : Entraînez-vous 2 minutes devant votre téléphone en mode selfie. Regardez votre propre accroche. Qu'est-ce que vous changeriez ?</a:t>
+              <a:t>Exercice : Lisez votre script à voix haute en souriant physiquement. Enregistrez-vous 60 secondes. Réécoutez. Qu'est-ce que vous changeriez ?</a:t>
             </a:r>
           </a:p>
         </p:txBody>

--- a/FIM_BookJ1_Fondations_Mission_V6-01062026SHY-TE.pptx
+++ b/FIM_BookJ1_Fondations_Mission_V6-01062026SHY-TE.pptx
@@ -3149,7 +3149,7 @@
             <a:avLst/>
           </a:prstGeom>
           <a:solidFill>
-            <a:srgbClr val="005555"/>
+            <a:srgbClr val="005050"/>
           </a:solidFill>
           <a:ln>
             <a:noFill/>
@@ -3229,7 +3229,7 @@
         <p:spPr>
           <a:xfrm>
             <a:off x="347472" y="91440"/>
-            <a:ext cx="3200400" cy="438912"/>
+            <a:ext cx="4572000" cy="402336"/>
           </a:xfrm>
           <a:prstGeom prst="rect">
             <a:avLst/>
@@ -3262,8 +3262,8 @@
         </p:nvSpPr>
         <p:spPr>
           <a:xfrm>
-            <a:off x="347472" y="530352"/>
-            <a:ext cx="7772400" cy="347472"/>
+            <a:off x="347472" y="493776"/>
+            <a:ext cx="8229600" cy="329184"/>
           </a:xfrm>
           <a:prstGeom prst="rect">
             <a:avLst/>
@@ -3296,8 +3296,8 @@
         </p:nvSpPr>
         <p:spPr>
           <a:xfrm>
-            <a:off x="347472" y="932688"/>
-            <a:ext cx="7772400" cy="292608"/>
+            <a:off x="347472" y="877824"/>
+            <a:ext cx="8229600" cy="274320"/>
           </a:xfrm>
           <a:prstGeom prst="rect">
             <a:avLst/>
@@ -3330,8 +3330,8 @@
         </p:nvSpPr>
         <p:spPr>
           <a:xfrm>
-            <a:off x="347472" y="1207008"/>
-            <a:ext cx="10515600" cy="914400"/>
+            <a:off x="347472" y="1188720"/>
+            <a:ext cx="10515600" cy="960120"/>
           </a:xfrm>
           <a:prstGeom prst="rect">
             <a:avLst/>
@@ -3346,7 +3346,7 @@
           <a:p>
             <a:pPr algn="l"/>
             <a:r>
-              <a:rPr sz="3000" b="1" i="0">
+              <a:rPr sz="2900" b="1" i="0">
                 <a:solidFill>
                   <a:srgbClr val="FFFFFF"/>
                 </a:solidFill>
@@ -3364,8 +3364,8 @@
         </p:nvSpPr>
         <p:spPr>
           <a:xfrm>
-            <a:off x="347472" y="1901952"/>
-            <a:ext cx="10515600" cy="402336"/>
+            <a:off x="347472" y="1920240"/>
+            <a:ext cx="10515600" cy="384048"/>
           </a:xfrm>
           <a:prstGeom prst="rect">
             <a:avLst/>
@@ -3406,8 +3406,8 @@
         </p:blipFill>
         <p:spPr>
           <a:xfrm>
-            <a:off x="11247120" y="45720"/>
-            <a:ext cx="822960" cy="804672"/>
+            <a:off x="11228832" y="0"/>
+            <a:ext cx="841248" cy="676656"/>
           </a:xfrm>
           <a:prstGeom prst="rect">
             <a:avLst/>
@@ -3429,7 +3429,7 @@
             <a:avLst/>
           </a:prstGeom>
           <a:solidFill>
-            <a:srgbClr val="005555"/>
+            <a:srgbClr val="005050"/>
           </a:solidFill>
           <a:ln>
             <a:noFill/>
@@ -3487,42 +3487,6 @@
                 </a:solidFill>
               </a:rPr>
               <a:t>SHY-Performance  ·  Formation FIM  ·  UNICEF France  ·  V6-01062026SHY-TE</a:t>
-            </a:r>
-          </a:p>
-        </p:txBody>
-      </p:sp>
-      <p:sp>
-        <p:nvSpPr>
-          <p:cNvPr id="13" name="TextBox 12"/>
-          <p:cNvSpPr txBox="1"/>
-          <p:nvPr/>
-        </p:nvSpPr>
-        <p:spPr>
-          <a:xfrm>
-            <a:off x="457200" y="2514600"/>
-            <a:ext cx="10789920" cy="1005840"/>
-          </a:xfrm>
-          <a:prstGeom prst="rect">
-            <a:avLst/>
-          </a:prstGeom>
-          <a:noFill/>
-        </p:spPr>
-        <p:txBody>
-          <a:bodyPr wrap="square">
-            <a:spAutoFit/>
-          </a:bodyPr>
-          <a:lstStyle/>
-          <a:p>
-            <a:pPr algn="l"/>
-            <a:r>
-              <a:rPr sz="1400" b="0" i="0">
-                <a:solidFill>
-                  <a:srgbClr val="1A1A1A"/>
-                </a:solidFill>
-              </a:rPr>
-              <a:t>Aujourd'hui vous ancrez votre identité de fundraiser téléphonique.
-Vous comprenez la mission UNICEF, les KPI de production et la nomenclature
-qui structurera chacune de vos journées de travail.</a:t>
             </a:r>
           </a:p>
         </p:txBody>
@@ -3603,7 +3567,7 @@
             <a:avLst/>
           </a:prstGeom>
           <a:solidFill>
-            <a:srgbClr val="005555"/>
+            <a:srgbClr val="005050"/>
           </a:solidFill>
           <a:ln>
             <a:noFill/>
@@ -3682,8 +3646,8 @@
         </p:nvSpPr>
         <p:spPr>
           <a:xfrm>
-            <a:off x="164592" y="73152"/>
-            <a:ext cx="2011680" cy="347472"/>
+            <a:off x="164592" y="91440"/>
+            <a:ext cx="1920240" cy="329184"/>
           </a:xfrm>
           <a:prstGeom prst="rect">
             <a:avLst/>
@@ -3716,8 +3680,8 @@
         </p:nvSpPr>
         <p:spPr>
           <a:xfrm>
-            <a:off x="2286000" y="91440"/>
-            <a:ext cx="36576" cy="502920"/>
+            <a:off x="2212848" y="109728"/>
+            <a:ext cx="36576" cy="475488"/>
           </a:xfrm>
           <a:prstGeom prst="rect">
             <a:avLst/>
@@ -3759,8 +3723,8 @@
         </p:nvSpPr>
         <p:spPr>
           <a:xfrm>
-            <a:off x="2423160" y="91440"/>
-            <a:ext cx="9235440" cy="502920"/>
+            <a:off x="2350008" y="91440"/>
+            <a:ext cx="8823960" cy="502920"/>
           </a:xfrm>
           <a:prstGeom prst="rect">
             <a:avLst/>
@@ -3801,8 +3765,8 @@
         </p:blipFill>
         <p:spPr>
           <a:xfrm>
-            <a:off x="11247120" y="0"/>
-            <a:ext cx="822960" cy="676656"/>
+            <a:off x="11228832" y="0"/>
+            <a:ext cx="841248" cy="676656"/>
           </a:xfrm>
           <a:prstGeom prst="rect">
             <a:avLst/>
@@ -3824,7 +3788,7 @@
             <a:avLst/>
           </a:prstGeom>
           <a:solidFill>
-            <a:srgbClr val="005555"/>
+            <a:srgbClr val="005050"/>
           </a:solidFill>
           <a:ln>
             <a:noFill/>
@@ -3901,7 +3865,7 @@
             <a:avLst/>
           </a:prstGeom>
           <a:solidFill>
-            <a:srgbClr val="005555"/>
+            <a:srgbClr val="005050"/>
           </a:solidFill>
           <a:ln>
             <a:noFill/>
@@ -3982,7 +3946,7 @@
           </a:solidFill>
           <a:ln w="15240">
             <a:solidFill>
-              <a:srgbClr val="005555"/>
+              <a:srgbClr val="005050"/>
             </a:solidFill>
           </a:ln>
         </p:spPr>
@@ -4037,8 +4001,7 @@
                   <a:srgbClr val="1A1A1A"/>
                 </a:solidFill>
               </a:rPr>
-              <a:t>Vous entendez le témoignage
-d'un enfant bénéficiaire UNICEF.
+              <a:t>Témoignage bénéficiaire UNICEF.
 Notez ce que vous ressentez.</a:t>
             </a:r>
           </a:p>
@@ -4195,8 +4158,7 @@
                   <a:srgbClr val="1A1A1A"/>
                 </a:solidFill>
               </a:rPr>
-              <a:t>En groupe : 'Qu'avez-vous
-ressenti ? Qu'est-ce qui vous
+              <a:t>En groupe : 'Qu'est-ce qui vous
 a le plus touché ?'</a:t>
             </a:r>
           </a:p>
@@ -4354,8 +4316,7 @@
                 </a:solidFill>
               </a:rPr>
               <a:t>Mission UNICEF · KPI FIDELIS
-Nomenclature DON/INDÉCIS/REFUS
-Organisation de la journée</a:t>
+Nomenclature · Organisation journée</a:t>
             </a:r>
           </a:p>
         </p:txBody>
@@ -4511,8 +4472,7 @@
                   <a:srgbClr val="1A1A1A"/>
                 </a:solidFill>
               </a:rPr>
-              <a:t>Vous expliquez la mission
-UNICEF en 60 secondes
+              <a:t>Pitch mission 60 secondes
 à votre binôme — sans notes.</a:t>
             </a:r>
           </a:p>
@@ -4590,7 +4550,7 @@
                   <a:srgbClr val="FFFFFF"/>
                 </a:solidFill>
               </a:rPr>
-              <a:t>Vos 3 réussites à valider aujourd'hui</a:t>
+              <a:t>À retenir</a:t>
             </a:r>
           </a:p>
         </p:txBody>
@@ -4748,7 +4708,7 @@
                   <a:srgbClr val="1A1A1A"/>
                 </a:solidFill>
               </a:rPr>
-              <a:t>✔ Quiz 5 questions UNICEF (seuil 60%)</a:t>
+              <a:t>✔ Quiz 5Q UNICEF (seuil 60%)</a:t>
             </a:r>
           </a:p>
         </p:txBody>
@@ -4827,7 +4787,7 @@
                   <a:srgbClr val="1A1A1A"/>
                 </a:solidFill>
               </a:rPr>
-              <a:t>✔ 3 lignes dans votre livret personnel</a:t>
+              <a:t>✔ 3 lignes LFI</a:t>
             </a:r>
           </a:p>
         </p:txBody>
@@ -4908,7 +4868,7 @@
             <a:avLst/>
           </a:prstGeom>
           <a:solidFill>
-            <a:srgbClr val="005555"/>
+            <a:srgbClr val="005050"/>
           </a:solidFill>
           <a:ln>
             <a:noFill/>
@@ -4987,8 +4947,8 @@
         </p:nvSpPr>
         <p:spPr>
           <a:xfrm>
-            <a:off x="164592" y="73152"/>
-            <a:ext cx="2011680" cy="347472"/>
+            <a:off x="164592" y="91440"/>
+            <a:ext cx="1920240" cy="329184"/>
           </a:xfrm>
           <a:prstGeom prst="rect">
             <a:avLst/>
@@ -5021,8 +4981,8 @@
         </p:nvSpPr>
         <p:spPr>
           <a:xfrm>
-            <a:off x="2286000" y="91440"/>
-            <a:ext cx="36576" cy="502920"/>
+            <a:off x="2212848" y="109728"/>
+            <a:ext cx="36576" cy="475488"/>
           </a:xfrm>
           <a:prstGeom prst="rect">
             <a:avLst/>
@@ -5064,8 +5024,8 @@
         </p:nvSpPr>
         <p:spPr>
           <a:xfrm>
-            <a:off x="2423160" y="91440"/>
-            <a:ext cx="9235440" cy="502920"/>
+            <a:off x="2350008" y="91440"/>
+            <a:ext cx="8823960" cy="502920"/>
           </a:xfrm>
           <a:prstGeom prst="rect">
             <a:avLst/>
@@ -5085,7 +5045,7 @@
                   <a:srgbClr val="FFFFFF"/>
                 </a:solidFill>
               </a:rPr>
-              <a:t>L'UNICEF — La Cause que Vous Défendez par Téléphone</a:t>
+              <a:t>L'UNICEF &amp; La Cause — Vos Arguments de Conviction</a:t>
             </a:r>
           </a:p>
         </p:txBody>
@@ -5106,8 +5066,8 @@
         </p:blipFill>
         <p:spPr>
           <a:xfrm>
-            <a:off x="11247120" y="0"/>
-            <a:ext cx="822960" cy="676656"/>
+            <a:off x="11228832" y="0"/>
+            <a:ext cx="841248" cy="676656"/>
           </a:xfrm>
           <a:prstGeom prst="rect">
             <a:avLst/>
@@ -5129,7 +5089,7 @@
             <a:avLst/>
           </a:prstGeom>
           <a:solidFill>
-            <a:srgbClr val="005555"/>
+            <a:srgbClr val="005050"/>
           </a:solidFill>
           <a:ln>
             <a:noFill/>
@@ -5206,7 +5166,7 @@
             <a:avLst/>
           </a:prstGeom>
           <a:solidFill>
-            <a:srgbClr val="005555"/>
+            <a:srgbClr val="005050"/>
           </a:solidFill>
           <a:ln>
             <a:noFill/>
@@ -5258,7 +5218,7 @@
           <a:p>
             <a:pPr algn="ctr"/>
             <a:r>
-              <a:rPr sz="2200" b="1" i="0">
+              <a:rPr sz="2000" b="1" i="0">
                 <a:solidFill>
                   <a:srgbClr val="FFFFFF"/>
                 </a:solidFill>
@@ -5297,8 +5257,8 @@
                   <a:srgbClr val="CCEEEE"/>
                 </a:solidFill>
               </a:rPr>
-              <a:t>Fondation de
-l'UNICEF (ONU)</a:t>
+              <a:t>Fondation UNICEF
+(ONU)</a:t>
             </a:r>
           </a:p>
         </p:txBody>
@@ -5318,7 +5278,7 @@
             <a:avLst/>
           </a:prstGeom>
           <a:solidFill>
-            <a:srgbClr val="005555"/>
+            <a:srgbClr val="005050"/>
           </a:solidFill>
           <a:ln>
             <a:noFill/>
@@ -5370,7 +5330,7 @@
           <a:p>
             <a:pPr algn="ctr"/>
             <a:r>
-              <a:rPr sz="2200" b="1" i="0">
+              <a:rPr sz="2000" b="1" i="0">
                 <a:solidFill>
                   <a:srgbClr val="FFFFFF"/>
                 </a:solidFill>
@@ -5409,8 +5369,7 @@
                   <a:srgbClr val="CCEEEE"/>
                 </a:solidFill>
               </a:rPr>
-              <a:t>pays où l'UNICEF
-est présent</a:t>
+              <a:t>pays présents</a:t>
             </a:r>
           </a:p>
         </p:txBody>
@@ -5430,7 +5389,7 @@
             <a:avLst/>
           </a:prstGeom>
           <a:solidFill>
-            <a:srgbClr val="005555"/>
+            <a:srgbClr val="005050"/>
           </a:solidFill>
           <a:ln>
             <a:noFill/>
@@ -5482,7 +5441,7 @@
           <a:p>
             <a:pPr algn="ctr"/>
             <a:r>
-              <a:rPr sz="2200" b="1" i="0">
+              <a:rPr sz="2000" b="1" i="0">
                 <a:solidFill>
                   <a:srgbClr val="FFFFFF"/>
                 </a:solidFill>
@@ -5521,7 +5480,7 @@
                   <a:srgbClr val="CCEEEE"/>
                 </a:solidFill>
               </a:rPr>
-              <a:t>des enfants du monde
+              <a:t>enfants du monde
 vaccinés par l'UNICEF</a:t>
             </a:r>
           </a:p>
@@ -5542,7 +5501,7 @@
             <a:avLst/>
           </a:prstGeom>
           <a:solidFill>
-            <a:srgbClr val="005555"/>
+            <a:srgbClr val="005050"/>
           </a:solidFill>
           <a:ln>
             <a:noFill/>
@@ -5594,7 +5553,7 @@
           <a:p>
             <a:pPr algn="ctr"/>
             <a:r>
-              <a:rPr sz="2200" b="1" i="0">
+              <a:rPr sz="2000" b="1" i="0">
                 <a:solidFill>
                   <a:srgbClr val="FFFFFF"/>
                 </a:solidFill>
@@ -5633,8 +5592,8 @@
                   <a:srgbClr val="CCEEEE"/>
                 </a:solidFill>
               </a:rPr>
-              <a:t>poids d'1 sachet RUTF
-traitement malnutrition</a:t>
+              <a:t>poids sachet RUTF
+malnutrition</a:t>
             </a:r>
           </a:p>
         </p:txBody>
@@ -5654,7 +5613,7 @@
             <a:avLst/>
           </a:prstGeom>
           <a:solidFill>
-            <a:srgbClr val="005555"/>
+            <a:srgbClr val="005050"/>
           </a:solidFill>
           <a:ln>
             <a:noFill/>
@@ -5706,7 +5665,7 @@
           <a:p>
             <a:pPr algn="ctr"/>
             <a:r>
-              <a:rPr sz="2200" b="1" i="0">
+              <a:rPr sz="2000" b="1" i="0">
                 <a:solidFill>
                   <a:srgbClr val="FFFFFF"/>
                 </a:solidFill>
@@ -5767,7 +5726,7 @@
             <a:avLst/>
           </a:prstGeom>
           <a:solidFill>
-            <a:srgbClr val="005555"/>
+            <a:srgbClr val="005050"/>
           </a:solidFill>
           <a:ln>
             <a:noFill/>
@@ -5819,12 +5778,12 @@
           <a:p>
             <a:pPr algn="ctr"/>
             <a:r>
-              <a:rPr sz="2200" b="1" i="0">
+              <a:rPr sz="2000" b="1" i="0">
                 <a:solidFill>
                   <a:srgbClr val="FFFFFF"/>
                 </a:solidFill>
               </a:rPr>
-              <a:t>Loi 1901</a:t>
+              <a:t>9 CU/H</a:t>
             </a:r>
           </a:p>
         </p:txBody>
@@ -5858,56 +5817,22 @@
                   <a:srgbClr val="CCEEEE"/>
                 </a:solidFill>
               </a:rPr>
-              <a:t>Cadre juridique
-associatif français</a:t>
-            </a:r>
-          </a:p>
-        </p:txBody>
-      </p:sp>
-      <p:sp>
-        <p:nvSpPr>
-          <p:cNvPr id="29" name="TextBox 28"/>
-          <p:cNvSpPr txBox="1"/>
-          <p:nvPr/>
-        </p:nvSpPr>
-        <p:spPr>
-          <a:xfrm>
-            <a:off x="274320" y="1938528"/>
-            <a:ext cx="11640312" cy="274320"/>
-          </a:xfrm>
-          <a:prstGeom prst="rect">
-            <a:avLst/>
-          </a:prstGeom>
-          <a:noFill/>
-        </p:spPr>
-        <p:txBody>
-          <a:bodyPr wrap="square">
-            <a:spAutoFit/>
-          </a:bodyPr>
-          <a:lstStyle/>
-          <a:p>
-            <a:pPr algn="l"/>
-            <a:r>
-              <a:rPr sz="1200" b="1" i="0">
-                <a:solidFill>
-                  <a:srgbClr val="005555"/>
-                </a:solidFill>
-              </a:rPr>
-              <a:t>La cause centrale de la campagne :</a:t>
-            </a:r>
-          </a:p>
-        </p:txBody>
-      </p:sp>
-      <p:sp>
-        <p:nvSpPr>
-          <p:cNvPr id="30" name="Rectangle 29"/>
+              <a:t>votre objectif
+quotidien minimum</a:t>
+            </a:r>
+          </a:p>
+        </p:txBody>
+      </p:sp>
+      <p:sp>
+        <p:nvSpPr>
+          <p:cNvPr id="29" name="Rectangle 28"/>
           <p:cNvSpPr/>
           <p:nvPr/>
         </p:nvSpPr>
         <p:spPr>
           <a:xfrm>
-            <a:off x="274320" y="2267712"/>
-            <a:ext cx="109728" cy="749808"/>
+            <a:off x="274320" y="1920240"/>
+            <a:ext cx="11640312" cy="658368"/>
           </a:xfrm>
           <a:prstGeom prst="rect">
             <a:avLst/>
@@ -5943,57 +5868,14 @@
       </p:sp>
       <p:sp>
         <p:nvSpPr>
-          <p:cNvPr id="31" name="Rectangle 30"/>
-          <p:cNvSpPr/>
-          <p:nvPr/>
-        </p:nvSpPr>
-        <p:spPr>
-          <a:xfrm>
-            <a:off x="402336" y="2267712"/>
-            <a:ext cx="11512296" cy="749808"/>
-          </a:xfrm>
-          <a:prstGeom prst="rect">
-            <a:avLst/>
-          </a:prstGeom>
-          <a:solidFill>
-            <a:srgbClr val="F0F7F7"/>
-          </a:solidFill>
-          <a:ln>
-            <a:noFill/>
-          </a:ln>
-        </p:spPr>
-        <p:style>
-          <a:lnRef idx="1">
-            <a:schemeClr val="accent1"/>
-          </a:lnRef>
-          <a:fillRef idx="3">
-            <a:schemeClr val="accent1"/>
-          </a:fillRef>
-          <a:effectRef idx="2">
-            <a:schemeClr val="accent1"/>
-          </a:effectRef>
-          <a:fontRef idx="minor">
-            <a:schemeClr val="lt1"/>
-          </a:fontRef>
-        </p:style>
-        <p:txBody>
-          <a:bodyPr rtlCol="0" anchor="ctr"/>
-          <a:lstStyle/>
-          <a:p>
-            <a:pPr algn="ctr"/>
-          </a:p>
-        </p:txBody>
-      </p:sp>
-      <p:sp>
-        <p:nvSpPr>
-          <p:cNvPr id="32" name="TextBox 31"/>
+          <p:cNvPr id="30" name="TextBox 29"/>
           <p:cNvSpPr txBox="1"/>
           <p:nvPr/>
         </p:nvSpPr>
         <p:spPr>
           <a:xfrm>
-            <a:off x="539496" y="2340864"/>
-            <a:ext cx="11237976" cy="603503"/>
+            <a:off x="411479" y="1993392"/>
+            <a:ext cx="11365992" cy="512063"/>
           </a:xfrm>
           <a:prstGeom prst="rect">
             <a:avLst/>
@@ -6010,59 +5892,25 @@
             <a:r>
               <a:rPr sz="1000" b="0" i="0">
                 <a:solidFill>
-                  <a:srgbClr val="1A1A1A"/>
+                  <a:srgbClr val="FFFFFF"/>
                 </a:solidFill>
               </a:rPr>
-              <a:t>La malnutrition aigüe sévère — 1 enfant meurt de faim toutes les 11 secondes dans le monde.
-Les sachets RUTF (92g) permettent à un enfant sévèrement malnutri de guérir en 6 à 8 semaines.</a:t>
-            </a:r>
-          </a:p>
-        </p:txBody>
-      </p:sp>
-      <p:sp>
-        <p:nvSpPr>
-          <p:cNvPr id="33" name="TextBox 32"/>
-          <p:cNvSpPr txBox="1"/>
-          <p:nvPr/>
-        </p:nvSpPr>
-        <p:spPr>
-          <a:xfrm>
-            <a:off x="274320" y="3200400"/>
-            <a:ext cx="11640312" cy="274320"/>
-          </a:xfrm>
-          <a:prstGeom prst="rect">
-            <a:avLst/>
-          </a:prstGeom>
-          <a:noFill/>
-        </p:spPr>
-        <p:txBody>
-          <a:bodyPr wrap="square">
-            <a:spAutoFit/>
-          </a:bodyPr>
-          <a:lstStyle/>
-          <a:p>
-            <a:pPr algn="l"/>
-            <a:r>
-              <a:rPr sz="1200" b="1" i="0">
-                <a:solidFill>
-                  <a:srgbClr val="005555"/>
-                </a:solidFill>
-              </a:rPr>
-              <a:t>Les KPI qui structurent votre journée de production :</a:t>
-            </a:r>
-          </a:p>
-        </p:txBody>
-      </p:sp>
-      <p:sp>
-        <p:nvSpPr>
-          <p:cNvPr id="34" name="Rectangle 33"/>
+              <a:t>La cause centrale : Malnutrition aigüe sévère — 1 enfant meurt de faim toutes les 11 secondes.
+Les sachets RUTF (92g) permettent à un enfant malnutri de guérir en 6 à 8 semaines.</a:t>
+            </a:r>
+          </a:p>
+        </p:txBody>
+      </p:sp>
+      <p:sp>
+        <p:nvSpPr>
+          <p:cNvPr id="31" name="Rectangle 30"/>
           <p:cNvSpPr/>
           <p:nvPr/>
         </p:nvSpPr>
         <p:spPr>
           <a:xfrm>
-            <a:off x="274320" y="3547872"/>
-            <a:ext cx="1920240" cy="987552"/>
+            <a:off x="274320" y="2697480"/>
+            <a:ext cx="11640312" cy="566928"/>
           </a:xfrm>
           <a:prstGeom prst="rect">
             <a:avLst/>
@@ -6098,14 +5946,14 @@
       </p:sp>
       <p:sp>
         <p:nvSpPr>
-          <p:cNvPr id="35" name="TextBox 34"/>
+          <p:cNvPr id="32" name="TextBox 31"/>
           <p:cNvSpPr txBox="1"/>
           <p:nvPr/>
         </p:nvSpPr>
         <p:spPr>
           <a:xfrm>
-            <a:off x="365760" y="3566160"/>
-            <a:ext cx="1737360" cy="502920"/>
+            <a:off x="411479" y="2770632"/>
+            <a:ext cx="11365992" cy="420623"/>
           </a:xfrm>
           <a:prstGeom prst="rect">
             <a:avLst/>
@@ -6118,63 +5966,28 @@
           </a:bodyPr>
           <a:lstStyle/>
           <a:p>
-            <a:pPr algn="ctr"/>
-            <a:r>
-              <a:rPr sz="1400" b="1" i="0">
+            <a:pPr algn="l"/>
+            <a:r>
+              <a:rPr sz="1000" b="0" i="0">
                 <a:solidFill>
                   <a:srgbClr val="FFFFFF"/>
                 </a:solidFill>
               </a:rPr>
-              <a:t>CU/H ≥ 9</a:t>
-            </a:r>
-          </a:p>
-        </p:txBody>
-      </p:sp>
-      <p:sp>
-        <p:nvSpPr>
-          <p:cNvPr id="36" name="TextBox 35"/>
-          <p:cNvSpPr txBox="1"/>
-          <p:nvPr/>
-        </p:nvSpPr>
-        <p:spPr>
-          <a:xfrm>
-            <a:off x="365760" y="4059936"/>
-            <a:ext cx="1737360" cy="438912"/>
-          </a:xfrm>
-          <a:prstGeom prst="rect">
-            <a:avLst/>
-          </a:prstGeom>
-          <a:noFill/>
-        </p:spPr>
-        <p:txBody>
-          <a:bodyPr wrap="square">
-            <a:spAutoFit/>
-          </a:bodyPr>
-          <a:lstStyle/>
-          <a:p>
-            <a:pPr algn="ctr"/>
-            <a:r>
-              <a:rPr sz="900" b="0" i="0">
-                <a:solidFill>
-                  <a:srgbClr val="CCEEEE"/>
-                </a:solidFill>
-              </a:rPr>
-              <a:t>Contacts Utiles
-par heure minimum</a:t>
-            </a:r>
-          </a:p>
-        </p:txBody>
-      </p:sp>
-      <p:sp>
-        <p:nvSpPr>
-          <p:cNvPr id="37" name="Rectangle 36"/>
+              <a:t>Votre posture vocale : Sourire audible dès le mot 'Bonjour' · Débit posé · Ton chaleureux · Conviction sincère — vous croyez en la mission UNICEF que vous représentez.</a:t>
+            </a:r>
+          </a:p>
+        </p:txBody>
+      </p:sp>
+      <p:sp>
+        <p:nvSpPr>
+          <p:cNvPr id="33" name="Rectangle 32"/>
           <p:cNvSpPr/>
           <p:nvPr/>
         </p:nvSpPr>
         <p:spPr>
           <a:xfrm>
-            <a:off x="2249424" y="3547872"/>
-            <a:ext cx="1920240" cy="987552"/>
+            <a:off x="274320" y="3401568"/>
+            <a:ext cx="11640312" cy="402336"/>
           </a:xfrm>
           <a:prstGeom prst="rect">
             <a:avLst/>
@@ -6210,14 +6023,14 @@
       </p:sp>
       <p:sp>
         <p:nvSpPr>
-          <p:cNvPr id="38" name="TextBox 37"/>
+          <p:cNvPr id="34" name="TextBox 33"/>
           <p:cNvSpPr txBox="1"/>
           <p:nvPr/>
         </p:nvSpPr>
         <p:spPr>
           <a:xfrm>
-            <a:off x="2340864" y="3566160"/>
-            <a:ext cx="1737360" cy="502920"/>
+            <a:off x="411479" y="3474720"/>
+            <a:ext cx="11365992" cy="256032"/>
           </a:xfrm>
           <a:prstGeom prst="rect">
             <a:avLst/>
@@ -6230,63 +6043,28 @@
           </a:bodyPr>
           <a:lstStyle/>
           <a:p>
-            <a:pPr algn="ctr"/>
-            <a:r>
-              <a:rPr sz="1400" b="1" i="0">
+            <a:pPr algn="l"/>
+            <a:r>
+              <a:rPr sz="1000" b="0" i="0">
                 <a:solidFill>
                   <a:srgbClr val="FFFFFF"/>
                 </a:solidFill>
               </a:rPr>
-              <a:t>TX Transfo</a:t>
-            </a:r>
-          </a:p>
-        </p:txBody>
-      </p:sp>
-      <p:sp>
-        <p:nvSpPr>
-          <p:cNvPr id="39" name="TextBox 38"/>
-          <p:cNvSpPr txBox="1"/>
-          <p:nvPr/>
-        </p:nvSpPr>
-        <p:spPr>
-          <a:xfrm>
-            <a:off x="2340864" y="4059936"/>
-            <a:ext cx="1737360" cy="438912"/>
-          </a:xfrm>
-          <a:prstGeom prst="rect">
-            <a:avLst/>
-          </a:prstGeom>
-          <a:noFill/>
-        </p:spPr>
-        <p:txBody>
-          <a:bodyPr wrap="square">
-            <a:spAutoFit/>
-          </a:bodyPr>
-          <a:lstStyle/>
-          <a:p>
-            <a:pPr algn="ctr"/>
-            <a:r>
-              <a:rPr sz="900" b="0" i="0">
-                <a:solidFill>
-                  <a:srgbClr val="CCEEEE"/>
-                </a:solidFill>
-              </a:rPr>
-              <a:t>% PEL+PA
-parmi les CU</a:t>
-            </a:r>
-          </a:p>
-        </p:txBody>
-      </p:sp>
-      <p:sp>
-        <p:nvSpPr>
-          <p:cNvPr id="40" name="Rectangle 39"/>
+              <a:t>Exercice : Lisez votre script à voix haute en souriant physiquement. Enregistrez-vous 60 sec. Réécoutez. Qu'est-ce que vous changeriez ?</a:t>
+            </a:r>
+          </a:p>
+        </p:txBody>
+      </p:sp>
+      <p:sp>
+        <p:nvSpPr>
+          <p:cNvPr id="35" name="Rectangle 34"/>
           <p:cNvSpPr/>
           <p:nvPr/>
         </p:nvSpPr>
         <p:spPr>
           <a:xfrm>
-            <a:off x="4224528" y="3547872"/>
-            <a:ext cx="1920240" cy="987552"/>
+            <a:off x="274320" y="3977639"/>
+            <a:ext cx="1920240" cy="960120"/>
           </a:xfrm>
           <a:prstGeom prst="rect">
             <a:avLst/>
@@ -6322,14 +6100,14 @@
       </p:sp>
       <p:sp>
         <p:nvSpPr>
-          <p:cNvPr id="41" name="TextBox 40"/>
+          <p:cNvPr id="36" name="TextBox 35"/>
           <p:cNvSpPr txBox="1"/>
           <p:nvPr/>
         </p:nvSpPr>
         <p:spPr>
           <a:xfrm>
-            <a:off x="4315968" y="3566160"/>
-            <a:ext cx="1737360" cy="502920"/>
+            <a:off x="347472" y="3995928"/>
+            <a:ext cx="1773936" cy="502920"/>
           </a:xfrm>
           <a:prstGeom prst="rect">
             <a:avLst/>
@@ -6344,26 +6122,26 @@
           <a:p>
             <a:pPr algn="ctr"/>
             <a:r>
-              <a:rPr sz="1400" b="1" i="0">
+              <a:rPr sz="1300" b="1" i="0">
                 <a:solidFill>
                   <a:srgbClr val="FFFFFF"/>
                 </a:solidFill>
               </a:rPr>
-              <a:t>PDC</a:t>
-            </a:r>
-          </a:p>
-        </p:txBody>
-      </p:sp>
-      <p:sp>
-        <p:nvSpPr>
-          <p:cNvPr id="42" name="TextBox 41"/>
+              <a:t>CU/H ≥ 9</a:t>
+            </a:r>
+          </a:p>
+        </p:txBody>
+      </p:sp>
+      <p:sp>
+        <p:nvSpPr>
+          <p:cNvPr id="37" name="TextBox 36"/>
           <p:cNvSpPr txBox="1"/>
           <p:nvPr/>
         </p:nvSpPr>
         <p:spPr>
           <a:xfrm>
-            <a:off x="4315968" y="4059936"/>
-            <a:ext cx="1737360" cy="438912"/>
+            <a:off x="347472" y="4480560"/>
+            <a:ext cx="1773936" cy="420624"/>
           </a:xfrm>
           <a:prstGeom prst="rect">
             <a:avLst/>
@@ -6383,22 +6161,21 @@
                   <a:srgbClr val="CCEEEE"/>
                 </a:solidFill>
               </a:rPr>
-              <a:t>Plan de Charge
-mensuel FIDELIS</a:t>
-            </a:r>
-          </a:p>
-        </p:txBody>
-      </p:sp>
-      <p:sp>
-        <p:nvSpPr>
-          <p:cNvPr id="43" name="Rectangle 42"/>
+              <a:t>Contacts Utiles/h</a:t>
+            </a:r>
+          </a:p>
+        </p:txBody>
+      </p:sp>
+      <p:sp>
+        <p:nvSpPr>
+          <p:cNvPr id="38" name="Rectangle 37"/>
           <p:cNvSpPr/>
           <p:nvPr/>
         </p:nvSpPr>
         <p:spPr>
           <a:xfrm>
-            <a:off x="6199632" y="3547872"/>
-            <a:ext cx="1920240" cy="987552"/>
+            <a:off x="2249424" y="3977639"/>
+            <a:ext cx="1920240" cy="960120"/>
           </a:xfrm>
           <a:prstGeom prst="rect">
             <a:avLst/>
@@ -6434,14 +6211,14 @@
       </p:sp>
       <p:sp>
         <p:nvSpPr>
-          <p:cNvPr id="44" name="TextBox 43"/>
+          <p:cNvPr id="39" name="TextBox 38"/>
           <p:cNvSpPr txBox="1"/>
           <p:nvPr/>
         </p:nvSpPr>
         <p:spPr>
           <a:xfrm>
-            <a:off x="6291072" y="3566160"/>
-            <a:ext cx="1737360" cy="502920"/>
+            <a:off x="2322576" y="3995928"/>
+            <a:ext cx="1773936" cy="502920"/>
           </a:xfrm>
           <a:prstGeom prst="rect">
             <a:avLst/>
@@ -6456,26 +6233,26 @@
           <a:p>
             <a:pPr algn="ctr"/>
             <a:r>
-              <a:rPr sz="1400" b="1" i="0">
+              <a:rPr sz="1300" b="1" i="0">
                 <a:solidFill>
                   <a:srgbClr val="FFFFFF"/>
                 </a:solidFill>
               </a:rPr>
-              <a:t>DON</a:t>
-            </a:r>
-          </a:p>
-        </p:txBody>
-      </p:sp>
-      <p:sp>
-        <p:nvSpPr>
-          <p:cNvPr id="45" name="TextBox 44"/>
+              <a:t>TX Transfo</a:t>
+            </a:r>
+          </a:p>
+        </p:txBody>
+      </p:sp>
+      <p:sp>
+        <p:nvSpPr>
+          <p:cNvPr id="40" name="TextBox 39"/>
           <p:cNvSpPr txBox="1"/>
           <p:nvPr/>
         </p:nvSpPr>
         <p:spPr>
           <a:xfrm>
-            <a:off x="6291072" y="4059936"/>
-            <a:ext cx="1737360" cy="438912"/>
+            <a:off x="2322576" y="4480560"/>
+            <a:ext cx="1773936" cy="420624"/>
           </a:xfrm>
           <a:prstGeom prst="rect">
             <a:avLst/>
@@ -6495,22 +6272,21 @@
                   <a:srgbClr val="CCEEEE"/>
                 </a:solidFill>
               </a:rPr>
-              <a:t>Contact qui accepte
-le don régulier</a:t>
-            </a:r>
-          </a:p>
-        </p:txBody>
-      </p:sp>
-      <p:sp>
-        <p:nvSpPr>
-          <p:cNvPr id="46" name="Rectangle 45"/>
+              <a:t>% PEL+PA parmi CU</a:t>
+            </a:r>
+          </a:p>
+        </p:txBody>
+      </p:sp>
+      <p:sp>
+        <p:nvSpPr>
+          <p:cNvPr id="41" name="Rectangle 40"/>
           <p:cNvSpPr/>
           <p:nvPr/>
         </p:nvSpPr>
         <p:spPr>
           <a:xfrm>
-            <a:off x="8174736" y="3547872"/>
-            <a:ext cx="1920240" cy="987552"/>
+            <a:off x="4224528" y="3977639"/>
+            <a:ext cx="1920240" cy="960120"/>
           </a:xfrm>
           <a:prstGeom prst="rect">
             <a:avLst/>
@@ -6546,14 +6322,14 @@
       </p:sp>
       <p:sp>
         <p:nvSpPr>
-          <p:cNvPr id="47" name="TextBox 46"/>
+          <p:cNvPr id="42" name="TextBox 41"/>
           <p:cNvSpPr txBox="1"/>
           <p:nvPr/>
         </p:nvSpPr>
         <p:spPr>
           <a:xfrm>
-            <a:off x="8266176" y="3566160"/>
-            <a:ext cx="1737360" cy="502920"/>
+            <a:off x="4297680" y="3995928"/>
+            <a:ext cx="1773936" cy="502920"/>
           </a:xfrm>
           <a:prstGeom prst="rect">
             <a:avLst/>
@@ -6568,26 +6344,26 @@
           <a:p>
             <a:pPr algn="ctr"/>
             <a:r>
-              <a:rPr sz="1400" b="1" i="0">
+              <a:rPr sz="1300" b="1" i="0">
                 <a:solidFill>
                   <a:srgbClr val="FFFFFF"/>
                 </a:solidFill>
               </a:rPr>
-              <a:t>INDÉCIS</a:t>
-            </a:r>
-          </a:p>
-        </p:txBody>
-      </p:sp>
-      <p:sp>
-        <p:nvSpPr>
-          <p:cNvPr id="48" name="TextBox 47"/>
+              <a:t>PDC</a:t>
+            </a:r>
+          </a:p>
+        </p:txBody>
+      </p:sp>
+      <p:sp>
+        <p:nvSpPr>
+          <p:cNvPr id="43" name="TextBox 42"/>
           <p:cNvSpPr txBox="1"/>
           <p:nvPr/>
         </p:nvSpPr>
         <p:spPr>
           <a:xfrm>
-            <a:off x="8266176" y="4059936"/>
-            <a:ext cx="1737360" cy="438912"/>
+            <a:off x="4297680" y="4480560"/>
+            <a:ext cx="1773936" cy="420624"/>
           </a:xfrm>
           <a:prstGeom prst="rect">
             <a:avLst/>
@@ -6607,22 +6383,21 @@
                   <a:srgbClr val="CCEEEE"/>
                 </a:solidFill>
               </a:rPr>
-              <a:t>Contact à relancer
-après réflexion</a:t>
-            </a:r>
-          </a:p>
-        </p:txBody>
-      </p:sp>
-      <p:sp>
-        <p:nvSpPr>
-          <p:cNvPr id="49" name="Rectangle 48"/>
+              <a:t>Plan de Charge mensuel</a:t>
+            </a:r>
+          </a:p>
+        </p:txBody>
+      </p:sp>
+      <p:sp>
+        <p:nvSpPr>
+          <p:cNvPr id="44" name="Rectangle 43"/>
           <p:cNvSpPr/>
           <p:nvPr/>
         </p:nvSpPr>
         <p:spPr>
           <a:xfrm>
-            <a:off x="10149840" y="3547872"/>
-            <a:ext cx="1920240" cy="987552"/>
+            <a:off x="6199632" y="3977639"/>
+            <a:ext cx="1920240" cy="960120"/>
           </a:xfrm>
           <a:prstGeom prst="rect">
             <a:avLst/>
@@ -6658,14 +6433,14 @@
       </p:sp>
       <p:sp>
         <p:nvSpPr>
-          <p:cNvPr id="50" name="TextBox 49"/>
+          <p:cNvPr id="45" name="TextBox 44"/>
           <p:cNvSpPr txBox="1"/>
           <p:nvPr/>
         </p:nvSpPr>
         <p:spPr>
           <a:xfrm>
-            <a:off x="10241280" y="3566160"/>
-            <a:ext cx="1737360" cy="502920"/>
+            <a:off x="6272784" y="3995928"/>
+            <a:ext cx="1773936" cy="502920"/>
           </a:xfrm>
           <a:prstGeom prst="rect">
             <a:avLst/>
@@ -6680,26 +6455,26 @@
           <a:p>
             <a:pPr algn="ctr"/>
             <a:r>
-              <a:rPr sz="1400" b="1" i="0">
+              <a:rPr sz="1300" b="1" i="0">
                 <a:solidFill>
                   <a:srgbClr val="FFFFFF"/>
                 </a:solidFill>
               </a:rPr>
-              <a:t>REFUS</a:t>
-            </a:r>
-          </a:p>
-        </p:txBody>
-      </p:sp>
-      <p:sp>
-        <p:nvSpPr>
-          <p:cNvPr id="51" name="TextBox 50"/>
+              <a:t>DON</a:t>
+            </a:r>
+          </a:p>
+        </p:txBody>
+      </p:sp>
+      <p:sp>
+        <p:nvSpPr>
+          <p:cNvPr id="46" name="TextBox 45"/>
           <p:cNvSpPr txBox="1"/>
           <p:nvPr/>
         </p:nvSpPr>
         <p:spPr>
           <a:xfrm>
-            <a:off x="10241280" y="4059936"/>
-            <a:ext cx="1737360" cy="438912"/>
+            <a:off x="6272784" y="4480560"/>
+            <a:ext cx="1773936" cy="420624"/>
           </a:xfrm>
           <a:prstGeom prst="rect">
             <a:avLst/>
@@ -6719,22 +6494,21 @@
                   <a:srgbClr val="CCEEEE"/>
                 </a:solidFill>
               </a:rPr>
-              <a:t>Contact qui refuse
-définitivement</a:t>
-            </a:r>
-          </a:p>
-        </p:txBody>
-      </p:sp>
-      <p:sp>
-        <p:nvSpPr>
-          <p:cNvPr id="52" name="Rectangle 51"/>
+              <a:t>Contact qui accepte le PA</a:t>
+            </a:r>
+          </a:p>
+        </p:txBody>
+      </p:sp>
+      <p:sp>
+        <p:nvSpPr>
+          <p:cNvPr id="47" name="Rectangle 46"/>
           <p:cNvSpPr/>
           <p:nvPr/>
         </p:nvSpPr>
         <p:spPr>
           <a:xfrm>
-            <a:off x="274320" y="4681728"/>
-            <a:ext cx="11640312" cy="566928"/>
+            <a:off x="8174736" y="3977639"/>
+            <a:ext cx="1920240" cy="960120"/>
           </a:xfrm>
           <a:prstGeom prst="rect">
             <a:avLst/>
@@ -6770,14 +6544,14 @@
       </p:sp>
       <p:sp>
         <p:nvSpPr>
-          <p:cNvPr id="53" name="TextBox 52"/>
+          <p:cNvPr id="48" name="TextBox 47"/>
           <p:cNvSpPr txBox="1"/>
           <p:nvPr/>
         </p:nvSpPr>
         <p:spPr>
           <a:xfrm>
-            <a:off x="411479" y="4754880"/>
-            <a:ext cx="11365992" cy="420623"/>
+            <a:off x="8247888" y="3995928"/>
+            <a:ext cx="1773936" cy="502920"/>
           </a:xfrm>
           <a:prstGeom prst="rect">
             <a:avLst/>
@@ -6790,6 +6564,228 @@
           </a:bodyPr>
           <a:lstStyle/>
           <a:p>
+            <a:pPr algn="ctr"/>
+            <a:r>
+              <a:rPr sz="1300" b="1" i="0">
+                <a:solidFill>
+                  <a:srgbClr val="FFFFFF"/>
+                </a:solidFill>
+              </a:rPr>
+              <a:t>INDÉCIS</a:t>
+            </a:r>
+          </a:p>
+        </p:txBody>
+      </p:sp>
+      <p:sp>
+        <p:nvSpPr>
+          <p:cNvPr id="49" name="TextBox 48"/>
+          <p:cNvSpPr txBox="1"/>
+          <p:nvPr/>
+        </p:nvSpPr>
+        <p:spPr>
+          <a:xfrm>
+            <a:off x="8247888" y="4480560"/>
+            <a:ext cx="1773936" cy="420624"/>
+          </a:xfrm>
+          <a:prstGeom prst="rect">
+            <a:avLst/>
+          </a:prstGeom>
+          <a:noFill/>
+        </p:spPr>
+        <p:txBody>
+          <a:bodyPr wrap="square">
+            <a:spAutoFit/>
+          </a:bodyPr>
+          <a:lstStyle/>
+          <a:p>
+            <a:pPr algn="ctr"/>
+            <a:r>
+              <a:rPr sz="900" b="0" i="0">
+                <a:solidFill>
+                  <a:srgbClr val="CCEEEE"/>
+                </a:solidFill>
+              </a:rPr>
+              <a:t>Contact à relancer</a:t>
+            </a:r>
+          </a:p>
+        </p:txBody>
+      </p:sp>
+      <p:sp>
+        <p:nvSpPr>
+          <p:cNvPr id="50" name="Rectangle 49"/>
+          <p:cNvSpPr/>
+          <p:nvPr/>
+        </p:nvSpPr>
+        <p:spPr>
+          <a:xfrm>
+            <a:off x="10149840" y="3977639"/>
+            <a:ext cx="1920240" cy="960120"/>
+          </a:xfrm>
+          <a:prstGeom prst="rect">
+            <a:avLst/>
+          </a:prstGeom>
+          <a:solidFill>
+            <a:srgbClr val="008080"/>
+          </a:solidFill>
+          <a:ln>
+            <a:noFill/>
+          </a:ln>
+        </p:spPr>
+        <p:style>
+          <a:lnRef idx="1">
+            <a:schemeClr val="accent1"/>
+          </a:lnRef>
+          <a:fillRef idx="3">
+            <a:schemeClr val="accent1"/>
+          </a:fillRef>
+          <a:effectRef idx="2">
+            <a:schemeClr val="accent1"/>
+          </a:effectRef>
+          <a:fontRef idx="minor">
+            <a:schemeClr val="lt1"/>
+          </a:fontRef>
+        </p:style>
+        <p:txBody>
+          <a:bodyPr rtlCol="0" anchor="ctr"/>
+          <a:lstStyle/>
+          <a:p>
+            <a:pPr algn="ctr"/>
+          </a:p>
+        </p:txBody>
+      </p:sp>
+      <p:sp>
+        <p:nvSpPr>
+          <p:cNvPr id="51" name="TextBox 50"/>
+          <p:cNvSpPr txBox="1"/>
+          <p:nvPr/>
+        </p:nvSpPr>
+        <p:spPr>
+          <a:xfrm>
+            <a:off x="10222992" y="3995928"/>
+            <a:ext cx="1773936" cy="502920"/>
+          </a:xfrm>
+          <a:prstGeom prst="rect">
+            <a:avLst/>
+          </a:prstGeom>
+          <a:noFill/>
+        </p:spPr>
+        <p:txBody>
+          <a:bodyPr wrap="square">
+            <a:spAutoFit/>
+          </a:bodyPr>
+          <a:lstStyle/>
+          <a:p>
+            <a:pPr algn="ctr"/>
+            <a:r>
+              <a:rPr sz="1300" b="1" i="0">
+                <a:solidFill>
+                  <a:srgbClr val="FFFFFF"/>
+                </a:solidFill>
+              </a:rPr>
+              <a:t>REFUS</a:t>
+            </a:r>
+          </a:p>
+        </p:txBody>
+      </p:sp>
+      <p:sp>
+        <p:nvSpPr>
+          <p:cNvPr id="52" name="TextBox 51"/>
+          <p:cNvSpPr txBox="1"/>
+          <p:nvPr/>
+        </p:nvSpPr>
+        <p:spPr>
+          <a:xfrm>
+            <a:off x="10222992" y="4480560"/>
+            <a:ext cx="1773936" cy="420624"/>
+          </a:xfrm>
+          <a:prstGeom prst="rect">
+            <a:avLst/>
+          </a:prstGeom>
+          <a:noFill/>
+        </p:spPr>
+        <p:txBody>
+          <a:bodyPr wrap="square">
+            <a:spAutoFit/>
+          </a:bodyPr>
+          <a:lstStyle/>
+          <a:p>
+            <a:pPr algn="ctr"/>
+            <a:r>
+              <a:rPr sz="900" b="0" i="0">
+                <a:solidFill>
+                  <a:srgbClr val="CCEEEE"/>
+                </a:solidFill>
+              </a:rPr>
+              <a:t>Contact qui refuse définitivement</a:t>
+            </a:r>
+          </a:p>
+        </p:txBody>
+      </p:sp>
+      <p:sp>
+        <p:nvSpPr>
+          <p:cNvPr id="53" name="Rectangle 52"/>
+          <p:cNvSpPr/>
+          <p:nvPr/>
+        </p:nvSpPr>
+        <p:spPr>
+          <a:xfrm>
+            <a:off x="274320" y="5074920"/>
+            <a:ext cx="11640312" cy="347472"/>
+          </a:xfrm>
+          <a:prstGeom prst="rect">
+            <a:avLst/>
+          </a:prstGeom>
+          <a:solidFill>
+            <a:srgbClr val="008080"/>
+          </a:solidFill>
+          <a:ln>
+            <a:noFill/>
+          </a:ln>
+        </p:spPr>
+        <p:style>
+          <a:lnRef idx="1">
+            <a:schemeClr val="accent1"/>
+          </a:lnRef>
+          <a:fillRef idx="3">
+            <a:schemeClr val="accent1"/>
+          </a:fillRef>
+          <a:effectRef idx="2">
+            <a:schemeClr val="accent1"/>
+          </a:effectRef>
+          <a:fontRef idx="minor">
+            <a:schemeClr val="lt1"/>
+          </a:fontRef>
+        </p:style>
+        <p:txBody>
+          <a:bodyPr rtlCol="0" anchor="ctr"/>
+          <a:lstStyle/>
+          <a:p>
+            <a:pPr algn="ctr"/>
+          </a:p>
+        </p:txBody>
+      </p:sp>
+      <p:sp>
+        <p:nvSpPr>
+          <p:cNvPr id="54" name="TextBox 53"/>
+          <p:cNvSpPr txBox="1"/>
+          <p:nvPr/>
+        </p:nvSpPr>
+        <p:spPr>
+          <a:xfrm>
+            <a:off x="411479" y="5148072"/>
+            <a:ext cx="11365992" cy="201168"/>
+          </a:xfrm>
+          <a:prstGeom prst="rect">
+            <a:avLst/>
+          </a:prstGeom>
+          <a:noFill/>
+        </p:spPr>
+        <p:txBody>
+          <a:bodyPr wrap="square">
+            <a:spAutoFit/>
+          </a:bodyPr>
+          <a:lstStyle/>
+          <a:p>
             <a:pPr algn="l"/>
             <a:r>
               <a:rPr sz="1000" b="0" i="0">
@@ -6797,8 +6793,7 @@
                   <a:srgbClr val="FFFFFF"/>
                 </a:solidFill>
               </a:rPr>
-              <a:t>Organisation journée de production : 9h30–17h30  ·  6h40 de production effective
-Opérations Conquête (nouveaux prospects) vs Fidélisation / Réactivation (anciens donateurs)</a:t>
+              <a:t>Organisation journée : 9h30–17h30 · 6h40 production effective · Conquête vs Fidélisation/Réactivation</a:t>
             </a:r>
           </a:p>
         </p:txBody>
@@ -6836,7 +6831,7 @@
             <a:avLst/>
           </a:prstGeom>
           <a:solidFill>
-            <a:srgbClr val="F0F7F7"/>
+            <a:srgbClr val="005050"/>
           </a:solidFill>
           <a:ln>
             <a:noFill/>
@@ -6873,50 +6868,7 @@
         <p:spPr>
           <a:xfrm>
             <a:off x="0" y="0"/>
-            <a:ext cx="12188952" cy="685800"/>
-          </a:xfrm>
-          <a:prstGeom prst="rect">
-            <a:avLst/>
-          </a:prstGeom>
-          <a:solidFill>
-            <a:srgbClr val="005555"/>
-          </a:solidFill>
-          <a:ln>
-            <a:noFill/>
-          </a:ln>
-        </p:spPr>
-        <p:style>
-          <a:lnRef idx="1">
-            <a:schemeClr val="accent1"/>
-          </a:lnRef>
-          <a:fillRef idx="3">
-            <a:schemeClr val="accent1"/>
-          </a:fillRef>
-          <a:effectRef idx="2">
-            <a:schemeClr val="accent1"/>
-          </a:effectRef>
-          <a:fontRef idx="minor">
-            <a:schemeClr val="lt1"/>
-          </a:fontRef>
-        </p:style>
-        <p:txBody>
-          <a:bodyPr rtlCol="0" anchor="ctr"/>
-          <a:lstStyle/>
-          <a:p>
-            <a:pPr algn="ctr"/>
-          </a:p>
-        </p:txBody>
-      </p:sp>
-      <p:sp>
-        <p:nvSpPr>
-          <p:cNvPr id="4" name="Rectangle 3"/>
-          <p:cNvSpPr/>
-          <p:nvPr/>
-        </p:nvSpPr>
-        <p:spPr>
-          <a:xfrm>
-            <a:off x="0" y="667512"/>
-            <a:ext cx="12188952" cy="45720"/>
+            <a:ext cx="12188952" cy="73152"/>
           </a:xfrm>
           <a:prstGeom prst="rect">
             <a:avLst/>
@@ -6952,48 +6904,14 @@
       </p:sp>
       <p:sp>
         <p:nvSpPr>
-          <p:cNvPr id="5" name="TextBox 4"/>
-          <p:cNvSpPr txBox="1"/>
-          <p:nvPr/>
-        </p:nvSpPr>
-        <p:spPr>
-          <a:xfrm>
-            <a:off x="164592" y="73152"/>
-            <a:ext cx="2011680" cy="347472"/>
-          </a:xfrm>
-          <a:prstGeom prst="rect">
-            <a:avLst/>
-          </a:prstGeom>
-          <a:noFill/>
-        </p:spPr>
-        <p:txBody>
-          <a:bodyPr wrap="square">
-            <a:spAutoFit/>
-          </a:bodyPr>
-          <a:lstStyle/>
-          <a:p>
-            <a:pPr algn="l"/>
-            <a:r>
-              <a:rPr sz="1400" b="1" i="0">
-                <a:solidFill>
-                  <a:srgbClr val="FFFFFF"/>
-                </a:solidFill>
-              </a:rPr>
-              <a:t>SHY-Performance</a:t>
-            </a:r>
-          </a:p>
-        </p:txBody>
-      </p:sp>
-      <p:sp>
-        <p:nvSpPr>
-          <p:cNvPr id="6" name="Rectangle 5"/>
+          <p:cNvPr id="4" name="Rectangle 3"/>
           <p:cNvSpPr/>
           <p:nvPr/>
         </p:nvSpPr>
         <p:spPr>
           <a:xfrm>
-            <a:off x="2286000" y="91440"/>
-            <a:ext cx="36576" cy="502920"/>
+            <a:off x="0" y="6784848"/>
+            <a:ext cx="12188952" cy="73152"/>
           </a:xfrm>
           <a:prstGeom prst="rect">
             <a:avLst/>
@@ -7029,14 +6947,57 @@
       </p:sp>
       <p:sp>
         <p:nvSpPr>
-          <p:cNvPr id="7" name="TextBox 6"/>
+          <p:cNvPr id="5" name="Oval 4"/>
+          <p:cNvSpPr/>
+          <p:nvPr/>
+        </p:nvSpPr>
+        <p:spPr>
+          <a:xfrm>
+            <a:off x="4114800" y="1097280"/>
+            <a:ext cx="3931920" cy="3931920"/>
+          </a:xfrm>
+          <a:prstGeom prst="ellipse">
+            <a:avLst/>
+          </a:prstGeom>
+          <a:solidFill>
+            <a:srgbClr val="006A6A"/>
+          </a:solidFill>
+          <a:ln>
+            <a:noFill/>
+          </a:ln>
+        </p:spPr>
+        <p:style>
+          <a:lnRef idx="1">
+            <a:schemeClr val="accent1"/>
+          </a:lnRef>
+          <a:fillRef idx="3">
+            <a:schemeClr val="accent1"/>
+          </a:fillRef>
+          <a:effectRef idx="2">
+            <a:schemeClr val="accent1"/>
+          </a:effectRef>
+          <a:fontRef idx="minor">
+            <a:schemeClr val="lt1"/>
+          </a:fontRef>
+        </p:style>
+        <p:txBody>
+          <a:bodyPr rtlCol="0" anchor="ctr"/>
+          <a:lstStyle/>
+          <a:p>
+            <a:pPr algn="ctr"/>
+          </a:p>
+        </p:txBody>
+      </p:sp>
+      <p:sp>
+        <p:nvSpPr>
+          <p:cNvPr id="6" name="TextBox 5"/>
           <p:cNvSpPr txBox="1"/>
           <p:nvPr/>
         </p:nvSpPr>
         <p:spPr>
           <a:xfrm>
-            <a:off x="2423160" y="91440"/>
-            <a:ext cx="9235440" cy="502920"/>
+            <a:off x="5029200" y="2011680"/>
+            <a:ext cx="2103120" cy="1371600"/>
           </a:xfrm>
           <a:prstGeom prst="rect">
             <a:avLst/>
@@ -7049,21 +7010,191 @@
           </a:bodyPr>
           <a:lstStyle/>
           <a:p>
-            <a:pPr algn="l"/>
-            <a:r>
-              <a:rPr sz="1600" b="1" i="0">
+            <a:pPr algn="ctr"/>
+            <a:r>
+              <a:rPr sz="4800" b="0" i="0">
                 <a:solidFill>
                   <a:srgbClr val="FFFFFF"/>
                 </a:solidFill>
               </a:rPr>
-              <a:t>Votre Posture Vocale — Ce que le Donateur Perçoit en 3 Secondes</a:t>
+              <a:t>🙏</a:t>
+            </a:r>
+          </a:p>
+        </p:txBody>
+      </p:sp>
+      <p:sp>
+        <p:nvSpPr>
+          <p:cNvPr id="7" name="TextBox 6"/>
+          <p:cNvSpPr txBox="1"/>
+          <p:nvPr/>
+        </p:nvSpPr>
+        <p:spPr>
+          <a:xfrm>
+            <a:off x="1371600" y="1280160"/>
+            <a:ext cx="9418320" cy="1097280"/>
+          </a:xfrm>
+          <a:prstGeom prst="rect">
+            <a:avLst/>
+          </a:prstGeom>
+          <a:noFill/>
+        </p:spPr>
+        <p:txBody>
+          <a:bodyPr wrap="square">
+            <a:spAutoFit/>
+          </a:bodyPr>
+          <a:lstStyle/>
+          <a:p>
+            <a:pPr algn="ctr"/>
+            <a:r>
+              <a:rPr sz="4600" b="1" i="0">
+                <a:solidFill>
+                  <a:srgbClr val="FFFFFF"/>
+                </a:solidFill>
+              </a:rPr>
+              <a:t>Merci à Tous !</a:t>
+            </a:r>
+          </a:p>
+        </p:txBody>
+      </p:sp>
+      <p:sp>
+        <p:nvSpPr>
+          <p:cNvPr id="8" name="TextBox 7"/>
+          <p:cNvSpPr txBox="1"/>
+          <p:nvPr/>
+        </p:nvSpPr>
+        <p:spPr>
+          <a:xfrm>
+            <a:off x="1371600" y="2606040"/>
+            <a:ext cx="9418320" cy="548640"/>
+          </a:xfrm>
+          <a:prstGeom prst="rect">
+            <a:avLst/>
+          </a:prstGeom>
+          <a:noFill/>
+        </p:spPr>
+        <p:txBody>
+          <a:bodyPr wrap="square">
+            <a:spAutoFit/>
+          </a:bodyPr>
+          <a:lstStyle/>
+          <a:p>
+            <a:pPr algn="ctr"/>
+            <a:r>
+              <a:rPr sz="1800" b="0" i="1">
+                <a:solidFill>
+                  <a:srgbClr val="CCEEEE"/>
+                </a:solidFill>
+              </a:rPr>
+              <a:t>Votre engagement fait la différence pour les enfants du monde entier.</a:t>
+            </a:r>
+          </a:p>
+        </p:txBody>
+      </p:sp>
+      <p:sp>
+        <p:nvSpPr>
+          <p:cNvPr id="9" name="TextBox 8"/>
+          <p:cNvSpPr txBox="1"/>
+          <p:nvPr/>
+        </p:nvSpPr>
+        <p:spPr>
+          <a:xfrm>
+            <a:off x="1371600" y="3246120"/>
+            <a:ext cx="9418320" cy="347472"/>
+          </a:xfrm>
+          <a:prstGeom prst="rect">
+            <a:avLst/>
+          </a:prstGeom>
+          <a:noFill/>
+        </p:spPr>
+        <p:txBody>
+          <a:bodyPr wrap="square">
+            <a:spAutoFit/>
+          </a:bodyPr>
+          <a:lstStyle/>
+          <a:p>
+            <a:pPr algn="ctr"/>
+            <a:r>
+              <a:rPr sz="1200" b="0" i="0">
+                <a:solidFill>
+                  <a:srgbClr val="88DDDD"/>
+                </a:solidFill>
+              </a:rPr>
+              <a:t>BOOK J1  ·  Journée 1  ·  UNICEF France × SHY-Performance</a:t>
+            </a:r>
+          </a:p>
+        </p:txBody>
+      </p:sp>
+      <p:sp>
+        <p:nvSpPr>
+          <p:cNvPr id="10" name="TextBox 9"/>
+          <p:cNvSpPr txBox="1"/>
+          <p:nvPr/>
+        </p:nvSpPr>
+        <p:spPr>
+          <a:xfrm>
+            <a:off x="1828800" y="3749039"/>
+            <a:ext cx="8531352" cy="457200"/>
+          </a:xfrm>
+          <a:prstGeom prst="rect">
+            <a:avLst/>
+          </a:prstGeom>
+          <a:noFill/>
+        </p:spPr>
+        <p:txBody>
+          <a:bodyPr wrap="square">
+            <a:spAutoFit/>
+          </a:bodyPr>
+          <a:lstStyle/>
+          <a:p>
+            <a:pPr algn="ctr"/>
+            <a:r>
+              <a:rPr sz="1400" b="0" i="1">
+                <a:solidFill>
+                  <a:srgbClr val="AADDDD"/>
+                </a:solidFill>
+              </a:rPr>
+              <a:t>« Le refus d'aujourd'hui peut être le don de demain »</a:t>
+            </a:r>
+          </a:p>
+        </p:txBody>
+      </p:sp>
+      <p:sp>
+        <p:nvSpPr>
+          <p:cNvPr id="11" name="TextBox 10"/>
+          <p:cNvSpPr txBox="1"/>
+          <p:nvPr/>
+        </p:nvSpPr>
+        <p:spPr>
+          <a:xfrm>
+            <a:off x="0" y="4572000"/>
+            <a:ext cx="12188952" cy="329184"/>
+          </a:xfrm>
+          <a:prstGeom prst="rect">
+            <a:avLst/>
+          </a:prstGeom>
+          <a:noFill/>
+        </p:spPr>
+        <p:txBody>
+          <a:bodyPr wrap="square">
+            <a:spAutoFit/>
+          </a:bodyPr>
+          <a:lstStyle/>
+          <a:p>
+            <a:pPr algn="ctr"/>
+            <a:r>
+              <a:rPr sz="1000" b="0" i="0">
+                <a:solidFill>
+                  <a:srgbClr val="88DDDD"/>
+                </a:solidFill>
+              </a:rPr>
+              <a:t>SHY-Performance  ·  Formation FIM  ·  UNICEF France  ·  V6-01062026SHY-TE</a:t>
             </a:r>
           </a:p>
         </p:txBody>
       </p:sp>
       <p:pic>
         <p:nvPicPr>
-          <p:cNvPr id="8" name="Picture 7" descr="shy_logo_v2.png"/>
+          <p:cNvPr id="12" name="Picture 11" descr="shy_logo_v2.png"/>
           <p:cNvPicPr>
             <a:picLocks noChangeAspect="1"/>
           </p:cNvPicPr>
@@ -7077,8 +7208,8 @@
         </p:blipFill>
         <p:spPr>
           <a:xfrm>
-            <a:off x="11247120" y="0"/>
-            <a:ext cx="822960" cy="676656"/>
+            <a:off x="5669280" y="5120640"/>
+            <a:ext cx="914400" cy="896112"/>
           </a:xfrm>
           <a:prstGeom prst="rect">
             <a:avLst/>
@@ -7087,57 +7218,14 @@
       </p:pic>
       <p:sp>
         <p:nvSpPr>
-          <p:cNvPr id="9" name="Rectangle 8"/>
-          <p:cNvSpPr/>
-          <p:nvPr/>
-        </p:nvSpPr>
-        <p:spPr>
-          <a:xfrm>
-            <a:off x="0" y="6492240"/>
-            <a:ext cx="12188952" cy="365760"/>
-          </a:xfrm>
-          <a:prstGeom prst="rect">
-            <a:avLst/>
-          </a:prstGeom>
-          <a:solidFill>
-            <a:srgbClr val="005555"/>
-          </a:solidFill>
-          <a:ln>
-            <a:noFill/>
-          </a:ln>
-        </p:spPr>
-        <p:style>
-          <a:lnRef idx="1">
-            <a:schemeClr val="accent1"/>
-          </a:lnRef>
-          <a:fillRef idx="3">
-            <a:schemeClr val="accent1"/>
-          </a:fillRef>
-          <a:effectRef idx="2">
-            <a:schemeClr val="accent1"/>
-          </a:effectRef>
-          <a:fontRef idx="minor">
-            <a:schemeClr val="lt1"/>
-          </a:fontRef>
-        </p:style>
-        <p:txBody>
-          <a:bodyPr rtlCol="0" anchor="ctr"/>
-          <a:lstStyle/>
-          <a:p>
-            <a:pPr algn="ctr"/>
-          </a:p>
-        </p:txBody>
-      </p:sp>
-      <p:sp>
-        <p:nvSpPr>
-          <p:cNvPr id="10" name="TextBox 9"/>
+          <p:cNvPr id="13" name="TextBox 12"/>
           <p:cNvSpPr txBox="1"/>
           <p:nvPr/>
         </p:nvSpPr>
         <p:spPr>
           <a:xfrm>
-            <a:off x="0" y="6519672"/>
-            <a:ext cx="12188952" cy="274320"/>
+            <a:off x="0" y="6035040"/>
+            <a:ext cx="12188952" cy="329184"/>
           </a:xfrm>
           <a:prstGeom prst="rect">
             <a:avLst/>
@@ -7152,1033 +7240,12 @@
           <a:p>
             <a:pPr algn="ctr"/>
             <a:r>
-              <a:rPr sz="800" b="0" i="0">
+              <a:rPr sz="1000" b="1" i="0">
                 <a:solidFill>
                   <a:srgbClr val="FFFFFF"/>
                 </a:solidFill>
               </a:rPr>
-              <a:t>SHY-Performance  ·  Formation FIM  ·  UNICEF France  ·  V6-01062026SHY-TE</a:t>
-            </a:r>
-          </a:p>
-        </p:txBody>
-      </p:sp>
-      <p:sp>
-        <p:nvSpPr>
-          <p:cNvPr id="11" name="Rectangle 10"/>
-          <p:cNvSpPr/>
-          <p:nvPr/>
-        </p:nvSpPr>
-        <p:spPr>
-          <a:xfrm>
-            <a:off x="274320" y="804672"/>
-            <a:ext cx="5650992" cy="329184"/>
-          </a:xfrm>
-          <a:prstGeom prst="rect">
-            <a:avLst/>
-          </a:prstGeom>
-          <a:solidFill>
-            <a:srgbClr val="008080"/>
-          </a:solidFill>
-          <a:ln>
-            <a:noFill/>
-          </a:ln>
-        </p:spPr>
-        <p:style>
-          <a:lnRef idx="1">
-            <a:schemeClr val="accent1"/>
-          </a:lnRef>
-          <a:fillRef idx="3">
-            <a:schemeClr val="accent1"/>
-          </a:fillRef>
-          <a:effectRef idx="2">
-            <a:schemeClr val="accent1"/>
-          </a:effectRef>
-          <a:fontRef idx="minor">
-            <a:schemeClr val="lt1"/>
-          </a:fontRef>
-        </p:style>
-        <p:txBody>
-          <a:bodyPr rtlCol="0" anchor="ctr"/>
-          <a:lstStyle/>
-          <a:p>
-            <a:pPr algn="ctr"/>
-          </a:p>
-        </p:txBody>
-      </p:sp>
-      <p:sp>
-        <p:nvSpPr>
-          <p:cNvPr id="12" name="TextBox 11"/>
-          <p:cNvSpPr txBox="1"/>
-          <p:nvPr/>
-        </p:nvSpPr>
-        <p:spPr>
-          <a:xfrm>
-            <a:off x="384048" y="850392"/>
-            <a:ext cx="5468112" cy="256032"/>
-          </a:xfrm>
-          <a:prstGeom prst="rect">
-            <a:avLst/>
-          </a:prstGeom>
-          <a:noFill/>
-        </p:spPr>
-        <p:txBody>
-          <a:bodyPr wrap="square">
-            <a:spAutoFit/>
-          </a:bodyPr>
-          <a:lstStyle/>
-          <a:p>
-            <a:pPr algn="l"/>
-            <a:r>
-              <a:rPr sz="1000" b="1" i="0">
-                <a:solidFill>
-                  <a:srgbClr val="FFFFFF"/>
-                </a:solidFill>
-              </a:rPr>
-              <a:t>Ce qui crée la confiance dès l'accroche</a:t>
-            </a:r>
-          </a:p>
-        </p:txBody>
-      </p:sp>
-      <p:sp>
-        <p:nvSpPr>
-          <p:cNvPr id="13" name="Rectangle 12"/>
-          <p:cNvSpPr/>
-          <p:nvPr/>
-        </p:nvSpPr>
-        <p:spPr>
-          <a:xfrm>
-            <a:off x="274320" y="1152144"/>
-            <a:ext cx="5650992" cy="402336"/>
-          </a:xfrm>
-          <a:prstGeom prst="rect">
-            <a:avLst/>
-          </a:prstGeom>
-          <a:solidFill>
-            <a:srgbClr val="FFFFFF"/>
-          </a:solidFill>
-          <a:ln w="5080">
-            <a:solidFill>
-              <a:srgbClr val="008080"/>
-            </a:solidFill>
-          </a:ln>
-        </p:spPr>
-        <p:style>
-          <a:lnRef idx="1">
-            <a:schemeClr val="accent1"/>
-          </a:lnRef>
-          <a:fillRef idx="3">
-            <a:schemeClr val="accent1"/>
-          </a:fillRef>
-          <a:effectRef idx="2">
-            <a:schemeClr val="accent1"/>
-          </a:effectRef>
-          <a:fontRef idx="minor">
-            <a:schemeClr val="lt1"/>
-          </a:fontRef>
-        </p:style>
-        <p:txBody>
-          <a:bodyPr rtlCol="0" anchor="ctr"/>
-          <a:lstStyle/>
-          <a:p>
-            <a:pPr algn="ctr"/>
-          </a:p>
-        </p:txBody>
-      </p:sp>
-      <p:sp>
-        <p:nvSpPr>
-          <p:cNvPr id="14" name="TextBox 13"/>
-          <p:cNvSpPr txBox="1"/>
-          <p:nvPr/>
-        </p:nvSpPr>
-        <p:spPr>
-          <a:xfrm>
-            <a:off x="402336" y="1207008"/>
-            <a:ext cx="5431536" cy="310896"/>
-          </a:xfrm>
-          <a:prstGeom prst="rect">
-            <a:avLst/>
-          </a:prstGeom>
-          <a:noFill/>
-        </p:spPr>
-        <p:txBody>
-          <a:bodyPr wrap="square">
-            <a:spAutoFit/>
-          </a:bodyPr>
-          <a:lstStyle/>
-          <a:p>
-            <a:pPr algn="l"/>
-            <a:r>
-              <a:rPr sz="1000" b="0" i="0">
-                <a:solidFill>
-                  <a:srgbClr val="1A1A1A"/>
-                </a:solidFill>
-              </a:rPr>
-              <a:t>• Sourire audible dès le mot 'Bonjour' — le prospect l'entend vraiment</a:t>
-            </a:r>
-          </a:p>
-        </p:txBody>
-      </p:sp>
-      <p:sp>
-        <p:nvSpPr>
-          <p:cNvPr id="15" name="Rectangle 14"/>
-          <p:cNvSpPr/>
-          <p:nvPr/>
-        </p:nvSpPr>
-        <p:spPr>
-          <a:xfrm>
-            <a:off x="274320" y="1572768"/>
-            <a:ext cx="5650992" cy="402336"/>
-          </a:xfrm>
-          <a:prstGeom prst="rect">
-            <a:avLst/>
-          </a:prstGeom>
-          <a:solidFill>
-            <a:srgbClr val="F0F7F7"/>
-          </a:solidFill>
-          <a:ln w="5080">
-            <a:solidFill>
-              <a:srgbClr val="008080"/>
-            </a:solidFill>
-          </a:ln>
-        </p:spPr>
-        <p:style>
-          <a:lnRef idx="1">
-            <a:schemeClr val="accent1"/>
-          </a:lnRef>
-          <a:fillRef idx="3">
-            <a:schemeClr val="accent1"/>
-          </a:fillRef>
-          <a:effectRef idx="2">
-            <a:schemeClr val="accent1"/>
-          </a:effectRef>
-          <a:fontRef idx="minor">
-            <a:schemeClr val="lt1"/>
-          </a:fontRef>
-        </p:style>
-        <p:txBody>
-          <a:bodyPr rtlCol="0" anchor="ctr"/>
-          <a:lstStyle/>
-          <a:p>
-            <a:pPr algn="ctr"/>
-          </a:p>
-        </p:txBody>
-      </p:sp>
-      <p:sp>
-        <p:nvSpPr>
-          <p:cNvPr id="16" name="TextBox 15"/>
-          <p:cNvSpPr txBox="1"/>
-          <p:nvPr/>
-        </p:nvSpPr>
-        <p:spPr>
-          <a:xfrm>
-            <a:off x="402336" y="1627632"/>
-            <a:ext cx="5431536" cy="310896"/>
-          </a:xfrm>
-          <a:prstGeom prst="rect">
-            <a:avLst/>
-          </a:prstGeom>
-          <a:noFill/>
-        </p:spPr>
-        <p:txBody>
-          <a:bodyPr wrap="square">
-            <a:spAutoFit/>
-          </a:bodyPr>
-          <a:lstStyle/>
-          <a:p>
-            <a:pPr algn="l"/>
-            <a:r>
-              <a:rPr sz="1000" b="0" i="0">
-                <a:solidFill>
-                  <a:srgbClr val="1A1A1A"/>
-                </a:solidFill>
-              </a:rPr>
-              <a:t>• Ton chaleureux et naturel — ni trop commercial, ni trop distant</a:t>
-            </a:r>
-          </a:p>
-        </p:txBody>
-      </p:sp>
-      <p:sp>
-        <p:nvSpPr>
-          <p:cNvPr id="17" name="Rectangle 16"/>
-          <p:cNvSpPr/>
-          <p:nvPr/>
-        </p:nvSpPr>
-        <p:spPr>
-          <a:xfrm>
-            <a:off x="274320" y="1993392"/>
-            <a:ext cx="5650992" cy="402336"/>
-          </a:xfrm>
-          <a:prstGeom prst="rect">
-            <a:avLst/>
-          </a:prstGeom>
-          <a:solidFill>
-            <a:srgbClr val="FFFFFF"/>
-          </a:solidFill>
-          <a:ln w="5080">
-            <a:solidFill>
-              <a:srgbClr val="008080"/>
-            </a:solidFill>
-          </a:ln>
-        </p:spPr>
-        <p:style>
-          <a:lnRef idx="1">
-            <a:schemeClr val="accent1"/>
-          </a:lnRef>
-          <a:fillRef idx="3">
-            <a:schemeClr val="accent1"/>
-          </a:fillRef>
-          <a:effectRef idx="2">
-            <a:schemeClr val="accent1"/>
-          </a:effectRef>
-          <a:fontRef idx="minor">
-            <a:schemeClr val="lt1"/>
-          </a:fontRef>
-        </p:style>
-        <p:txBody>
-          <a:bodyPr rtlCol="0" anchor="ctr"/>
-          <a:lstStyle/>
-          <a:p>
-            <a:pPr algn="ctr"/>
-          </a:p>
-        </p:txBody>
-      </p:sp>
-      <p:sp>
-        <p:nvSpPr>
-          <p:cNvPr id="18" name="TextBox 17"/>
-          <p:cNvSpPr txBox="1"/>
-          <p:nvPr/>
-        </p:nvSpPr>
-        <p:spPr>
-          <a:xfrm>
-            <a:off x="402336" y="2048256"/>
-            <a:ext cx="5431536" cy="310896"/>
-          </a:xfrm>
-          <a:prstGeom prst="rect">
-            <a:avLst/>
-          </a:prstGeom>
-          <a:noFill/>
-        </p:spPr>
-        <p:txBody>
-          <a:bodyPr wrap="square">
-            <a:spAutoFit/>
-          </a:bodyPr>
-          <a:lstStyle/>
-          <a:p>
-            <a:pPr algn="l"/>
-            <a:r>
-              <a:rPr sz="1000" b="0" i="0">
-                <a:solidFill>
-                  <a:srgbClr val="1A1A1A"/>
-                </a:solidFill>
-              </a:rPr>
-              <a:t>• Débit posé : 130–150 mots/minute — pas de précipitation</a:t>
-            </a:r>
-          </a:p>
-        </p:txBody>
-      </p:sp>
-      <p:sp>
-        <p:nvSpPr>
-          <p:cNvPr id="19" name="Rectangle 18"/>
-          <p:cNvSpPr/>
-          <p:nvPr/>
-        </p:nvSpPr>
-        <p:spPr>
-          <a:xfrm>
-            <a:off x="274320" y="2414016"/>
-            <a:ext cx="5650992" cy="402336"/>
-          </a:xfrm>
-          <a:prstGeom prst="rect">
-            <a:avLst/>
-          </a:prstGeom>
-          <a:solidFill>
-            <a:srgbClr val="F0F7F7"/>
-          </a:solidFill>
-          <a:ln w="5080">
-            <a:solidFill>
-              <a:srgbClr val="008080"/>
-            </a:solidFill>
-          </a:ln>
-        </p:spPr>
-        <p:style>
-          <a:lnRef idx="1">
-            <a:schemeClr val="accent1"/>
-          </a:lnRef>
-          <a:fillRef idx="3">
-            <a:schemeClr val="accent1"/>
-          </a:fillRef>
-          <a:effectRef idx="2">
-            <a:schemeClr val="accent1"/>
-          </a:effectRef>
-          <a:fontRef idx="minor">
-            <a:schemeClr val="lt1"/>
-          </a:fontRef>
-        </p:style>
-        <p:txBody>
-          <a:bodyPr rtlCol="0" anchor="ctr"/>
-          <a:lstStyle/>
-          <a:p>
-            <a:pPr algn="ctr"/>
-          </a:p>
-        </p:txBody>
-      </p:sp>
-      <p:sp>
-        <p:nvSpPr>
-          <p:cNvPr id="20" name="TextBox 19"/>
-          <p:cNvSpPr txBox="1"/>
-          <p:nvPr/>
-        </p:nvSpPr>
-        <p:spPr>
-          <a:xfrm>
-            <a:off x="402336" y="2468880"/>
-            <a:ext cx="5431536" cy="310896"/>
-          </a:xfrm>
-          <a:prstGeom prst="rect">
-            <a:avLst/>
-          </a:prstGeom>
-          <a:noFill/>
-        </p:spPr>
-        <p:txBody>
-          <a:bodyPr wrap="square">
-            <a:spAutoFit/>
-          </a:bodyPr>
-          <a:lstStyle/>
-          <a:p>
-            <a:pPr algn="l"/>
-            <a:r>
-              <a:rPr sz="1000" b="0" i="0">
-                <a:solidFill>
-                  <a:srgbClr val="1A1A1A"/>
-                </a:solidFill>
-              </a:rPr>
-              <a:t>• Articulation claire — chaque mot compte au téléphone</a:t>
-            </a:r>
-          </a:p>
-        </p:txBody>
-      </p:sp>
-      <p:sp>
-        <p:nvSpPr>
-          <p:cNvPr id="21" name="Rectangle 20"/>
-          <p:cNvSpPr/>
-          <p:nvPr/>
-        </p:nvSpPr>
-        <p:spPr>
-          <a:xfrm>
-            <a:off x="274320" y="2834640"/>
-            <a:ext cx="5650992" cy="402336"/>
-          </a:xfrm>
-          <a:prstGeom prst="rect">
-            <a:avLst/>
-          </a:prstGeom>
-          <a:solidFill>
-            <a:srgbClr val="FFFFFF"/>
-          </a:solidFill>
-          <a:ln w="5080">
-            <a:solidFill>
-              <a:srgbClr val="008080"/>
-            </a:solidFill>
-          </a:ln>
-        </p:spPr>
-        <p:style>
-          <a:lnRef idx="1">
-            <a:schemeClr val="accent1"/>
-          </a:lnRef>
-          <a:fillRef idx="3">
-            <a:schemeClr val="accent1"/>
-          </a:fillRef>
-          <a:effectRef idx="2">
-            <a:schemeClr val="accent1"/>
-          </a:effectRef>
-          <a:fontRef idx="minor">
-            <a:schemeClr val="lt1"/>
-          </a:fontRef>
-        </p:style>
-        <p:txBody>
-          <a:bodyPr rtlCol="0" anchor="ctr"/>
-          <a:lstStyle/>
-          <a:p>
-            <a:pPr algn="ctr"/>
-          </a:p>
-        </p:txBody>
-      </p:sp>
-      <p:sp>
-        <p:nvSpPr>
-          <p:cNvPr id="22" name="TextBox 21"/>
-          <p:cNvSpPr txBox="1"/>
-          <p:nvPr/>
-        </p:nvSpPr>
-        <p:spPr>
-          <a:xfrm>
-            <a:off x="402336" y="2889504"/>
-            <a:ext cx="5431536" cy="310896"/>
-          </a:xfrm>
-          <a:prstGeom prst="rect">
-            <a:avLst/>
-          </a:prstGeom>
-          <a:noFill/>
-        </p:spPr>
-        <p:txBody>
-          <a:bodyPr wrap="square">
-            <a:spAutoFit/>
-          </a:bodyPr>
-          <a:lstStyle/>
-          <a:p>
-            <a:pPr algn="l"/>
-            <a:r>
-              <a:rPr sz="1000" b="0" i="0">
-                <a:solidFill>
-                  <a:srgbClr val="1A1A1A"/>
-                </a:solidFill>
-              </a:rPr>
-              <a:t>• Conviction sincère — vous croyez en la mission UNICEF</a:t>
-            </a:r>
-          </a:p>
-        </p:txBody>
-      </p:sp>
-      <p:sp>
-        <p:nvSpPr>
-          <p:cNvPr id="23" name="Rectangle 22"/>
-          <p:cNvSpPr/>
-          <p:nvPr/>
-        </p:nvSpPr>
-        <p:spPr>
-          <a:xfrm>
-            <a:off x="6245352" y="804672"/>
-            <a:ext cx="5650992" cy="329184"/>
-          </a:xfrm>
-          <a:prstGeom prst="rect">
-            <a:avLst/>
-          </a:prstGeom>
-          <a:solidFill>
-            <a:srgbClr val="008080"/>
-          </a:solidFill>
-          <a:ln>
-            <a:noFill/>
-          </a:ln>
-        </p:spPr>
-        <p:style>
-          <a:lnRef idx="1">
-            <a:schemeClr val="accent1"/>
-          </a:lnRef>
-          <a:fillRef idx="3">
-            <a:schemeClr val="accent1"/>
-          </a:fillRef>
-          <a:effectRef idx="2">
-            <a:schemeClr val="accent1"/>
-          </a:effectRef>
-          <a:fontRef idx="minor">
-            <a:schemeClr val="lt1"/>
-          </a:fontRef>
-        </p:style>
-        <p:txBody>
-          <a:bodyPr rtlCol="0" anchor="ctr"/>
-          <a:lstStyle/>
-          <a:p>
-            <a:pPr algn="ctr"/>
-          </a:p>
-        </p:txBody>
-      </p:sp>
-      <p:sp>
-        <p:nvSpPr>
-          <p:cNvPr id="24" name="TextBox 23"/>
-          <p:cNvSpPr txBox="1"/>
-          <p:nvPr/>
-        </p:nvSpPr>
-        <p:spPr>
-          <a:xfrm>
-            <a:off x="6355080" y="850392"/>
-            <a:ext cx="5468112" cy="256032"/>
-          </a:xfrm>
-          <a:prstGeom prst="rect">
-            <a:avLst/>
-          </a:prstGeom>
-          <a:noFill/>
-        </p:spPr>
-        <p:txBody>
-          <a:bodyPr wrap="square">
-            <a:spAutoFit/>
-          </a:bodyPr>
-          <a:lstStyle/>
-          <a:p>
-            <a:pPr algn="l"/>
-            <a:r>
-              <a:rPr sz="1000" b="1" i="0">
-                <a:solidFill>
-                  <a:srgbClr val="FFFFFF"/>
-                </a:solidFill>
-              </a:rPr>
-              <a:t>Ce qui fait raccrocher le donateur</a:t>
-            </a:r>
-          </a:p>
-        </p:txBody>
-      </p:sp>
-      <p:sp>
-        <p:nvSpPr>
-          <p:cNvPr id="25" name="Rectangle 24"/>
-          <p:cNvSpPr/>
-          <p:nvPr/>
-        </p:nvSpPr>
-        <p:spPr>
-          <a:xfrm>
-            <a:off x="6245352" y="1152144"/>
-            <a:ext cx="5650992" cy="402336"/>
-          </a:xfrm>
-          <a:prstGeom prst="rect">
-            <a:avLst/>
-          </a:prstGeom>
-          <a:solidFill>
-            <a:srgbClr val="FFFFFF"/>
-          </a:solidFill>
-          <a:ln w="5080">
-            <a:solidFill>
-              <a:srgbClr val="008080"/>
-            </a:solidFill>
-          </a:ln>
-        </p:spPr>
-        <p:style>
-          <a:lnRef idx="1">
-            <a:schemeClr val="accent1"/>
-          </a:lnRef>
-          <a:fillRef idx="3">
-            <a:schemeClr val="accent1"/>
-          </a:fillRef>
-          <a:effectRef idx="2">
-            <a:schemeClr val="accent1"/>
-          </a:effectRef>
-          <a:fontRef idx="minor">
-            <a:schemeClr val="lt1"/>
-          </a:fontRef>
-        </p:style>
-        <p:txBody>
-          <a:bodyPr rtlCol="0" anchor="ctr"/>
-          <a:lstStyle/>
-          <a:p>
-            <a:pPr algn="ctr"/>
-          </a:p>
-        </p:txBody>
-      </p:sp>
-      <p:sp>
-        <p:nvSpPr>
-          <p:cNvPr id="26" name="TextBox 25"/>
-          <p:cNvSpPr txBox="1"/>
-          <p:nvPr/>
-        </p:nvSpPr>
-        <p:spPr>
-          <a:xfrm>
-            <a:off x="6373368" y="1207008"/>
-            <a:ext cx="5431536" cy="310896"/>
-          </a:xfrm>
-          <a:prstGeom prst="rect">
-            <a:avLst/>
-          </a:prstGeom>
-          <a:noFill/>
-        </p:spPr>
-        <p:txBody>
-          <a:bodyPr wrap="square">
-            <a:spAutoFit/>
-          </a:bodyPr>
-          <a:lstStyle/>
-          <a:p>
-            <a:pPr algn="l"/>
-            <a:r>
-              <a:rPr sz="1000" b="0" i="0">
-                <a:solidFill>
-                  <a:srgbClr val="1A1A1A"/>
-                </a:solidFill>
-              </a:rPr>
-              <a:t>• Voix monocorde ou mécanique — lecture évidente du script</a:t>
-            </a:r>
-          </a:p>
-        </p:txBody>
-      </p:sp>
-      <p:sp>
-        <p:nvSpPr>
-          <p:cNvPr id="27" name="Rectangle 26"/>
-          <p:cNvSpPr/>
-          <p:nvPr/>
-        </p:nvSpPr>
-        <p:spPr>
-          <a:xfrm>
-            <a:off x="6245352" y="1572768"/>
-            <a:ext cx="5650992" cy="402336"/>
-          </a:xfrm>
-          <a:prstGeom prst="rect">
-            <a:avLst/>
-          </a:prstGeom>
-          <a:solidFill>
-            <a:srgbClr val="F0F7F7"/>
-          </a:solidFill>
-          <a:ln w="5080">
-            <a:solidFill>
-              <a:srgbClr val="008080"/>
-            </a:solidFill>
-          </a:ln>
-        </p:spPr>
-        <p:style>
-          <a:lnRef idx="1">
-            <a:schemeClr val="accent1"/>
-          </a:lnRef>
-          <a:fillRef idx="3">
-            <a:schemeClr val="accent1"/>
-          </a:fillRef>
-          <a:effectRef idx="2">
-            <a:schemeClr val="accent1"/>
-          </a:effectRef>
-          <a:fontRef idx="minor">
-            <a:schemeClr val="lt1"/>
-          </a:fontRef>
-        </p:style>
-        <p:txBody>
-          <a:bodyPr rtlCol="0" anchor="ctr"/>
-          <a:lstStyle/>
-          <a:p>
-            <a:pPr algn="ctr"/>
-          </a:p>
-        </p:txBody>
-      </p:sp>
-      <p:sp>
-        <p:nvSpPr>
-          <p:cNvPr id="28" name="TextBox 27"/>
-          <p:cNvSpPr txBox="1"/>
-          <p:nvPr/>
-        </p:nvSpPr>
-        <p:spPr>
-          <a:xfrm>
-            <a:off x="6373368" y="1627632"/>
-            <a:ext cx="5431536" cy="310896"/>
-          </a:xfrm>
-          <a:prstGeom prst="rect">
-            <a:avLst/>
-          </a:prstGeom>
-          <a:noFill/>
-        </p:spPr>
-        <p:txBody>
-          <a:bodyPr wrap="square">
-            <a:spAutoFit/>
-          </a:bodyPr>
-          <a:lstStyle/>
-          <a:p>
-            <a:pPr algn="l"/>
-            <a:r>
-              <a:rPr sz="1000" b="0" i="0">
-                <a:solidFill>
-                  <a:srgbClr val="1A1A1A"/>
-                </a:solidFill>
-              </a:rPr>
-              <a:t>• Débit trop rapide — le prospect décroche mentalement</a:t>
-            </a:r>
-          </a:p>
-        </p:txBody>
-      </p:sp>
-      <p:sp>
-        <p:nvSpPr>
-          <p:cNvPr id="29" name="Rectangle 28"/>
-          <p:cNvSpPr/>
-          <p:nvPr/>
-        </p:nvSpPr>
-        <p:spPr>
-          <a:xfrm>
-            <a:off x="6245352" y="1993392"/>
-            <a:ext cx="5650992" cy="402336"/>
-          </a:xfrm>
-          <a:prstGeom prst="rect">
-            <a:avLst/>
-          </a:prstGeom>
-          <a:solidFill>
-            <a:srgbClr val="FFFFFF"/>
-          </a:solidFill>
-          <a:ln w="5080">
-            <a:solidFill>
-              <a:srgbClr val="008080"/>
-            </a:solidFill>
-          </a:ln>
-        </p:spPr>
-        <p:style>
-          <a:lnRef idx="1">
-            <a:schemeClr val="accent1"/>
-          </a:lnRef>
-          <a:fillRef idx="3">
-            <a:schemeClr val="accent1"/>
-          </a:fillRef>
-          <a:effectRef idx="2">
-            <a:schemeClr val="accent1"/>
-          </a:effectRef>
-          <a:fontRef idx="minor">
-            <a:schemeClr val="lt1"/>
-          </a:fontRef>
-        </p:style>
-        <p:txBody>
-          <a:bodyPr rtlCol="0" anchor="ctr"/>
-          <a:lstStyle/>
-          <a:p>
-            <a:pPr algn="ctr"/>
-          </a:p>
-        </p:txBody>
-      </p:sp>
-      <p:sp>
-        <p:nvSpPr>
-          <p:cNvPr id="30" name="TextBox 29"/>
-          <p:cNvSpPr txBox="1"/>
-          <p:nvPr/>
-        </p:nvSpPr>
-        <p:spPr>
-          <a:xfrm>
-            <a:off x="6373368" y="2048256"/>
-            <a:ext cx="5431536" cy="310896"/>
-          </a:xfrm>
-          <a:prstGeom prst="rect">
-            <a:avLst/>
-          </a:prstGeom>
-          <a:noFill/>
-        </p:spPr>
-        <p:txBody>
-          <a:bodyPr wrap="square">
-            <a:spAutoFit/>
-          </a:bodyPr>
-          <a:lstStyle/>
-          <a:p>
-            <a:pPr algn="l"/>
-            <a:r>
-              <a:rPr sz="1000" b="0" i="0">
-                <a:solidFill>
-                  <a:srgbClr val="1A1A1A"/>
-                </a:solidFill>
-              </a:rPr>
-              <a:t>• Hésitations répétées : 'euh…', 'donc…', 'voilà…'</a:t>
-            </a:r>
-          </a:p>
-        </p:txBody>
-      </p:sp>
-      <p:sp>
-        <p:nvSpPr>
-          <p:cNvPr id="31" name="Rectangle 30"/>
-          <p:cNvSpPr/>
-          <p:nvPr/>
-        </p:nvSpPr>
-        <p:spPr>
-          <a:xfrm>
-            <a:off x="6245352" y="2414016"/>
-            <a:ext cx="5650992" cy="402336"/>
-          </a:xfrm>
-          <a:prstGeom prst="rect">
-            <a:avLst/>
-          </a:prstGeom>
-          <a:solidFill>
-            <a:srgbClr val="F0F7F7"/>
-          </a:solidFill>
-          <a:ln w="5080">
-            <a:solidFill>
-              <a:srgbClr val="008080"/>
-            </a:solidFill>
-          </a:ln>
-        </p:spPr>
-        <p:style>
-          <a:lnRef idx="1">
-            <a:schemeClr val="accent1"/>
-          </a:lnRef>
-          <a:fillRef idx="3">
-            <a:schemeClr val="accent1"/>
-          </a:fillRef>
-          <a:effectRef idx="2">
-            <a:schemeClr val="accent1"/>
-          </a:effectRef>
-          <a:fontRef idx="minor">
-            <a:schemeClr val="lt1"/>
-          </a:fontRef>
-        </p:style>
-        <p:txBody>
-          <a:bodyPr rtlCol="0" anchor="ctr"/>
-          <a:lstStyle/>
-          <a:p>
-            <a:pPr algn="ctr"/>
-          </a:p>
-        </p:txBody>
-      </p:sp>
-      <p:sp>
-        <p:nvSpPr>
-          <p:cNvPr id="32" name="TextBox 31"/>
-          <p:cNvSpPr txBox="1"/>
-          <p:nvPr/>
-        </p:nvSpPr>
-        <p:spPr>
-          <a:xfrm>
-            <a:off x="6373368" y="2468880"/>
-            <a:ext cx="5431536" cy="310896"/>
-          </a:xfrm>
-          <a:prstGeom prst="rect">
-            <a:avLst/>
-          </a:prstGeom>
-          <a:noFill/>
-        </p:spPr>
-        <p:txBody>
-          <a:bodyPr wrap="square">
-            <a:spAutoFit/>
-          </a:bodyPr>
-          <a:lstStyle/>
-          <a:p>
-            <a:pPr algn="l"/>
-            <a:r>
-              <a:rPr sz="1000" b="0" i="0">
-                <a:solidFill>
-                  <a:srgbClr val="1A1A1A"/>
-                </a:solidFill>
-              </a:rPr>
-              <a:t>• Ton défensif face aux premières objections</a:t>
-            </a:r>
-          </a:p>
-        </p:txBody>
-      </p:sp>
-      <p:sp>
-        <p:nvSpPr>
-          <p:cNvPr id="33" name="Rectangle 32"/>
-          <p:cNvSpPr/>
-          <p:nvPr/>
-        </p:nvSpPr>
-        <p:spPr>
-          <a:xfrm>
-            <a:off x="6245352" y="2834640"/>
-            <a:ext cx="5650992" cy="402336"/>
-          </a:xfrm>
-          <a:prstGeom prst="rect">
-            <a:avLst/>
-          </a:prstGeom>
-          <a:solidFill>
-            <a:srgbClr val="FFFFFF"/>
-          </a:solidFill>
-          <a:ln w="5080">
-            <a:solidFill>
-              <a:srgbClr val="008080"/>
-            </a:solidFill>
-          </a:ln>
-        </p:spPr>
-        <p:style>
-          <a:lnRef idx="1">
-            <a:schemeClr val="accent1"/>
-          </a:lnRef>
-          <a:fillRef idx="3">
-            <a:schemeClr val="accent1"/>
-          </a:fillRef>
-          <a:effectRef idx="2">
-            <a:schemeClr val="accent1"/>
-          </a:effectRef>
-          <a:fontRef idx="minor">
-            <a:schemeClr val="lt1"/>
-          </a:fontRef>
-        </p:style>
-        <p:txBody>
-          <a:bodyPr rtlCol="0" anchor="ctr"/>
-          <a:lstStyle/>
-          <a:p>
-            <a:pPr algn="ctr"/>
-          </a:p>
-        </p:txBody>
-      </p:sp>
-      <p:sp>
-        <p:nvSpPr>
-          <p:cNvPr id="34" name="TextBox 33"/>
-          <p:cNvSpPr txBox="1"/>
-          <p:nvPr/>
-        </p:nvSpPr>
-        <p:spPr>
-          <a:xfrm>
-            <a:off x="6373368" y="2889504"/>
-            <a:ext cx="5431536" cy="310896"/>
-          </a:xfrm>
-          <a:prstGeom prst="rect">
-            <a:avLst/>
-          </a:prstGeom>
-          <a:noFill/>
-        </p:spPr>
-        <p:txBody>
-          <a:bodyPr wrap="square">
-            <a:spAutoFit/>
-          </a:bodyPr>
-          <a:lstStyle/>
-          <a:p>
-            <a:pPr algn="l"/>
-            <a:r>
-              <a:rPr sz="1000" b="0" i="0">
-                <a:solidFill>
-                  <a:srgbClr val="1A1A1A"/>
-                </a:solidFill>
-              </a:rPr>
-              <a:t>• Manque d'énergie — s'entend même à travers le téléphone</a:t>
-            </a:r>
-          </a:p>
-        </p:txBody>
-      </p:sp>
-      <p:sp>
-        <p:nvSpPr>
-          <p:cNvPr id="35" name="Rectangle 34"/>
-          <p:cNvSpPr/>
-          <p:nvPr/>
-        </p:nvSpPr>
-        <p:spPr>
-          <a:xfrm>
-            <a:off x="274320" y="5504688"/>
-            <a:ext cx="11640312" cy="402336"/>
-          </a:xfrm>
-          <a:prstGeom prst="rect">
-            <a:avLst/>
-          </a:prstGeom>
-          <a:solidFill>
-            <a:srgbClr val="008080"/>
-          </a:solidFill>
-          <a:ln>
-            <a:noFill/>
-          </a:ln>
-        </p:spPr>
-        <p:style>
-          <a:lnRef idx="1">
-            <a:schemeClr val="accent1"/>
-          </a:lnRef>
-          <a:fillRef idx="3">
-            <a:schemeClr val="accent1"/>
-          </a:fillRef>
-          <a:effectRef idx="2">
-            <a:schemeClr val="accent1"/>
-          </a:effectRef>
-          <a:fontRef idx="minor">
-            <a:schemeClr val="lt1"/>
-          </a:fontRef>
-        </p:style>
-        <p:txBody>
-          <a:bodyPr rtlCol="0" anchor="ctr"/>
-          <a:lstStyle/>
-          <a:p>
-            <a:pPr algn="ctr"/>
-          </a:p>
-        </p:txBody>
-      </p:sp>
-      <p:sp>
-        <p:nvSpPr>
-          <p:cNvPr id="36" name="TextBox 35"/>
-          <p:cNvSpPr txBox="1"/>
-          <p:nvPr/>
-        </p:nvSpPr>
-        <p:spPr>
-          <a:xfrm>
-            <a:off x="411479" y="5577840"/>
-            <a:ext cx="11365992" cy="256032"/>
-          </a:xfrm>
-          <a:prstGeom prst="rect">
-            <a:avLst/>
-          </a:prstGeom>
-          <a:noFill/>
-        </p:spPr>
-        <p:txBody>
-          <a:bodyPr wrap="square">
-            <a:spAutoFit/>
-          </a:bodyPr>
-          <a:lstStyle/>
-          <a:p>
-            <a:pPr algn="l"/>
-            <a:r>
-              <a:rPr sz="1000" b="0" i="0">
-                <a:solidFill>
-                  <a:srgbClr val="FFFFFF"/>
-                </a:solidFill>
-              </a:rPr>
-              <a:t>Exercice : Lisez votre script à voix haute en souriant physiquement. Enregistrez-vous 60 secondes. Réécoutez. Qu'est-ce que vous changeriez ?</a:t>
+              <a:t>SHY-Performance  ×  FIDELIS  ×  UNICEF France</a:t>
             </a:r>
           </a:p>
         </p:txBody>
